--- a/public/PITCH_HORIZON_FARM.pptx
+++ b/public/PITCH_HORIZON_FARM.pptx
@@ -19,9 +19,17 @@
     <p:sldId id="267" r:id="rId13"/>
     <p:sldId id="268" r:id="rId14"/>
     <p:sldId id="269" r:id="rId15"/>
+    <p:sldId id="270" r:id="rId16"/>
+    <p:sldId id="271" r:id="rId17"/>
+    <p:sldId id="272" r:id="rId18"/>
+    <p:sldId id="273" r:id="rId19"/>
+    <p:sldId id="274" r:id="rId20"/>
+    <p:sldId id="275" r:id="rId21"/>
+    <p:sldId id="276" r:id="rId22"/>
+    <p:sldId id="277" r:id="rId23"/>
   </p:sldIdLst>
   <p:notesMasterIdLst>
-    <p:notesMasterId r:id="rId16"/>
+    <p:notesMasterId r:id="rId24"/>
   </p:notesMasterIdLst>
   <p:sldSz cx="9144000" cy="5143500"/>
   <p:notesSz cx="5143500" cy="9144000"/>
@@ -997,6 +1005,446 @@
 </p:notes>
 </file>
 
+<file path=ppt/notesSlides/notesSlide15.xml><?xml version="1.0" encoding="utf-8"?>
+<p:notes xmlns:a="http://schemas.openxmlformats.org/drawingml/2006/main" xmlns:r="http://schemas.openxmlformats.org/officeDocument/2006/relationships" xmlns:p="http://schemas.openxmlformats.org/presentationml/2006/main">
+  <p:cSld>
+    <p:spTree>
+      <p:nvGrpSpPr>
+        <p:cNvPr id="1" name=""/>
+        <p:cNvGrpSpPr/>
+        <p:nvPr/>
+      </p:nvGrpSpPr>
+      <p:grpSpPr>
+        <a:xfrm>
+          <a:off x="0" y="0"/>
+          <a:ext cx="0" cy="0"/>
+          <a:chOff x="0" y="0"/>
+          <a:chExt cx="0" cy="0"/>
+        </a:xfrm>
+      </p:grpSpPr>
+      <p:sp>
+        <p:nvSpPr>
+          <p:cNvPr id="2" name="Slide Image Placeholder 1"/>
+          <p:cNvSpPr>
+            <a:spLocks noGrp="1" noRot="1" noChangeAspect="1"/>
+          </p:cNvSpPr>
+          <p:nvPr>
+            <p:ph type="sldImg"/>
+          </p:nvPr>
+        </p:nvSpPr>
+        <p:spPr/>
+      </p:sp>
+      <p:sp>
+        <p:nvSpPr>
+          <p:cNvPr id="3" name="Notes Placeholder 2"/>
+          <p:cNvSpPr>
+            <a:spLocks noGrp="1"/>
+          </p:cNvSpPr>
+          <p:nvPr>
+            <p:ph type="body" idx="1"/>
+          </p:nvPr>
+        </p:nvSpPr>
+        <p:spPr/>
+        <p:txBody>
+          <a:bodyPr/>
+          <a:lstStyle/>
+          <a:p>
+            <a:r>
+              <a:rPr lang="en-US" dirty="0"/>
+              <a:t/>
+            </a:r>
+            <a:endParaRPr lang="en-US" dirty="0"/>
+          </a:p>
+        </p:txBody>
+      </p:sp>
+      <p:sp>
+        <p:nvSpPr>
+          <p:cNvPr id="4" name="Slide Number Placeholder 3"/>
+          <p:cNvSpPr>
+            <a:spLocks noGrp="1"/>
+          </p:cNvSpPr>
+          <p:nvPr>
+            <p:ph type="sldNum" sz="quarter" idx="10"/>
+          </p:nvPr>
+        </p:nvSpPr>
+        <p:spPr/>
+        <p:txBody>
+          <a:bodyPr/>
+          <a:lstStyle/>
+          <a:p>
+            <a:fld id="{F7021451-1387-4CA6-816F-3879F97B5CBC}" type="slidenum">
+              <a:rPr lang="en-US"/>
+              <a:t>15</a:t>
+            </a:fld>
+            <a:endParaRPr lang="en-US"/>
+          </a:p>
+        </p:txBody>
+      </p:sp>
+    </p:spTree>
+    <p:extLst>
+      <p:ext uri="{BB962C8B-B14F-4D97-AF65-F5344CB8AC3E}">
+        <p14:creationId xmlns:p14="http://schemas.microsoft.com/office/powerpoint/2010/main" val="1024086991"/>
+      </p:ext>
+    </p:extLst>
+  </p:cSld>
+  <p:clrMapOvr>
+    <a:masterClrMapping/>
+  </p:clrMapOvr>
+</p:notes>
+</file>
+
+<file path=ppt/notesSlides/notesSlide16.xml><?xml version="1.0" encoding="utf-8"?>
+<p:notes xmlns:a="http://schemas.openxmlformats.org/drawingml/2006/main" xmlns:r="http://schemas.openxmlformats.org/officeDocument/2006/relationships" xmlns:p="http://schemas.openxmlformats.org/presentationml/2006/main">
+  <p:cSld>
+    <p:spTree>
+      <p:nvGrpSpPr>
+        <p:cNvPr id="1" name=""/>
+        <p:cNvGrpSpPr/>
+        <p:nvPr/>
+      </p:nvGrpSpPr>
+      <p:grpSpPr>
+        <a:xfrm>
+          <a:off x="0" y="0"/>
+          <a:ext cx="0" cy="0"/>
+          <a:chOff x="0" y="0"/>
+          <a:chExt cx="0" cy="0"/>
+        </a:xfrm>
+      </p:grpSpPr>
+      <p:sp>
+        <p:nvSpPr>
+          <p:cNvPr id="2" name="Slide Image Placeholder 1"/>
+          <p:cNvSpPr>
+            <a:spLocks noGrp="1" noRot="1" noChangeAspect="1"/>
+          </p:cNvSpPr>
+          <p:nvPr>
+            <p:ph type="sldImg"/>
+          </p:nvPr>
+        </p:nvSpPr>
+        <p:spPr/>
+      </p:sp>
+      <p:sp>
+        <p:nvSpPr>
+          <p:cNvPr id="3" name="Notes Placeholder 2"/>
+          <p:cNvSpPr>
+            <a:spLocks noGrp="1"/>
+          </p:cNvSpPr>
+          <p:nvPr>
+            <p:ph type="body" idx="1"/>
+          </p:nvPr>
+        </p:nvSpPr>
+        <p:spPr/>
+        <p:txBody>
+          <a:bodyPr/>
+          <a:lstStyle/>
+          <a:p>
+            <a:r>
+              <a:rPr lang="en-US" dirty="0"/>
+              <a:t/>
+            </a:r>
+            <a:endParaRPr lang="en-US" dirty="0"/>
+          </a:p>
+        </p:txBody>
+      </p:sp>
+      <p:sp>
+        <p:nvSpPr>
+          <p:cNvPr id="4" name="Slide Number Placeholder 3"/>
+          <p:cNvSpPr>
+            <a:spLocks noGrp="1"/>
+          </p:cNvSpPr>
+          <p:nvPr>
+            <p:ph type="sldNum" sz="quarter" idx="10"/>
+          </p:nvPr>
+        </p:nvSpPr>
+        <p:spPr/>
+        <p:txBody>
+          <a:bodyPr/>
+          <a:lstStyle/>
+          <a:p>
+            <a:fld id="{F7021451-1387-4CA6-816F-3879F97B5CBC}" type="slidenum">
+              <a:rPr lang="en-US"/>
+              <a:t>16</a:t>
+            </a:fld>
+            <a:endParaRPr lang="en-US"/>
+          </a:p>
+        </p:txBody>
+      </p:sp>
+    </p:spTree>
+    <p:extLst>
+      <p:ext uri="{BB962C8B-B14F-4D97-AF65-F5344CB8AC3E}">
+        <p14:creationId xmlns:p14="http://schemas.microsoft.com/office/powerpoint/2010/main" val="1024086991"/>
+      </p:ext>
+    </p:extLst>
+  </p:cSld>
+  <p:clrMapOvr>
+    <a:masterClrMapping/>
+  </p:clrMapOvr>
+</p:notes>
+</file>
+
+<file path=ppt/notesSlides/notesSlide17.xml><?xml version="1.0" encoding="utf-8"?>
+<p:notes xmlns:a="http://schemas.openxmlformats.org/drawingml/2006/main" xmlns:r="http://schemas.openxmlformats.org/officeDocument/2006/relationships" xmlns:p="http://schemas.openxmlformats.org/presentationml/2006/main">
+  <p:cSld>
+    <p:spTree>
+      <p:nvGrpSpPr>
+        <p:cNvPr id="1" name=""/>
+        <p:cNvGrpSpPr/>
+        <p:nvPr/>
+      </p:nvGrpSpPr>
+      <p:grpSpPr>
+        <a:xfrm>
+          <a:off x="0" y="0"/>
+          <a:ext cx="0" cy="0"/>
+          <a:chOff x="0" y="0"/>
+          <a:chExt cx="0" cy="0"/>
+        </a:xfrm>
+      </p:grpSpPr>
+      <p:sp>
+        <p:nvSpPr>
+          <p:cNvPr id="2" name="Slide Image Placeholder 1"/>
+          <p:cNvSpPr>
+            <a:spLocks noGrp="1" noRot="1" noChangeAspect="1"/>
+          </p:cNvSpPr>
+          <p:nvPr>
+            <p:ph type="sldImg"/>
+          </p:nvPr>
+        </p:nvSpPr>
+        <p:spPr/>
+      </p:sp>
+      <p:sp>
+        <p:nvSpPr>
+          <p:cNvPr id="3" name="Notes Placeholder 2"/>
+          <p:cNvSpPr>
+            <a:spLocks noGrp="1"/>
+          </p:cNvSpPr>
+          <p:nvPr>
+            <p:ph type="body" idx="1"/>
+          </p:nvPr>
+        </p:nvSpPr>
+        <p:spPr/>
+        <p:txBody>
+          <a:bodyPr/>
+          <a:lstStyle/>
+          <a:p>
+            <a:r>
+              <a:rPr lang="en-US" dirty="0"/>
+              <a:t/>
+            </a:r>
+            <a:endParaRPr lang="en-US" dirty="0"/>
+          </a:p>
+        </p:txBody>
+      </p:sp>
+      <p:sp>
+        <p:nvSpPr>
+          <p:cNvPr id="4" name="Slide Number Placeholder 3"/>
+          <p:cNvSpPr>
+            <a:spLocks noGrp="1"/>
+          </p:cNvSpPr>
+          <p:nvPr>
+            <p:ph type="sldNum" sz="quarter" idx="10"/>
+          </p:nvPr>
+        </p:nvSpPr>
+        <p:spPr/>
+        <p:txBody>
+          <a:bodyPr/>
+          <a:lstStyle/>
+          <a:p>
+            <a:fld id="{F7021451-1387-4CA6-816F-3879F97B5CBC}" type="slidenum">
+              <a:rPr lang="en-US"/>
+              <a:t>17</a:t>
+            </a:fld>
+            <a:endParaRPr lang="en-US"/>
+          </a:p>
+        </p:txBody>
+      </p:sp>
+    </p:spTree>
+    <p:extLst>
+      <p:ext uri="{BB962C8B-B14F-4D97-AF65-F5344CB8AC3E}">
+        <p14:creationId xmlns:p14="http://schemas.microsoft.com/office/powerpoint/2010/main" val="1024086991"/>
+      </p:ext>
+    </p:extLst>
+  </p:cSld>
+  <p:clrMapOvr>
+    <a:masterClrMapping/>
+  </p:clrMapOvr>
+</p:notes>
+</file>
+
+<file path=ppt/notesSlides/notesSlide18.xml><?xml version="1.0" encoding="utf-8"?>
+<p:notes xmlns:a="http://schemas.openxmlformats.org/drawingml/2006/main" xmlns:r="http://schemas.openxmlformats.org/officeDocument/2006/relationships" xmlns:p="http://schemas.openxmlformats.org/presentationml/2006/main">
+  <p:cSld>
+    <p:spTree>
+      <p:nvGrpSpPr>
+        <p:cNvPr id="1" name=""/>
+        <p:cNvGrpSpPr/>
+        <p:nvPr/>
+      </p:nvGrpSpPr>
+      <p:grpSpPr>
+        <a:xfrm>
+          <a:off x="0" y="0"/>
+          <a:ext cx="0" cy="0"/>
+          <a:chOff x="0" y="0"/>
+          <a:chExt cx="0" cy="0"/>
+        </a:xfrm>
+      </p:grpSpPr>
+      <p:sp>
+        <p:nvSpPr>
+          <p:cNvPr id="2" name="Slide Image Placeholder 1"/>
+          <p:cNvSpPr>
+            <a:spLocks noGrp="1" noRot="1" noChangeAspect="1"/>
+          </p:cNvSpPr>
+          <p:nvPr>
+            <p:ph type="sldImg"/>
+          </p:nvPr>
+        </p:nvSpPr>
+        <p:spPr/>
+      </p:sp>
+      <p:sp>
+        <p:nvSpPr>
+          <p:cNvPr id="3" name="Notes Placeholder 2"/>
+          <p:cNvSpPr>
+            <a:spLocks noGrp="1"/>
+          </p:cNvSpPr>
+          <p:nvPr>
+            <p:ph type="body" idx="1"/>
+          </p:nvPr>
+        </p:nvSpPr>
+        <p:spPr/>
+        <p:txBody>
+          <a:bodyPr/>
+          <a:lstStyle/>
+          <a:p>
+            <a:r>
+              <a:rPr lang="en-US" dirty="0"/>
+              <a:t/>
+            </a:r>
+            <a:endParaRPr lang="en-US" dirty="0"/>
+          </a:p>
+        </p:txBody>
+      </p:sp>
+      <p:sp>
+        <p:nvSpPr>
+          <p:cNvPr id="4" name="Slide Number Placeholder 3"/>
+          <p:cNvSpPr>
+            <a:spLocks noGrp="1"/>
+          </p:cNvSpPr>
+          <p:nvPr>
+            <p:ph type="sldNum" sz="quarter" idx="10"/>
+          </p:nvPr>
+        </p:nvSpPr>
+        <p:spPr/>
+        <p:txBody>
+          <a:bodyPr/>
+          <a:lstStyle/>
+          <a:p>
+            <a:fld id="{F7021451-1387-4CA6-816F-3879F97B5CBC}" type="slidenum">
+              <a:rPr lang="en-US"/>
+              <a:t>18</a:t>
+            </a:fld>
+            <a:endParaRPr lang="en-US"/>
+          </a:p>
+        </p:txBody>
+      </p:sp>
+    </p:spTree>
+    <p:extLst>
+      <p:ext uri="{BB962C8B-B14F-4D97-AF65-F5344CB8AC3E}">
+        <p14:creationId xmlns:p14="http://schemas.microsoft.com/office/powerpoint/2010/main" val="1024086991"/>
+      </p:ext>
+    </p:extLst>
+  </p:cSld>
+  <p:clrMapOvr>
+    <a:masterClrMapping/>
+  </p:clrMapOvr>
+</p:notes>
+</file>
+
+<file path=ppt/notesSlides/notesSlide19.xml><?xml version="1.0" encoding="utf-8"?>
+<p:notes xmlns:a="http://schemas.openxmlformats.org/drawingml/2006/main" xmlns:r="http://schemas.openxmlformats.org/officeDocument/2006/relationships" xmlns:p="http://schemas.openxmlformats.org/presentationml/2006/main">
+  <p:cSld>
+    <p:spTree>
+      <p:nvGrpSpPr>
+        <p:cNvPr id="1" name=""/>
+        <p:cNvGrpSpPr/>
+        <p:nvPr/>
+      </p:nvGrpSpPr>
+      <p:grpSpPr>
+        <a:xfrm>
+          <a:off x="0" y="0"/>
+          <a:ext cx="0" cy="0"/>
+          <a:chOff x="0" y="0"/>
+          <a:chExt cx="0" cy="0"/>
+        </a:xfrm>
+      </p:grpSpPr>
+      <p:sp>
+        <p:nvSpPr>
+          <p:cNvPr id="2" name="Slide Image Placeholder 1"/>
+          <p:cNvSpPr>
+            <a:spLocks noGrp="1" noRot="1" noChangeAspect="1"/>
+          </p:cNvSpPr>
+          <p:nvPr>
+            <p:ph type="sldImg"/>
+          </p:nvPr>
+        </p:nvSpPr>
+        <p:spPr/>
+      </p:sp>
+      <p:sp>
+        <p:nvSpPr>
+          <p:cNvPr id="3" name="Notes Placeholder 2"/>
+          <p:cNvSpPr>
+            <a:spLocks noGrp="1"/>
+          </p:cNvSpPr>
+          <p:nvPr>
+            <p:ph type="body" idx="1"/>
+          </p:nvPr>
+        </p:nvSpPr>
+        <p:spPr/>
+        <p:txBody>
+          <a:bodyPr/>
+          <a:lstStyle/>
+          <a:p>
+            <a:r>
+              <a:rPr lang="en-US" dirty="0"/>
+              <a:t/>
+            </a:r>
+            <a:endParaRPr lang="en-US" dirty="0"/>
+          </a:p>
+        </p:txBody>
+      </p:sp>
+      <p:sp>
+        <p:nvSpPr>
+          <p:cNvPr id="4" name="Slide Number Placeholder 3"/>
+          <p:cNvSpPr>
+            <a:spLocks noGrp="1"/>
+          </p:cNvSpPr>
+          <p:nvPr>
+            <p:ph type="sldNum" sz="quarter" idx="10"/>
+          </p:nvPr>
+        </p:nvSpPr>
+        <p:spPr/>
+        <p:txBody>
+          <a:bodyPr/>
+          <a:lstStyle/>
+          <a:p>
+            <a:fld id="{F7021451-1387-4CA6-816F-3879F97B5CBC}" type="slidenum">
+              <a:rPr lang="en-US"/>
+              <a:t>19</a:t>
+            </a:fld>
+            <a:endParaRPr lang="en-US"/>
+          </a:p>
+        </p:txBody>
+      </p:sp>
+    </p:spTree>
+    <p:extLst>
+      <p:ext uri="{BB962C8B-B14F-4D97-AF65-F5344CB8AC3E}">
+        <p14:creationId xmlns:p14="http://schemas.microsoft.com/office/powerpoint/2010/main" val="1024086991"/>
+      </p:ext>
+    </p:extLst>
+  </p:cSld>
+  <p:clrMapOvr>
+    <a:masterClrMapping/>
+  </p:clrMapOvr>
+</p:notes>
+</file>
+
 <file path=ppt/notesSlides/notesSlide2.xml><?xml version="1.0" encoding="utf-8"?>
 <p:notes xmlns:a="http://schemas.openxmlformats.org/drawingml/2006/main" xmlns:r="http://schemas.openxmlformats.org/officeDocument/2006/relationships" xmlns:p="http://schemas.openxmlformats.org/presentationml/2006/main">
   <p:cSld>
@@ -1067,6 +1515,270 @@
             <a:fld id="{F7021451-1387-4CA6-816F-3879F97B5CBC}" type="slidenum">
               <a:rPr lang="en-US"/>
               <a:t>2</a:t>
+            </a:fld>
+            <a:endParaRPr lang="en-US"/>
+          </a:p>
+        </p:txBody>
+      </p:sp>
+    </p:spTree>
+    <p:extLst>
+      <p:ext uri="{BB962C8B-B14F-4D97-AF65-F5344CB8AC3E}">
+        <p14:creationId xmlns:p14="http://schemas.microsoft.com/office/powerpoint/2010/main" val="1024086991"/>
+      </p:ext>
+    </p:extLst>
+  </p:cSld>
+  <p:clrMapOvr>
+    <a:masterClrMapping/>
+  </p:clrMapOvr>
+</p:notes>
+</file>
+
+<file path=ppt/notesSlides/notesSlide20.xml><?xml version="1.0" encoding="utf-8"?>
+<p:notes xmlns:a="http://schemas.openxmlformats.org/drawingml/2006/main" xmlns:r="http://schemas.openxmlformats.org/officeDocument/2006/relationships" xmlns:p="http://schemas.openxmlformats.org/presentationml/2006/main">
+  <p:cSld>
+    <p:spTree>
+      <p:nvGrpSpPr>
+        <p:cNvPr id="1" name=""/>
+        <p:cNvGrpSpPr/>
+        <p:nvPr/>
+      </p:nvGrpSpPr>
+      <p:grpSpPr>
+        <a:xfrm>
+          <a:off x="0" y="0"/>
+          <a:ext cx="0" cy="0"/>
+          <a:chOff x="0" y="0"/>
+          <a:chExt cx="0" cy="0"/>
+        </a:xfrm>
+      </p:grpSpPr>
+      <p:sp>
+        <p:nvSpPr>
+          <p:cNvPr id="2" name="Slide Image Placeholder 1"/>
+          <p:cNvSpPr>
+            <a:spLocks noGrp="1" noRot="1" noChangeAspect="1"/>
+          </p:cNvSpPr>
+          <p:nvPr>
+            <p:ph type="sldImg"/>
+          </p:nvPr>
+        </p:nvSpPr>
+        <p:spPr/>
+      </p:sp>
+      <p:sp>
+        <p:nvSpPr>
+          <p:cNvPr id="3" name="Notes Placeholder 2"/>
+          <p:cNvSpPr>
+            <a:spLocks noGrp="1"/>
+          </p:cNvSpPr>
+          <p:nvPr>
+            <p:ph type="body" idx="1"/>
+          </p:nvPr>
+        </p:nvSpPr>
+        <p:spPr/>
+        <p:txBody>
+          <a:bodyPr/>
+          <a:lstStyle/>
+          <a:p>
+            <a:r>
+              <a:rPr lang="en-US" dirty="0"/>
+              <a:t/>
+            </a:r>
+            <a:endParaRPr lang="en-US" dirty="0"/>
+          </a:p>
+        </p:txBody>
+      </p:sp>
+      <p:sp>
+        <p:nvSpPr>
+          <p:cNvPr id="4" name="Slide Number Placeholder 3"/>
+          <p:cNvSpPr>
+            <a:spLocks noGrp="1"/>
+          </p:cNvSpPr>
+          <p:nvPr>
+            <p:ph type="sldNum" sz="quarter" idx="10"/>
+          </p:nvPr>
+        </p:nvSpPr>
+        <p:spPr/>
+        <p:txBody>
+          <a:bodyPr/>
+          <a:lstStyle/>
+          <a:p>
+            <a:fld id="{F7021451-1387-4CA6-816F-3879F97B5CBC}" type="slidenum">
+              <a:rPr lang="en-US"/>
+              <a:t>20</a:t>
+            </a:fld>
+            <a:endParaRPr lang="en-US"/>
+          </a:p>
+        </p:txBody>
+      </p:sp>
+    </p:spTree>
+    <p:extLst>
+      <p:ext uri="{BB962C8B-B14F-4D97-AF65-F5344CB8AC3E}">
+        <p14:creationId xmlns:p14="http://schemas.microsoft.com/office/powerpoint/2010/main" val="1024086991"/>
+      </p:ext>
+    </p:extLst>
+  </p:cSld>
+  <p:clrMapOvr>
+    <a:masterClrMapping/>
+  </p:clrMapOvr>
+</p:notes>
+</file>
+
+<file path=ppt/notesSlides/notesSlide21.xml><?xml version="1.0" encoding="utf-8"?>
+<p:notes xmlns:a="http://schemas.openxmlformats.org/drawingml/2006/main" xmlns:r="http://schemas.openxmlformats.org/officeDocument/2006/relationships" xmlns:p="http://schemas.openxmlformats.org/presentationml/2006/main">
+  <p:cSld>
+    <p:spTree>
+      <p:nvGrpSpPr>
+        <p:cNvPr id="1" name=""/>
+        <p:cNvGrpSpPr/>
+        <p:nvPr/>
+      </p:nvGrpSpPr>
+      <p:grpSpPr>
+        <a:xfrm>
+          <a:off x="0" y="0"/>
+          <a:ext cx="0" cy="0"/>
+          <a:chOff x="0" y="0"/>
+          <a:chExt cx="0" cy="0"/>
+        </a:xfrm>
+      </p:grpSpPr>
+      <p:sp>
+        <p:nvSpPr>
+          <p:cNvPr id="2" name="Slide Image Placeholder 1"/>
+          <p:cNvSpPr>
+            <a:spLocks noGrp="1" noRot="1" noChangeAspect="1"/>
+          </p:cNvSpPr>
+          <p:nvPr>
+            <p:ph type="sldImg"/>
+          </p:nvPr>
+        </p:nvSpPr>
+        <p:spPr/>
+      </p:sp>
+      <p:sp>
+        <p:nvSpPr>
+          <p:cNvPr id="3" name="Notes Placeholder 2"/>
+          <p:cNvSpPr>
+            <a:spLocks noGrp="1"/>
+          </p:cNvSpPr>
+          <p:nvPr>
+            <p:ph type="body" idx="1"/>
+          </p:nvPr>
+        </p:nvSpPr>
+        <p:spPr/>
+        <p:txBody>
+          <a:bodyPr/>
+          <a:lstStyle/>
+          <a:p>
+            <a:r>
+              <a:rPr lang="en-US" dirty="0"/>
+              <a:t/>
+            </a:r>
+            <a:endParaRPr lang="en-US" dirty="0"/>
+          </a:p>
+        </p:txBody>
+      </p:sp>
+      <p:sp>
+        <p:nvSpPr>
+          <p:cNvPr id="4" name="Slide Number Placeholder 3"/>
+          <p:cNvSpPr>
+            <a:spLocks noGrp="1"/>
+          </p:cNvSpPr>
+          <p:nvPr>
+            <p:ph type="sldNum" sz="quarter" idx="10"/>
+          </p:nvPr>
+        </p:nvSpPr>
+        <p:spPr/>
+        <p:txBody>
+          <a:bodyPr/>
+          <a:lstStyle/>
+          <a:p>
+            <a:fld id="{F7021451-1387-4CA6-816F-3879F97B5CBC}" type="slidenum">
+              <a:rPr lang="en-US"/>
+              <a:t>21</a:t>
+            </a:fld>
+            <a:endParaRPr lang="en-US"/>
+          </a:p>
+        </p:txBody>
+      </p:sp>
+    </p:spTree>
+    <p:extLst>
+      <p:ext uri="{BB962C8B-B14F-4D97-AF65-F5344CB8AC3E}">
+        <p14:creationId xmlns:p14="http://schemas.microsoft.com/office/powerpoint/2010/main" val="1024086991"/>
+      </p:ext>
+    </p:extLst>
+  </p:cSld>
+  <p:clrMapOvr>
+    <a:masterClrMapping/>
+  </p:clrMapOvr>
+</p:notes>
+</file>
+
+<file path=ppt/notesSlides/notesSlide22.xml><?xml version="1.0" encoding="utf-8"?>
+<p:notes xmlns:a="http://schemas.openxmlformats.org/drawingml/2006/main" xmlns:r="http://schemas.openxmlformats.org/officeDocument/2006/relationships" xmlns:p="http://schemas.openxmlformats.org/presentationml/2006/main">
+  <p:cSld>
+    <p:spTree>
+      <p:nvGrpSpPr>
+        <p:cNvPr id="1" name=""/>
+        <p:cNvGrpSpPr/>
+        <p:nvPr/>
+      </p:nvGrpSpPr>
+      <p:grpSpPr>
+        <a:xfrm>
+          <a:off x="0" y="0"/>
+          <a:ext cx="0" cy="0"/>
+          <a:chOff x="0" y="0"/>
+          <a:chExt cx="0" cy="0"/>
+        </a:xfrm>
+      </p:grpSpPr>
+      <p:sp>
+        <p:nvSpPr>
+          <p:cNvPr id="2" name="Slide Image Placeholder 1"/>
+          <p:cNvSpPr>
+            <a:spLocks noGrp="1" noRot="1" noChangeAspect="1"/>
+          </p:cNvSpPr>
+          <p:nvPr>
+            <p:ph type="sldImg"/>
+          </p:nvPr>
+        </p:nvSpPr>
+        <p:spPr/>
+      </p:sp>
+      <p:sp>
+        <p:nvSpPr>
+          <p:cNvPr id="3" name="Notes Placeholder 2"/>
+          <p:cNvSpPr>
+            <a:spLocks noGrp="1"/>
+          </p:cNvSpPr>
+          <p:nvPr>
+            <p:ph type="body" idx="1"/>
+          </p:nvPr>
+        </p:nvSpPr>
+        <p:spPr/>
+        <p:txBody>
+          <a:bodyPr/>
+          <a:lstStyle/>
+          <a:p>
+            <a:r>
+              <a:rPr lang="en-US" dirty="0"/>
+              <a:t/>
+            </a:r>
+            <a:endParaRPr lang="en-US" dirty="0"/>
+          </a:p>
+        </p:txBody>
+      </p:sp>
+      <p:sp>
+        <p:nvSpPr>
+          <p:cNvPr id="4" name="Slide Number Placeholder 3"/>
+          <p:cNvSpPr>
+            <a:spLocks noGrp="1"/>
+          </p:cNvSpPr>
+          <p:nvPr>
+            <p:ph type="sldNum" sz="quarter" idx="10"/>
+          </p:nvPr>
+        </p:nvSpPr>
+        <p:spPr/>
+        <p:txBody>
+          <a:bodyPr/>
+          <a:lstStyle/>
+          <a:p>
+            <a:fld id="{F7021451-1387-4CA6-816F-3879F97B5CBC}" type="slidenum">
+              <a:rPr lang="en-US"/>
+              <a:t>22</a:t>
             </a:fld>
             <a:endParaRPr lang="en-US"/>
           </a:p>
@@ -2086,7 +2798,7 @@
                   <a:srgbClr val="B8954A"/>
                 </a:solidFill>
               </a:rPr>
-              <a:t>ERP agricole intégré</a:t>
+              <a:t>ERP agricole intégré · 17 modules</a:t>
             </a:r>
             <a:endParaRPr lang="en-US" sz="1100" dirty="0"/>
           </a:p>
@@ -2178,7 +2890,7 @@
                   <a:srgbClr val="A7D4B5"/>
                 </a:solidFill>
               </a:rPr>
-              <a:t>Pilotez élevage, cultures, stock, ventes et finances — avec capteurs connectés et un assistant qui parle votre langue du terrain.</a:t>
+              <a:t>L'unique plateforme qui relie élevage, cultures, stock, ventes, finance, capteurs IoT, assistant IA, BP investisseur et traçabilité — pour piloter et faire croître votre exploitation.</a:t>
             </a:r>
             <a:endParaRPr lang="en-US" sz="1400" dirty="0"/>
           </a:p>
@@ -2214,7 +2926,7 @@
                   <a:srgbClr val="B8954A"/>
                 </a:solidFill>
               </a:rPr>
-              <a:t>Pitch client · 2026</a:t>
+              <a:t>Pitch commercial · 2026</a:t>
             </a:r>
             <a:endParaRPr lang="en-US" sz="900" dirty="0"/>
           </a:p>
@@ -2306,7 +3018,7 @@
                   <a:srgbClr val="8A7456"/>
                 </a:solidFill>
               </a:rPr>
-              <a:t>10 / 14</a:t>
+              <a:t>10 / 22</a:t>
             </a:r>
             <a:endParaRPr lang="en-US" sz="800" dirty="0"/>
           </a:p>
@@ -2367,7 +3079,7 @@
                   <a:srgbClr val="9A6B12"/>
                 </a:solidFill>
               </a:rPr>
-              <a:t>Cibles</a:t>
+              <a:t>Finance &amp; Pilotage</a:t>
             </a:r>
             <a:endParaRPr lang="en-US" sz="1000" dirty="0"/>
           </a:p>
@@ -2406,7 +3118,7 @@
                 <a:ea typeface="Georgia" pitchFamily="34" charset="-122"/>
                 <a:cs typeface="Georgia" pitchFamily="34" charset="-120"/>
               </a:rPr>
-              <a:t>Pour qui ?</a:t>
+              <a:t>Trésorerie et rentabilité réelles</a:t>
             </a:r>
             <a:endParaRPr lang="en-US" sz="2800" dirty="0"/>
           </a:p>
@@ -2414,595 +3126,83 @@
       </p:sp>
       <p:sp>
         <p:nvSpPr>
-          <p:cNvPr id="7" name="Shape 4"/>
+          <p:cNvPr id="7" name="Text 4"/>
           <p:cNvSpPr/>
           <p:nvPr/>
         </p:nvSpPr>
         <p:spPr>
           <a:xfrm>
             <a:off x="548640" y="1920240"/>
-            <a:ext cx="2606040" cy="1051560"/>
-          </a:xfrm>
-          <a:prstGeom prst="roundRect">
-            <a:avLst>
-              <a:gd name="adj" fmla="val 8696"/>
-            </a:avLst>
-          </a:prstGeom>
-          <a:solidFill>
-            <a:srgbClr val="FFFFFF"/>
-          </a:solidFill>
-          <a:ln w="12700">
-            <a:solidFill>
-              <a:srgbClr val="EADCC2"/>
-            </a:solidFill>
-            <a:prstDash val="solid"/>
-          </a:ln>
-        </p:spPr>
-      </p:sp>
-      <p:sp>
-        <p:nvSpPr>
-          <p:cNvPr id="8" name="Text 5"/>
-          <p:cNvSpPr/>
-          <p:nvPr/>
-        </p:nvSpPr>
-        <p:spPr>
-          <a:xfrm>
-            <a:off x="640080" y="2057400"/>
-            <a:ext cx="2423160" cy="274320"/>
-          </a:xfrm>
-          <a:prstGeom prst="rect">
-            <a:avLst/>
-          </a:prstGeom>
-          <a:noFill/>
-          <a:ln/>
-        </p:spPr>
-        <p:txBody>
-          <a:bodyPr wrap="square" rtlCol="0" anchor="ctr"/>
-          <a:lstStyle/>
-          <a:p>
-            <a:pPr algn="ctr" indent="0" marL="0">
-              <a:buNone/>
-            </a:pPr>
-            <a:r>
-              <a:rPr lang="en-US" sz="1100" b="1" dirty="0">
-                <a:solidFill>
-                  <a:srgbClr val="052E16"/>
-                </a:solidFill>
-              </a:rPr>
-              <a:t>Aviculteur</a:t>
-            </a:r>
-            <a:endParaRPr lang="en-US" sz="1100" dirty="0"/>
-          </a:p>
-        </p:txBody>
-      </p:sp>
-      <p:sp>
-        <p:nvSpPr>
-          <p:cNvPr id="9" name="Text 6"/>
-          <p:cNvSpPr/>
-          <p:nvPr/>
-        </p:nvSpPr>
-        <p:spPr>
-          <a:xfrm>
-            <a:off x="640080" y="2377440"/>
-            <a:ext cx="2423160" cy="457200"/>
-          </a:xfrm>
-          <a:prstGeom prst="rect">
-            <a:avLst/>
-          </a:prstGeom>
-          <a:noFill/>
-          <a:ln/>
-        </p:spPr>
-        <p:txBody>
-          <a:bodyPr wrap="square" rtlCol="0" anchor="ctr"/>
-          <a:lstStyle/>
-          <a:p>
-            <a:pPr algn="ctr" indent="0" marL="0">
-              <a:buNone/>
-            </a:pPr>
-            <a:r>
-              <a:rPr lang="en-US" sz="800" dirty="0">
-                <a:solidFill>
-                  <a:srgbClr val="8A7456"/>
-                </a:solidFill>
-              </a:rPr>
-              <a:t>Chair, ponte, lots, œufs</a:t>
-            </a:r>
-            <a:endParaRPr lang="en-US" sz="800" dirty="0"/>
-          </a:p>
-        </p:txBody>
-      </p:sp>
-      <p:sp>
-        <p:nvSpPr>
-          <p:cNvPr id="10" name="Shape 7"/>
-          <p:cNvSpPr/>
-          <p:nvPr/>
-        </p:nvSpPr>
-        <p:spPr>
-          <a:xfrm>
-            <a:off x="3383280" y="1920240"/>
-            <a:ext cx="2606040" cy="1051560"/>
-          </a:xfrm>
-          <a:prstGeom prst="roundRect">
-            <a:avLst>
-              <a:gd name="adj" fmla="val 8696"/>
-            </a:avLst>
-          </a:prstGeom>
-          <a:solidFill>
-            <a:srgbClr val="FFFFFF"/>
-          </a:solidFill>
-          <a:ln w="12700">
-            <a:solidFill>
-              <a:srgbClr val="EADCC2"/>
-            </a:solidFill>
-            <a:prstDash val="solid"/>
-          </a:ln>
-        </p:spPr>
-      </p:sp>
-      <p:sp>
-        <p:nvSpPr>
-          <p:cNvPr id="11" name="Text 8"/>
-          <p:cNvSpPr/>
-          <p:nvPr/>
-        </p:nvSpPr>
-        <p:spPr>
-          <a:xfrm>
-            <a:off x="3474720" y="2057400"/>
-            <a:ext cx="2423160" cy="274320"/>
-          </a:xfrm>
-          <a:prstGeom prst="rect">
-            <a:avLst/>
-          </a:prstGeom>
-          <a:noFill/>
-          <a:ln/>
-        </p:spPr>
-        <p:txBody>
-          <a:bodyPr wrap="square" rtlCol="0" anchor="ctr"/>
-          <a:lstStyle/>
-          <a:p>
-            <a:pPr algn="ctr" indent="0" marL="0">
-              <a:buNone/>
-            </a:pPr>
-            <a:r>
-              <a:rPr lang="en-US" sz="1100" b="1" dirty="0">
-                <a:solidFill>
-                  <a:srgbClr val="052E16"/>
-                </a:solidFill>
-              </a:rPr>
-              <a:t>Éleveur</a:t>
-            </a:r>
-            <a:endParaRPr lang="en-US" sz="1100" dirty="0"/>
-          </a:p>
-        </p:txBody>
-      </p:sp>
-      <p:sp>
-        <p:nvSpPr>
-          <p:cNvPr id="12" name="Text 9"/>
-          <p:cNvSpPr/>
-          <p:nvPr/>
-        </p:nvSpPr>
-        <p:spPr>
-          <a:xfrm>
-            <a:off x="3474720" y="2377440"/>
-            <a:ext cx="2423160" cy="457200"/>
-          </a:xfrm>
-          <a:prstGeom prst="rect">
-            <a:avLst/>
-          </a:prstGeom>
-          <a:noFill/>
-          <a:ln/>
-        </p:spPr>
-        <p:txBody>
-          <a:bodyPr wrap="square" rtlCol="0" anchor="ctr"/>
-          <a:lstStyle/>
-          <a:p>
-            <a:pPr algn="ctr" indent="0" marL="0">
-              <a:buNone/>
-            </a:pPr>
-            <a:r>
-              <a:rPr lang="en-US" sz="800" dirty="0">
-                <a:solidFill>
-                  <a:srgbClr val="8A7456"/>
-                </a:solidFill>
-              </a:rPr>
-              <a:t>Bovins, ovins, caprins</a:t>
-            </a:r>
-            <a:endParaRPr lang="en-US" sz="800" dirty="0"/>
-          </a:p>
-        </p:txBody>
-      </p:sp>
-      <p:sp>
-        <p:nvSpPr>
-          <p:cNvPr id="13" name="Shape 10"/>
-          <p:cNvSpPr/>
-          <p:nvPr/>
-        </p:nvSpPr>
-        <p:spPr>
-          <a:xfrm>
-            <a:off x="6217920" y="1920240"/>
-            <a:ext cx="2606040" cy="1051560"/>
-          </a:xfrm>
-          <a:prstGeom prst="roundRect">
-            <a:avLst>
-              <a:gd name="adj" fmla="val 8696"/>
-            </a:avLst>
-          </a:prstGeom>
-          <a:solidFill>
-            <a:srgbClr val="FFFFFF"/>
-          </a:solidFill>
-          <a:ln w="12700">
-            <a:solidFill>
-              <a:srgbClr val="EADCC2"/>
-            </a:solidFill>
-            <a:prstDash val="solid"/>
-          </a:ln>
-        </p:spPr>
-      </p:sp>
-      <p:sp>
-        <p:nvSpPr>
-          <p:cNvPr id="14" name="Text 11"/>
-          <p:cNvSpPr/>
-          <p:nvPr/>
-        </p:nvSpPr>
-        <p:spPr>
-          <a:xfrm>
-            <a:off x="6309360" y="2057400"/>
-            <a:ext cx="2423160" cy="274320"/>
-          </a:xfrm>
-          <a:prstGeom prst="rect">
-            <a:avLst/>
-          </a:prstGeom>
-          <a:noFill/>
-          <a:ln/>
-        </p:spPr>
-        <p:txBody>
-          <a:bodyPr wrap="square" rtlCol="0" anchor="ctr"/>
-          <a:lstStyle/>
-          <a:p>
-            <a:pPr algn="ctr" indent="0" marL="0">
-              <a:buNone/>
-            </a:pPr>
-            <a:r>
-              <a:rPr lang="en-US" sz="1100" b="1" dirty="0">
-                <a:solidFill>
-                  <a:srgbClr val="052E16"/>
-                </a:solidFill>
-              </a:rPr>
-              <a:t>Maraîcher</a:t>
-            </a:r>
-            <a:endParaRPr lang="en-US" sz="1100" dirty="0"/>
-          </a:p>
-        </p:txBody>
-      </p:sp>
-      <p:sp>
-        <p:nvSpPr>
-          <p:cNvPr id="15" name="Text 12"/>
-          <p:cNvSpPr/>
-          <p:nvPr/>
-        </p:nvSpPr>
-        <p:spPr>
-          <a:xfrm>
-            <a:off x="6309360" y="2377440"/>
-            <a:ext cx="2423160" cy="457200"/>
-          </a:xfrm>
-          <a:prstGeom prst="rect">
-            <a:avLst/>
-          </a:prstGeom>
-          <a:noFill/>
-          <a:ln/>
-        </p:spPr>
-        <p:txBody>
-          <a:bodyPr wrap="square" rtlCol="0" anchor="ctr"/>
-          <a:lstStyle/>
-          <a:p>
-            <a:pPr algn="ctr" indent="0" marL="0">
-              <a:buNone/>
-            </a:pPr>
-            <a:r>
-              <a:rPr lang="en-US" sz="800" dirty="0">
-                <a:solidFill>
-                  <a:srgbClr val="8A7456"/>
-                </a:solidFill>
-              </a:rPr>
-              <a:t>Parcelles, irrigation, capteurs</a:t>
-            </a:r>
-            <a:endParaRPr lang="en-US" sz="800" dirty="0"/>
-          </a:p>
-        </p:txBody>
-      </p:sp>
-      <p:sp>
-        <p:nvSpPr>
-          <p:cNvPr id="16" name="Shape 13"/>
-          <p:cNvSpPr/>
-          <p:nvPr/>
-        </p:nvSpPr>
-        <p:spPr>
-          <a:xfrm>
-            <a:off x="548640" y="3154680"/>
-            <a:ext cx="2606040" cy="1051560"/>
-          </a:xfrm>
-          <a:prstGeom prst="roundRect">
-            <a:avLst>
-              <a:gd name="adj" fmla="val 8696"/>
-            </a:avLst>
-          </a:prstGeom>
-          <a:solidFill>
-            <a:srgbClr val="FFFFFF"/>
-          </a:solidFill>
-          <a:ln w="12700">
-            <a:solidFill>
-              <a:srgbClr val="EADCC2"/>
-            </a:solidFill>
-            <a:prstDash val="solid"/>
-          </a:ln>
-        </p:spPr>
-      </p:sp>
-      <p:sp>
-        <p:nvSpPr>
-          <p:cNvPr id="17" name="Text 14"/>
-          <p:cNvSpPr/>
-          <p:nvPr/>
-        </p:nvSpPr>
-        <p:spPr>
-          <a:xfrm>
-            <a:off x="640080" y="3291840"/>
-            <a:ext cx="2423160" cy="274320"/>
-          </a:xfrm>
-          <a:prstGeom prst="rect">
-            <a:avLst/>
-          </a:prstGeom>
-          <a:noFill/>
-          <a:ln/>
-        </p:spPr>
-        <p:txBody>
-          <a:bodyPr wrap="square" rtlCol="0" anchor="ctr"/>
-          <a:lstStyle/>
-          <a:p>
-            <a:pPr algn="ctr" indent="0" marL="0">
-              <a:buNone/>
-            </a:pPr>
-            <a:r>
-              <a:rPr lang="en-US" sz="1100" b="1" dirty="0">
-                <a:solidFill>
-                  <a:srgbClr val="052E16"/>
-                </a:solidFill>
-              </a:rPr>
-              <a:t>Mixte</a:t>
-            </a:r>
-            <a:endParaRPr lang="en-US" sz="1100" dirty="0"/>
-          </a:p>
-        </p:txBody>
-      </p:sp>
-      <p:sp>
-        <p:nvSpPr>
-          <p:cNvPr id="18" name="Text 15"/>
-          <p:cNvSpPr/>
-          <p:nvPr/>
-        </p:nvSpPr>
-        <p:spPr>
-          <a:xfrm>
-            <a:off x="640080" y="3611880"/>
-            <a:ext cx="2423160" cy="457200"/>
-          </a:xfrm>
-          <a:prstGeom prst="rect">
-            <a:avLst/>
-          </a:prstGeom>
-          <a:noFill/>
-          <a:ln/>
-        </p:spPr>
-        <p:txBody>
-          <a:bodyPr wrap="square" rtlCol="0" anchor="ctr"/>
-          <a:lstStyle/>
-          <a:p>
-            <a:pPr algn="ctr" indent="0" marL="0">
-              <a:buNone/>
-            </a:pPr>
-            <a:r>
-              <a:rPr lang="en-US" sz="800" dirty="0">
-                <a:solidFill>
-                  <a:srgbClr val="8A7456"/>
-                </a:solidFill>
-              </a:rPr>
-              <a:t>Élevage + cultures</a:t>
-            </a:r>
-            <a:endParaRPr lang="en-US" sz="800" dirty="0"/>
-          </a:p>
-        </p:txBody>
-      </p:sp>
-      <p:sp>
-        <p:nvSpPr>
-          <p:cNvPr id="19" name="Shape 16"/>
-          <p:cNvSpPr/>
-          <p:nvPr/>
-        </p:nvSpPr>
-        <p:spPr>
-          <a:xfrm>
-            <a:off x="3383280" y="3154680"/>
-            <a:ext cx="2606040" cy="1051560"/>
-          </a:xfrm>
-          <a:prstGeom prst="roundRect">
-            <a:avLst>
-              <a:gd name="adj" fmla="val 8696"/>
-            </a:avLst>
-          </a:prstGeom>
-          <a:solidFill>
-            <a:srgbClr val="FFFFFF"/>
-          </a:solidFill>
-          <a:ln w="12700">
-            <a:solidFill>
-              <a:srgbClr val="EADCC2"/>
-            </a:solidFill>
-            <a:prstDash val="solid"/>
-          </a:ln>
-        </p:spPr>
-      </p:sp>
-      <p:sp>
-        <p:nvSpPr>
-          <p:cNvPr id="20" name="Text 17"/>
-          <p:cNvSpPr/>
-          <p:nvPr/>
-        </p:nvSpPr>
-        <p:spPr>
-          <a:xfrm>
-            <a:off x="3474720" y="3291840"/>
-            <a:ext cx="2423160" cy="274320"/>
-          </a:xfrm>
-          <a:prstGeom prst="rect">
-            <a:avLst/>
-          </a:prstGeom>
-          <a:noFill/>
-          <a:ln/>
-        </p:spPr>
-        <p:txBody>
-          <a:bodyPr wrap="square" rtlCol="0" anchor="ctr"/>
-          <a:lstStyle/>
-          <a:p>
-            <a:pPr algn="ctr" indent="0" marL="0">
-              <a:buNone/>
-            </a:pPr>
-            <a:r>
-              <a:rPr lang="en-US" sz="1100" b="1" dirty="0">
-                <a:solidFill>
-                  <a:srgbClr val="052E16"/>
-                </a:solidFill>
-              </a:rPr>
-              <a:t>Coopérative</a:t>
-            </a:r>
-            <a:endParaRPr lang="en-US" sz="1100" dirty="0"/>
-          </a:p>
-        </p:txBody>
-      </p:sp>
-      <p:sp>
-        <p:nvSpPr>
-          <p:cNvPr id="21" name="Text 18"/>
-          <p:cNvSpPr/>
-          <p:nvPr/>
-        </p:nvSpPr>
-        <p:spPr>
-          <a:xfrm>
-            <a:off x="3474720" y="3611880"/>
-            <a:ext cx="2423160" cy="457200"/>
-          </a:xfrm>
-          <a:prstGeom prst="rect">
-            <a:avLst/>
-          </a:prstGeom>
-          <a:noFill/>
-          <a:ln/>
-        </p:spPr>
-        <p:txBody>
-          <a:bodyPr wrap="square" rtlCol="0" anchor="ctr"/>
-          <a:lstStyle/>
-          <a:p>
-            <a:pPr algn="ctr" indent="0" marL="0">
-              <a:buNone/>
-            </a:pPr>
-            <a:r>
-              <a:rPr lang="en-US" sz="800" dirty="0">
-                <a:solidFill>
-                  <a:srgbClr val="8A7456"/>
-                </a:solidFill>
-              </a:rPr>
-              <a:t>Multi-producteurs</a:t>
-            </a:r>
-            <a:endParaRPr lang="en-US" sz="800" dirty="0"/>
-          </a:p>
-        </p:txBody>
-      </p:sp>
-      <p:sp>
-        <p:nvSpPr>
-          <p:cNvPr id="22" name="Shape 19"/>
-          <p:cNvSpPr/>
-          <p:nvPr/>
-        </p:nvSpPr>
-        <p:spPr>
-          <a:xfrm>
-            <a:off x="6217920" y="3154680"/>
-            <a:ext cx="2606040" cy="1051560"/>
-          </a:xfrm>
-          <a:prstGeom prst="roundRect">
-            <a:avLst>
-              <a:gd name="adj" fmla="val 8696"/>
-            </a:avLst>
-          </a:prstGeom>
-          <a:solidFill>
-            <a:srgbClr val="FFFFFF"/>
-          </a:solidFill>
-          <a:ln w="12700">
-            <a:solidFill>
-              <a:srgbClr val="EADCC2"/>
-            </a:solidFill>
-            <a:prstDash val="solid"/>
-          </a:ln>
-        </p:spPr>
-      </p:sp>
-      <p:sp>
-        <p:nvSpPr>
-          <p:cNvPr id="23" name="Text 20"/>
-          <p:cNvSpPr/>
-          <p:nvPr/>
-        </p:nvSpPr>
-        <p:spPr>
-          <a:xfrm>
-            <a:off x="6309360" y="3291840"/>
-            <a:ext cx="2423160" cy="274320"/>
-          </a:xfrm>
-          <a:prstGeom prst="rect">
-            <a:avLst/>
-          </a:prstGeom>
-          <a:noFill/>
-          <a:ln/>
-        </p:spPr>
-        <p:txBody>
-          <a:bodyPr wrap="square" rtlCol="0" anchor="ctr"/>
-          <a:lstStyle/>
-          <a:p>
-            <a:pPr algn="ctr" indent="0" marL="0">
-              <a:buNone/>
-            </a:pPr>
-            <a:r>
-              <a:rPr lang="en-US" sz="1100" b="1" dirty="0">
-                <a:solidFill>
-                  <a:srgbClr val="052E16"/>
-                </a:solidFill>
-              </a:rPr>
-              <a:t>Investisseur</a:t>
-            </a:r>
-            <a:endParaRPr lang="en-US" sz="1100" dirty="0"/>
-          </a:p>
-        </p:txBody>
-      </p:sp>
-      <p:sp>
-        <p:nvSpPr>
-          <p:cNvPr id="24" name="Text 21"/>
-          <p:cNvSpPr/>
-          <p:nvPr/>
-        </p:nvSpPr>
-        <p:spPr>
-          <a:xfrm>
-            <a:off x="6309360" y="3611880"/>
-            <a:ext cx="2423160" cy="457200"/>
-          </a:xfrm>
-          <a:prstGeom prst="rect">
-            <a:avLst/>
-          </a:prstGeom>
-          <a:noFill/>
-          <a:ln/>
-        </p:spPr>
-        <p:txBody>
-          <a:bodyPr wrap="square" rtlCol="0" anchor="ctr"/>
-          <a:lstStyle/>
-          <a:p>
-            <a:pPr algn="ctr" indent="0" marL="0">
-              <a:buNone/>
-            </a:pPr>
-            <a:r>
-              <a:rPr lang="en-US" sz="800" dirty="0">
-                <a:solidFill>
-                  <a:srgbClr val="8A7456"/>
-                </a:solidFill>
-              </a:rPr>
-              <a:t>Traçabilité, indicateurs</a:t>
-            </a:r>
-            <a:endParaRPr lang="en-US" sz="800" dirty="0"/>
+            <a:ext cx="8046720" cy="2560320"/>
+          </a:xfrm>
+          <a:prstGeom prst="rect">
+            <a:avLst/>
+          </a:prstGeom>
+          <a:noFill/>
+          <a:ln/>
+        </p:spPr>
+        <p:txBody>
+          <a:bodyPr wrap="square" rtlCol="0" anchor="t"/>
+          <a:lstStyle/>
+          <a:p>
+            <a:pPr marL="342900" indent="-342900">
+              <a:buSzPct val="100000"/>
+              <a:buChar char="•"/>
+            </a:pPr>
+            <a:r>
+              <a:rPr lang="en-US" sz="1200" dirty="0">
+                <a:solidFill>
+                  <a:srgbClr val="2F2415"/>
+                </a:solidFill>
+              </a:rPr>
+              <a:t>Résumé exécutif : trésorerie, créances, dettes, score santé</a:t>
+            </a:r>
+            <a:endParaRPr lang="en-US" sz="1200" dirty="0"/>
+          </a:p>
+          <a:p>
+            <a:pPr marL="342900" indent="-342900">
+              <a:buSzPct val="100000"/>
+              <a:buChar char="•"/>
+            </a:pPr>
+            <a:r>
+              <a:rPr lang="en-US" sz="1200" dirty="0">
+                <a:solidFill>
+                  <a:srgbClr val="2F2415"/>
+                </a:solidFill>
+              </a:rPr>
+              <a:t>Réconciliation paiements, prévision trésorerie, échéancier</a:t>
+            </a:r>
+            <a:endParaRPr lang="en-US" sz="1200" dirty="0"/>
+          </a:p>
+          <a:p>
+            <a:pPr marL="342900" indent="-342900">
+              <a:buSzPct val="100000"/>
+              <a:buChar char="•"/>
+            </a:pPr>
+            <a:r>
+              <a:rPr lang="en-US" sz="1200" dirty="0">
+                <a:solidFill>
+                  <a:srgbClr val="2F2415"/>
+                </a:solidFill>
+              </a:rPr>
+              <a:t>Investissements &amp; Business Plan : concrétiser, reporter, suivre</a:t>
+            </a:r>
+            <a:endParaRPr lang="en-US" sz="1200" dirty="0"/>
+          </a:p>
+          <a:p>
+            <a:pPr marL="342900" indent="-342900">
+              <a:buSzPct val="100000"/>
+              <a:buChar char="•"/>
+            </a:pPr>
+            <a:r>
+              <a:rPr lang="en-US" sz="1200" dirty="0">
+                <a:solidFill>
+                  <a:srgbClr val="2F2415"/>
+                </a:solidFill>
+              </a:rPr>
+              <a:t>Rentabilité par activité — coût unifié élevage + cultures</a:t>
+            </a:r>
+            <a:endParaRPr lang="en-US" sz="1200" dirty="0"/>
           </a:p>
         </p:txBody>
       </p:sp>
@@ -3092,7 +3292,7 @@
                   <a:srgbClr val="8A7456"/>
                 </a:solidFill>
               </a:rPr>
-              <a:t>11 / 14</a:t>
+              <a:t>11 / 22</a:t>
             </a:r>
             <a:endParaRPr lang="en-US" sz="800" dirty="0"/>
           </a:p>
@@ -3153,7 +3353,7 @@
                   <a:srgbClr val="9A6B12"/>
                 </a:solidFill>
               </a:rPr>
-              <a:t>Accompagnement</a:t>
+              <a:t>Smart Farm</a:t>
             </a:r>
             <a:endParaRPr lang="en-US" sz="1000" dirty="0"/>
           </a:p>
@@ -3192,7 +3392,7 @@
                 <a:ea typeface="Georgia" pitchFamily="34" charset="-122"/>
                 <a:cs typeface="Georgia" pitchFamily="34" charset="-120"/>
               </a:rPr>
-              <a:t>Trois phases de déploiement</a:t>
+              <a:t>Capteurs TC &amp; automatisation</a:t>
             </a:r>
             <a:endParaRPr lang="en-US" sz="2800" dirty="0"/>
           </a:p>
@@ -3200,245 +3400,312 @@
       </p:sp>
       <p:sp>
         <p:nvSpPr>
-          <p:cNvPr id="7" name="Shape 4"/>
+          <p:cNvPr id="7" name="Text 4"/>
           <p:cNvSpPr/>
           <p:nvPr/>
         </p:nvSpPr>
         <p:spPr>
           <a:xfrm>
             <a:off x="548640" y="1920240"/>
-            <a:ext cx="2651760" cy="2011680"/>
+            <a:ext cx="8046720" cy="2560320"/>
+          </a:xfrm>
+          <a:prstGeom prst="rect">
+            <a:avLst/>
+          </a:prstGeom>
+          <a:noFill/>
+          <a:ln/>
+        </p:spPr>
+        <p:txBody>
+          <a:bodyPr wrap="square" rtlCol="0" anchor="t"/>
+          <a:lstStyle/>
+          <a:p>
+            <a:pPr marL="342900" indent="-342900">
+              <a:buSzPct val="100000"/>
+              <a:buChar char="•"/>
+            </a:pPr>
+            <a:r>
+              <a:rPr lang="en-US" sz="1200" dirty="0">
+                <a:solidFill>
+                  <a:srgbClr val="2F2415"/>
+                </a:solidFill>
+              </a:rPr>
+              <a:t>Température poulailler, humidité serre/sol, caméras intrusion</a:t>
+            </a:r>
+            <a:endParaRPr lang="en-US" sz="1200" dirty="0"/>
+          </a:p>
+          <a:p>
+            <a:pPr marL="342900" indent="-342900">
+              <a:buSzPct val="100000"/>
+              <a:buChar char="•"/>
+            </a:pPr>
+            <a:r>
+              <a:rPr lang="en-US" sz="1200" dirty="0">
+                <a:solidFill>
+                  <a:srgbClr val="2F2415"/>
+                </a:solidFill>
+              </a:rPr>
+              <a:t>Alertes automatiques → tâches Activité &amp; Suivi</a:t>
+            </a:r>
+            <a:endParaRPr lang="en-US" sz="1200" dirty="0"/>
+          </a:p>
+          <a:p>
+            <a:pPr marL="342900" indent="-342900">
+              <a:buSzPct val="100000"/>
+              <a:buChar char="•"/>
+            </a:pPr>
+            <a:r>
+              <a:rPr lang="en-US" sz="1200" dirty="0">
+                <a:solidFill>
+                  <a:srgbClr val="2F2415"/>
+                </a:solidFill>
+              </a:rPr>
+              <a:t>Bandeau temps réel sur l'Accueil dirigeant</a:t>
+            </a:r>
+            <a:endParaRPr lang="en-US" sz="1200" dirty="0"/>
+          </a:p>
+          <a:p>
+            <a:pPr marL="342900" indent="-342900">
+              <a:buSzPct val="100000"/>
+              <a:buChar char="•"/>
+            </a:pPr>
+            <a:r>
+              <a:rPr lang="en-US" sz="1200" dirty="0">
+                <a:solidFill>
+                  <a:srgbClr val="2F2415"/>
+                </a:solidFill>
+              </a:rPr>
+              <a:t>Règles Si… Alors… : ventilation, irrigation, sécurité</a:t>
+            </a:r>
+            <a:endParaRPr lang="en-US" sz="1200" dirty="0"/>
+          </a:p>
+        </p:txBody>
+      </p:sp>
+      <p:sp>
+        <p:nvSpPr>
+          <p:cNvPr id="8" name="Shape 5"/>
+          <p:cNvSpPr/>
+          <p:nvPr/>
+        </p:nvSpPr>
+        <p:spPr>
+          <a:xfrm>
+            <a:off x="5029200" y="4572000"/>
+            <a:ext cx="1645920" cy="914400"/>
           </a:xfrm>
           <a:prstGeom prst="roundRect">
             <a:avLst>
-              <a:gd name="adj" fmla="val 5455"/>
+              <a:gd name="adj" fmla="val 10000"/>
             </a:avLst>
           </a:prstGeom>
           <a:solidFill>
-            <a:srgbClr val="FFFFFF"/>
+            <a:srgbClr val="F0FDF4"/>
           </a:solidFill>
-          <a:ln w="19050">
-            <a:solidFill>
-              <a:srgbClr val="EADCC2"/>
-            </a:solidFill>
-            <a:prstDash val="solid"/>
-          </a:ln>
-        </p:spPr>
-      </p:sp>
-      <p:sp>
-        <p:nvSpPr>
-          <p:cNvPr id="8" name="Text 5"/>
-          <p:cNvSpPr/>
-          <p:nvPr/>
-        </p:nvSpPr>
-        <p:spPr>
-          <a:xfrm>
-            <a:off x="685800" y="2103120"/>
-            <a:ext cx="2377440" cy="365760"/>
-          </a:xfrm>
-          <a:prstGeom prst="rect">
-            <a:avLst/>
-          </a:prstGeom>
-          <a:noFill/>
-          <a:ln/>
-        </p:spPr>
-        <p:txBody>
-          <a:bodyPr wrap="square" rtlCol="0" anchor="ctr"/>
-          <a:lstStyle/>
-          <a:p>
-            <a:pPr indent="0" marL="0">
-              <a:buNone/>
-            </a:pPr>
-            <a:r>
-              <a:rPr lang="en-US" sz="1300" b="1" dirty="0">
-                <a:solidFill>
-                  <a:srgbClr val="052E16"/>
+          <a:ln/>
+        </p:spPr>
+      </p:sp>
+      <p:sp>
+        <p:nvSpPr>
+          <p:cNvPr id="9" name="Text 6"/>
+          <p:cNvSpPr/>
+          <p:nvPr/>
+        </p:nvSpPr>
+        <p:spPr>
+          <a:xfrm>
+            <a:off x="5074920" y="4663440"/>
+            <a:ext cx="1554480" cy="182880"/>
+          </a:xfrm>
+          <a:prstGeom prst="rect">
+            <a:avLst/>
+          </a:prstGeom>
+          <a:noFill/>
+          <a:ln/>
+        </p:spPr>
+        <p:txBody>
+          <a:bodyPr wrap="square" rtlCol="0" anchor="ctr"/>
+          <a:lstStyle/>
+          <a:p>
+            <a:pPr algn="ctr" indent="0" marL="0">
+              <a:buNone/>
+            </a:pPr>
+            <a:r>
+              <a:rPr lang="en-US" sz="800" dirty="0">
+                <a:solidFill>
+                  <a:srgbClr val="8A7456"/>
+                </a:solidFill>
+              </a:rPr>
+              <a:t>Poulailler A</a:t>
+            </a:r>
+            <a:endParaRPr lang="en-US" sz="800" dirty="0"/>
+          </a:p>
+        </p:txBody>
+      </p:sp>
+      <p:sp>
+        <p:nvSpPr>
+          <p:cNvPr id="10" name="Text 7"/>
+          <p:cNvSpPr/>
+          <p:nvPr/>
+        </p:nvSpPr>
+        <p:spPr>
+          <a:xfrm>
+            <a:off x="5074920" y="4892040"/>
+            <a:ext cx="1554480" cy="411480"/>
+          </a:xfrm>
+          <a:prstGeom prst="rect">
+            <a:avLst/>
+          </a:prstGeom>
+          <a:noFill/>
+          <a:ln/>
+        </p:spPr>
+        <p:txBody>
+          <a:bodyPr wrap="square" rtlCol="0" anchor="ctr"/>
+          <a:lstStyle/>
+          <a:p>
+            <a:pPr algn="ctr" indent="0" marL="0">
+              <a:buNone/>
+            </a:pPr>
+            <a:r>
+              <a:rPr lang="en-US" sz="2200" b="1" dirty="0">
+                <a:solidFill>
+                  <a:srgbClr val="15803D"/>
                 </a:solidFill>
                 <a:latin typeface="Georgia" pitchFamily="34" charset="0"/>
                 <a:ea typeface="Georgia" pitchFamily="34" charset="-122"/>
                 <a:cs typeface="Georgia" pitchFamily="34" charset="-120"/>
               </a:rPr>
-              <a:t>1 · Découverte</a:t>
-            </a:r>
-            <a:endParaRPr lang="en-US" sz="1300" dirty="0"/>
-          </a:p>
-        </p:txBody>
-      </p:sp>
-      <p:sp>
-        <p:nvSpPr>
-          <p:cNvPr id="9" name="Text 6"/>
-          <p:cNvSpPr/>
-          <p:nvPr/>
-        </p:nvSpPr>
-        <p:spPr>
-          <a:xfrm>
-            <a:off x="685800" y="2560320"/>
-            <a:ext cx="2377440" cy="1188720"/>
-          </a:xfrm>
-          <a:prstGeom prst="rect">
-            <a:avLst/>
-          </a:prstGeom>
-          <a:noFill/>
-          <a:ln/>
-        </p:spPr>
-        <p:txBody>
-          <a:bodyPr wrap="square" rtlCol="0" anchor="t"/>
-          <a:lstStyle/>
-          <a:p>
-            <a:pPr indent="0" marL="0">
-              <a:buNone/>
-            </a:pPr>
-            <a:r>
-              <a:rPr lang="en-US" sz="900" dirty="0">
-                <a:solidFill>
-                  <a:srgbClr val="8A7456"/>
-                </a:solidFill>
-              </a:rPr>
-              <a:t>Compte démo, modules prioritaires, 5 saisies quotidiennes à digitaliser.</a:t>
-            </a:r>
-            <a:endParaRPr lang="en-US" sz="900" dirty="0"/>
-          </a:p>
-        </p:txBody>
-      </p:sp>
-      <p:sp>
-        <p:nvSpPr>
-          <p:cNvPr id="10" name="Shape 7"/>
-          <p:cNvSpPr/>
-          <p:nvPr/>
-        </p:nvSpPr>
-        <p:spPr>
-          <a:xfrm>
-            <a:off x="3383280" y="1920240"/>
-            <a:ext cx="2651760" cy="2011680"/>
+              <a:t>28°C</a:t>
+            </a:r>
+            <a:endParaRPr lang="en-US" sz="2200" dirty="0"/>
+          </a:p>
+        </p:txBody>
+      </p:sp>
+      <p:sp>
+        <p:nvSpPr>
+          <p:cNvPr id="11" name="Shape 8"/>
+          <p:cNvSpPr/>
+          <p:nvPr/>
+        </p:nvSpPr>
+        <p:spPr>
+          <a:xfrm>
+            <a:off x="6858000" y="4572000"/>
+            <a:ext cx="1645920" cy="914400"/>
           </a:xfrm>
           <a:prstGeom prst="roundRect">
             <a:avLst>
-              <a:gd name="adj" fmla="val 5455"/>
+              <a:gd name="adj" fmla="val 10000"/>
             </a:avLst>
           </a:prstGeom>
           <a:solidFill>
-            <a:srgbClr val="FFFFFF"/>
+            <a:srgbClr val="FFFBEB"/>
           </a:solidFill>
-          <a:ln w="19050">
-            <a:solidFill>
-              <a:srgbClr val="EADCC2"/>
-            </a:solidFill>
-            <a:prstDash val="solid"/>
-          </a:ln>
-        </p:spPr>
-      </p:sp>
-      <p:sp>
-        <p:nvSpPr>
-          <p:cNvPr id="11" name="Text 8"/>
-          <p:cNvSpPr/>
-          <p:nvPr/>
-        </p:nvSpPr>
-        <p:spPr>
-          <a:xfrm>
-            <a:off x="3520440" y="2103120"/>
-            <a:ext cx="2377440" cy="365760"/>
-          </a:xfrm>
-          <a:prstGeom prst="rect">
-            <a:avLst/>
-          </a:prstGeom>
-          <a:noFill/>
-          <a:ln/>
-        </p:spPr>
-        <p:txBody>
-          <a:bodyPr wrap="square" rtlCol="0" anchor="ctr"/>
-          <a:lstStyle/>
-          <a:p>
-            <a:pPr indent="0" marL="0">
-              <a:buNone/>
-            </a:pPr>
-            <a:r>
-              <a:rPr lang="en-US" sz="1300" b="1" dirty="0">
-                <a:solidFill>
-                  <a:srgbClr val="052E16"/>
+          <a:ln/>
+        </p:spPr>
+      </p:sp>
+      <p:sp>
+        <p:nvSpPr>
+          <p:cNvPr id="12" name="Text 9"/>
+          <p:cNvSpPr/>
+          <p:nvPr/>
+        </p:nvSpPr>
+        <p:spPr>
+          <a:xfrm>
+            <a:off x="6903720" y="4663440"/>
+            <a:ext cx="1554480" cy="182880"/>
+          </a:xfrm>
+          <a:prstGeom prst="rect">
+            <a:avLst/>
+          </a:prstGeom>
+          <a:noFill/>
+          <a:ln/>
+        </p:spPr>
+        <p:txBody>
+          <a:bodyPr wrap="square" rtlCol="0" anchor="ctr"/>
+          <a:lstStyle/>
+          <a:p>
+            <a:pPr algn="ctr" indent="0" marL="0">
+              <a:buNone/>
+            </a:pPr>
+            <a:r>
+              <a:rPr lang="en-US" sz="800" dirty="0">
+                <a:solidFill>
+                  <a:srgbClr val="8A7456"/>
+                </a:solidFill>
+              </a:rPr>
+              <a:t>Serre</a:t>
+            </a:r>
+            <a:endParaRPr lang="en-US" sz="800" dirty="0"/>
+          </a:p>
+        </p:txBody>
+      </p:sp>
+      <p:sp>
+        <p:nvSpPr>
+          <p:cNvPr id="13" name="Text 10"/>
+          <p:cNvSpPr/>
+          <p:nvPr/>
+        </p:nvSpPr>
+        <p:spPr>
+          <a:xfrm>
+            <a:off x="6903720" y="4892040"/>
+            <a:ext cx="1554480" cy="411480"/>
+          </a:xfrm>
+          <a:prstGeom prst="rect">
+            <a:avLst/>
+          </a:prstGeom>
+          <a:noFill/>
+          <a:ln/>
+        </p:spPr>
+        <p:txBody>
+          <a:bodyPr wrap="square" rtlCol="0" anchor="ctr"/>
+          <a:lstStyle/>
+          <a:p>
+            <a:pPr algn="ctr" indent="0" marL="0">
+              <a:buNone/>
+            </a:pPr>
+            <a:r>
+              <a:rPr lang="en-US" sz="2200" b="1" dirty="0">
+                <a:solidFill>
+                  <a:srgbClr val="9A6B12"/>
                 </a:solidFill>
                 <a:latin typeface="Georgia" pitchFamily="34" charset="0"/>
                 <a:ea typeface="Georgia" pitchFamily="34" charset="-122"/>
                 <a:cs typeface="Georgia" pitchFamily="34" charset="-120"/>
               </a:rPr>
-              <a:t>2 · Pilote</a:t>
-            </a:r>
-            <a:endParaRPr lang="en-US" sz="1300" dirty="0"/>
-          </a:p>
-        </p:txBody>
-      </p:sp>
-      <p:sp>
-        <p:nvSpPr>
-          <p:cNvPr id="12" name="Text 9"/>
-          <p:cNvSpPr/>
-          <p:nvPr/>
-        </p:nvSpPr>
-        <p:spPr>
-          <a:xfrm>
-            <a:off x="3520440" y="2560320"/>
-            <a:ext cx="2377440" cy="1188720"/>
-          </a:xfrm>
-          <a:prstGeom prst="rect">
-            <a:avLst/>
-          </a:prstGeom>
-          <a:noFill/>
-          <a:ln/>
-        </p:spPr>
-        <p:txBody>
-          <a:bodyPr wrap="square" rtlCol="0" anchor="t"/>
-          <a:lstStyle/>
-          <a:p>
-            <a:pPr indent="0" marL="0">
-              <a:buNone/>
-            </a:pPr>
-            <a:r>
-              <a:rPr lang="en-US" sz="900" dirty="0">
-                <a:solidFill>
-                  <a:srgbClr val="8A7456"/>
-                </a:solidFill>
-              </a:rPr>
-              <a:t>Configuration ferme, formation, capteurs pilote, point hebdo.</a:t>
-            </a:r>
-            <a:endParaRPr lang="en-US" sz="900" dirty="0"/>
-          </a:p>
-        </p:txBody>
-      </p:sp>
-      <p:sp>
-        <p:nvSpPr>
-          <p:cNvPr id="13" name="Shape 10"/>
-          <p:cNvSpPr/>
-          <p:nvPr/>
-        </p:nvSpPr>
-        <p:spPr>
-          <a:xfrm>
-            <a:off x="6217920" y="1920240"/>
-            <a:ext cx="2651760" cy="2011680"/>
+              <a:t>18% sol</a:t>
+            </a:r>
+            <a:endParaRPr lang="en-US" sz="2200" dirty="0"/>
+          </a:p>
+        </p:txBody>
+      </p:sp>
+      <p:sp>
+        <p:nvSpPr>
+          <p:cNvPr id="14" name="Shape 11"/>
+          <p:cNvSpPr/>
+          <p:nvPr/>
+        </p:nvSpPr>
+        <p:spPr>
+          <a:xfrm>
+            <a:off x="5029200" y="1051560"/>
+            <a:ext cx="3657600" cy="457200"/>
           </a:xfrm>
           <a:prstGeom prst="roundRect">
             <a:avLst>
-              <a:gd name="adj" fmla="val 5455"/>
+              <a:gd name="adj" fmla="val 16000"/>
             </a:avLst>
           </a:prstGeom>
           <a:solidFill>
-            <a:srgbClr val="FFFFFF"/>
+            <a:srgbClr val="FEF3C7"/>
           </a:solidFill>
-          <a:ln w="19050">
-            <a:solidFill>
-              <a:srgbClr val="EADCC2"/>
-            </a:solidFill>
-            <a:prstDash val="solid"/>
-          </a:ln>
-        </p:spPr>
-      </p:sp>
-      <p:sp>
-        <p:nvSpPr>
-          <p:cNvPr id="14" name="Text 11"/>
-          <p:cNvSpPr/>
-          <p:nvPr/>
-        </p:nvSpPr>
-        <p:spPr>
-          <a:xfrm>
-            <a:off x="6355080" y="2103120"/>
-            <a:ext cx="2377440" cy="365760"/>
+          <a:ln/>
+        </p:spPr>
+      </p:sp>
+      <p:sp>
+        <p:nvSpPr>
+          <p:cNvPr id="15" name="Text 12"/>
+          <p:cNvSpPr/>
+          <p:nvPr/>
+        </p:nvSpPr>
+        <p:spPr>
+          <a:xfrm>
+            <a:off x="5120640" y="1115568"/>
+            <a:ext cx="3474720" cy="320040"/>
           </a:xfrm>
           <a:prstGeom prst="rect">
             <a:avLst/>
@@ -3454,51 +3721,12 @@
               <a:buNone/>
             </a:pPr>
             <a:r>
-              <a:rPr lang="en-US" sz="1300" b="1" dirty="0">
-                <a:solidFill>
-                  <a:srgbClr val="052E16"/>
-                </a:solidFill>
-                <a:latin typeface="Georgia" pitchFamily="34" charset="0"/>
-                <a:ea typeface="Georgia" pitchFamily="34" charset="-122"/>
-                <a:cs typeface="Georgia" pitchFamily="34" charset="-120"/>
-              </a:rPr>
-              <a:t>3 · Généralisation</a:t>
-            </a:r>
-            <a:endParaRPr lang="en-US" sz="1300" dirty="0"/>
-          </a:p>
-        </p:txBody>
-      </p:sp>
-      <p:sp>
-        <p:nvSpPr>
-          <p:cNvPr id="15" name="Text 12"/>
-          <p:cNvSpPr/>
-          <p:nvPr/>
-        </p:nvSpPr>
-        <p:spPr>
-          <a:xfrm>
-            <a:off x="6355080" y="2560320"/>
-            <a:ext cx="2377440" cy="1188720"/>
-          </a:xfrm>
-          <a:prstGeom prst="rect">
-            <a:avLst/>
-          </a:prstGeom>
-          <a:noFill/>
-          <a:ln/>
-        </p:spPr>
-        <p:txBody>
-          <a:bodyPr wrap="square" rtlCol="0" anchor="t"/>
-          <a:lstStyle/>
-          <a:p>
-            <a:pPr indent="0" marL="0">
-              <a:buNone/>
-            </a:pPr>
-            <a:r>
-              <a:rPr lang="en-US" sz="900" dirty="0">
-                <a:solidFill>
-                  <a:srgbClr val="8A7456"/>
-                </a:solidFill>
-              </a:rPr>
-              <a:t>Multi-fermes, rapports banque, Smart Farm, mobile money.</a:t>
+              <a:rPr lang="en-US" sz="900" b="1" dirty="0">
+                <a:solidFill>
+                  <a:srgbClr val="92400E"/>
+                </a:solidFill>
+              </a:rPr>
+              <a:t>⚠ Seuil dépassé → action terrain en minutes, pas en jours</a:t>
             </a:r>
             <a:endParaRPr lang="en-US" sz="900" dirty="0"/>
           </a:p>
@@ -3515,6 +3743,280 @@
 <file path=ppt/slides/slide12.xml><?xml version="1.0" encoding="utf-8"?>
 <p:sld xmlns:a="http://schemas.openxmlformats.org/drawingml/2006/main" xmlns:r="http://schemas.openxmlformats.org/officeDocument/2006/relationships" xmlns:p="http://schemas.openxmlformats.org/presentationml/2006/main">
   <p:cSld name="Slide 12">
+    <p:bg>
+      <p:bgPr>
+        <a:solidFill>
+          <a:srgbClr val="041A0D"/>
+        </a:solidFill>
+      </p:bgPr>
+    </p:bg>
+    <p:spTree>
+      <p:nvGrpSpPr>
+        <p:cNvPr id="1" name=""/>
+        <p:cNvGrpSpPr/>
+        <p:nvPr/>
+      </p:nvGrpSpPr>
+      <p:grpSpPr>
+        <a:xfrm>
+          <a:off x="0" y="0"/>
+          <a:ext cx="0" cy="0"/>
+          <a:chOff x="0" y="0"/>
+          <a:chExt cx="0" cy="0"/>
+        </a:xfrm>
+      </p:grpSpPr>
+      <p:pic>
+        <p:nvPicPr>
+          <p:cNvPr id="2" name="Image 0" descr="/workspace/public/horizon-farm-logo-transparent.png">    </p:cNvPr>
+          <p:cNvPicPr>
+            <a:picLocks noChangeAspect="1"/>
+          </p:cNvPicPr>
+          <p:nvPr/>
+        </p:nvPicPr>
+        <p:blipFill>
+          <a:blip r:embed="rId1"/>
+          <a:stretch>
+            <a:fillRect/>
+          </a:stretch>
+        </p:blipFill>
+        <p:spPr>
+          <a:xfrm>
+            <a:off x="365760" y="228600"/>
+            <a:ext cx="1645920" cy="502920"/>
+          </a:xfrm>
+          <a:prstGeom prst="rect">
+            <a:avLst/>
+          </a:prstGeom>
+        </p:spPr>
+      </p:pic>
+      <p:sp>
+        <p:nvSpPr>
+          <p:cNvPr id="3" name="Text 0"/>
+          <p:cNvSpPr/>
+          <p:nvPr/>
+        </p:nvSpPr>
+        <p:spPr>
+          <a:xfrm>
+            <a:off x="8046720" y="320040"/>
+            <a:ext cx="914400" cy="274320"/>
+          </a:xfrm>
+          <a:prstGeom prst="rect">
+            <a:avLst/>
+          </a:prstGeom>
+          <a:noFill/>
+          <a:ln/>
+        </p:spPr>
+        <p:txBody>
+          <a:bodyPr wrap="square" rtlCol="0" anchor="ctr"/>
+          <a:lstStyle/>
+          <a:p>
+            <a:pPr algn="r" indent="0" marL="0">
+              <a:buNone/>
+            </a:pPr>
+            <a:r>
+              <a:rPr lang="en-US" sz="800" b="1" dirty="0">
+                <a:solidFill>
+                  <a:srgbClr val="6B9A7A"/>
+                </a:solidFill>
+              </a:rPr>
+              <a:t>12 / 22</a:t>
+            </a:r>
+            <a:endParaRPr lang="en-US" sz="800" dirty="0"/>
+          </a:p>
+        </p:txBody>
+      </p:sp>
+      <p:sp>
+        <p:nvSpPr>
+          <p:cNvPr id="4" name="Shape 1"/>
+          <p:cNvSpPr/>
+          <p:nvPr/>
+        </p:nvSpPr>
+        <p:spPr>
+          <a:xfrm>
+            <a:off x="0" y="4983480"/>
+            <a:ext cx="9144000" cy="73152"/>
+          </a:xfrm>
+          <a:prstGeom prst="rect">
+            <a:avLst/>
+          </a:prstGeom>
+          <a:solidFill>
+            <a:srgbClr val="22C55E"/>
+          </a:solidFill>
+          <a:ln w="12700">
+            <a:solidFill>
+              <a:srgbClr val="22C55E"/>
+            </a:solidFill>
+            <a:prstDash val="solid"/>
+          </a:ln>
+        </p:spPr>
+      </p:sp>
+      <p:sp>
+        <p:nvSpPr>
+          <p:cNvPr id="5" name="Text 2"/>
+          <p:cNvSpPr/>
+          <p:nvPr/>
+        </p:nvSpPr>
+        <p:spPr>
+          <a:xfrm>
+            <a:off x="548640" y="868680"/>
+            <a:ext cx="8046720" cy="274320"/>
+          </a:xfrm>
+          <a:prstGeom prst="rect">
+            <a:avLst/>
+          </a:prstGeom>
+          <a:noFill/>
+          <a:ln/>
+        </p:spPr>
+        <p:txBody>
+          <a:bodyPr wrap="square" rtlCol="0" anchor="ctr"/>
+          <a:lstStyle/>
+          <a:p>
+            <a:pPr indent="0" marL="0">
+              <a:buNone/>
+            </a:pPr>
+            <a:r>
+              <a:rPr lang="en-US" sz="1000" b="1" spc="300" kern="0" dirty="0">
+                <a:solidFill>
+                  <a:srgbClr val="B8954A"/>
+                </a:solidFill>
+              </a:rPr>
+              <a:t>Suivi &amp; conformité</a:t>
+            </a:r>
+            <a:endParaRPr lang="en-US" sz="1000" dirty="0"/>
+          </a:p>
+        </p:txBody>
+      </p:sp>
+      <p:sp>
+        <p:nvSpPr>
+          <p:cNvPr id="6" name="Text 3"/>
+          <p:cNvSpPr/>
+          <p:nvPr/>
+        </p:nvSpPr>
+        <p:spPr>
+          <a:xfrm>
+            <a:off x="548640" y="1143000"/>
+            <a:ext cx="8046720" cy="685800"/>
+          </a:xfrm>
+          <a:prstGeom prst="rect">
+            <a:avLst/>
+          </a:prstGeom>
+          <a:noFill/>
+          <a:ln/>
+        </p:spPr>
+        <p:txBody>
+          <a:bodyPr wrap="square" rtlCol="0" anchor="ctr"/>
+          <a:lstStyle/>
+          <a:p>
+            <a:pPr indent="0" marL="0">
+              <a:buNone/>
+            </a:pPr>
+            <a:r>
+              <a:rPr lang="en-US" sz="2800" b="1" dirty="0">
+                <a:solidFill>
+                  <a:srgbClr val="FFFFFF"/>
+                </a:solidFill>
+                <a:latin typeface="Georgia" pitchFamily="34" charset="0"/>
+                <a:ea typeface="Georgia" pitchFamily="34" charset="-122"/>
+                <a:cs typeface="Georgia" pitchFamily="34" charset="-120"/>
+              </a:rPr>
+              <a:t>Traçabilité et preuves</a:t>
+            </a:r>
+            <a:endParaRPr lang="en-US" sz="2800" dirty="0"/>
+          </a:p>
+        </p:txBody>
+      </p:sp>
+      <p:sp>
+        <p:nvSpPr>
+          <p:cNvPr id="7" name="Text 4"/>
+          <p:cNvSpPr/>
+          <p:nvPr/>
+        </p:nvSpPr>
+        <p:spPr>
+          <a:xfrm>
+            <a:off x="548640" y="1920240"/>
+            <a:ext cx="8046720" cy="2560320"/>
+          </a:xfrm>
+          <a:prstGeom prst="rect">
+            <a:avLst/>
+          </a:prstGeom>
+          <a:noFill/>
+          <a:ln/>
+        </p:spPr>
+        <p:txBody>
+          <a:bodyPr wrap="square" rtlCol="0" anchor="t"/>
+          <a:lstStyle/>
+          <a:p>
+            <a:pPr marL="342900" indent="-342900">
+              <a:buSzPct val="100000"/>
+              <a:buChar char="•"/>
+            </a:pPr>
+            <a:r>
+              <a:rPr lang="en-US" sz="1200" dirty="0">
+                <a:solidFill>
+                  <a:srgbClr val="E8F5E9"/>
+                </a:solidFill>
+              </a:rPr>
+              <a:t>Activité &amp; Suivi : cockpit, file « à traiter », registre traçabilité</a:t>
+            </a:r>
+            <a:endParaRPr lang="en-US" sz="1200" dirty="0"/>
+          </a:p>
+          <a:p>
+            <a:pPr marL="342900" indent="-342900">
+              <a:buSzPct val="100000"/>
+              <a:buChar char="•"/>
+            </a:pPr>
+            <a:r>
+              <a:rPr lang="en-US" sz="1200" dirty="0">
+                <a:solidFill>
+                  <a:srgbClr val="E8F5E9"/>
+                </a:solidFill>
+              </a:rPr>
+              <a:t>Documents &amp; OCR : factures, reçus, rapprochement preuves</a:t>
+            </a:r>
+            <a:endParaRPr lang="en-US" sz="1200" dirty="0"/>
+          </a:p>
+          <a:p>
+            <a:pPr marL="342900" indent="-342900">
+              <a:buSzPct val="100000"/>
+              <a:buChar char="•"/>
+            </a:pPr>
+            <a:r>
+              <a:rPr lang="en-US" sz="1200" dirty="0">
+                <a:solidFill>
+                  <a:srgbClr val="E8F5E9"/>
+                </a:solidFill>
+              </a:rPr>
+              <a:t>Sync ERP : audit cohérence, réparations guidées, hors ligne</a:t>
+            </a:r>
+            <a:endParaRPr lang="en-US" sz="1200" dirty="0"/>
+          </a:p>
+          <a:p>
+            <a:pPr marL="342900" indent="-342900">
+              <a:buSzPct val="100000"/>
+              <a:buChar char="•"/>
+            </a:pPr>
+            <a:r>
+              <a:rPr lang="en-US" sz="1200" dirty="0">
+                <a:solidFill>
+                  <a:srgbClr val="E8F5E9"/>
+                </a:solidFill>
+              </a:rPr>
+              <a:t>Opérations &amp; Ressources : RH, paie, parc matériel, maintenance</a:t>
+            </a:r>
+            <a:endParaRPr lang="en-US" sz="1200" dirty="0"/>
+          </a:p>
+        </p:txBody>
+      </p:sp>
+    </p:spTree>
+  </p:cSld>
+  <p:clrMapOvr>
+    <a:masterClrMapping/>
+  </p:clrMapOvr>
+</p:sld>
+</file>
+
+<file path=ppt/slides/slide13.xml><?xml version="1.0" encoding="utf-8"?>
+<p:sld xmlns:a="http://schemas.openxmlformats.org/drawingml/2006/main" xmlns:r="http://schemas.openxmlformats.org/officeDocument/2006/relationships" xmlns:p="http://schemas.openxmlformats.org/presentationml/2006/main">
+  <p:cSld name="Slide 13">
     <p:bg>
       <p:bgPr>
         <a:solidFill>
@@ -3590,7 +4092,7 @@
                   <a:srgbClr val="8A7456"/>
                 </a:solidFill>
               </a:rPr>
-              <a:t>12 / 14</a:t>
+              <a:t>13 / 22</a:t>
             </a:r>
             <a:endParaRPr lang="en-US" sz="800" dirty="0"/>
           </a:p>
@@ -3651,7 +4153,7 @@
                   <a:srgbClr val="9A6B12"/>
                 </a:solidFill>
               </a:rPr>
-              <a:t>Objections</a:t>
+              <a:t>Investisseurs &amp; Forums</a:t>
             </a:r>
             <a:endParaRPr lang="en-US" sz="1000" dirty="0"/>
           </a:p>
@@ -3690,7 +4192,7 @@
                 <a:ea typeface="Georgia" pitchFamily="34" charset="-122"/>
                 <a:cs typeface="Georgia" pitchFamily="34" charset="-120"/>
               </a:rPr>
-              <a:t>On nous dit souvent…</a:t>
+              <a:t>Financer votre croissance</a:t>
             </a:r>
             <a:endParaRPr lang="en-US" sz="2800" dirty="0"/>
           </a:p>
@@ -3727,7 +4229,7 @@
                   <a:srgbClr val="2F2415"/>
                 </a:solidFill>
               </a:rPr>
-              <a:t>« Mon équipe n'est pas digital » → Hey Horizon : phrases simples. Accueil sans formation longue.</a:t>
+              <a:t>Investor Room : KPIs ERP live pour banques et investisseurs</a:t>
             </a:r>
             <a:endParaRPr lang="en-US" sz="1200" dirty="0"/>
           </a:p>
@@ -3742,7 +4244,7 @@
                   <a:srgbClr val="2F2415"/>
                 </a:solidFill>
               </a:rPr>
-              <a:t>« J'ai déjà Excel » → Excel ne relie pas vente, stock et capteurs.</a:t>
+              <a:t>Dossier éditable 9 sections + exports PDF banque/ONG</a:t>
             </a:r>
             <a:endParaRPr lang="en-US" sz="1200" dirty="0"/>
           </a:p>
@@ -3757,274 +4259,24 @@
                   <a:srgbClr val="2F2415"/>
                 </a:solidFill>
               </a:rPr>
-              <a:t>« La connexion est mauvaise » → Saisie hors ligne, sync au retour réseau.</a:t>
+              <a:t>CRM investisseurs, Data Room, historique envois</a:t>
             </a:r>
             <a:endParaRPr lang="en-US" sz="1200" dirty="0"/>
           </a:p>
-        </p:txBody>
-      </p:sp>
-    </p:spTree>
-  </p:cSld>
-  <p:clrMapOvr>
-    <a:masterClrMapping/>
-  </p:clrMapOvr>
-</p:sld>
-</file>
-
-<file path=ppt/slides/slide13.xml><?xml version="1.0" encoding="utf-8"?>
-<p:sld xmlns:a="http://schemas.openxmlformats.org/drawingml/2006/main" xmlns:r="http://schemas.openxmlformats.org/officeDocument/2006/relationships" xmlns:p="http://schemas.openxmlformats.org/presentationml/2006/main">
-  <p:cSld name="Slide 13">
-    <p:bg>
-      <p:bgPr>
-        <a:solidFill>
-          <a:srgbClr val="041A0D"/>
-        </a:solidFill>
-      </p:bgPr>
-    </p:bg>
-    <p:spTree>
-      <p:nvGrpSpPr>
-        <p:cNvPr id="1" name=""/>
-        <p:cNvGrpSpPr/>
-        <p:nvPr/>
-      </p:nvGrpSpPr>
-      <p:grpSpPr>
-        <a:xfrm>
-          <a:off x="0" y="0"/>
-          <a:ext cx="0" cy="0"/>
-          <a:chOff x="0" y="0"/>
-          <a:chExt cx="0" cy="0"/>
-        </a:xfrm>
-      </p:grpSpPr>
-      <p:pic>
-        <p:nvPicPr>
-          <p:cNvPr id="2" name="Image 0" descr="/workspace/public/horizon-farm-logo-transparent.png">    </p:cNvPr>
-          <p:cNvPicPr>
-            <a:picLocks noChangeAspect="1"/>
-          </p:cNvPicPr>
-          <p:nvPr/>
-        </p:nvPicPr>
-        <p:blipFill>
-          <a:blip r:embed="rId1"/>
-          <a:stretch>
-            <a:fillRect/>
-          </a:stretch>
-        </p:blipFill>
-        <p:spPr>
-          <a:xfrm>
-            <a:off x="365760" y="228600"/>
-            <a:ext cx="1645920" cy="502920"/>
-          </a:xfrm>
-          <a:prstGeom prst="rect">
-            <a:avLst/>
-          </a:prstGeom>
-        </p:spPr>
-      </p:pic>
-      <p:sp>
-        <p:nvSpPr>
-          <p:cNvPr id="3" name="Text 0"/>
-          <p:cNvSpPr/>
-          <p:nvPr/>
-        </p:nvSpPr>
-        <p:spPr>
-          <a:xfrm>
-            <a:off x="8046720" y="320040"/>
-            <a:ext cx="914400" cy="274320"/>
-          </a:xfrm>
-          <a:prstGeom prst="rect">
-            <a:avLst/>
-          </a:prstGeom>
-          <a:noFill/>
-          <a:ln/>
-        </p:spPr>
-        <p:txBody>
-          <a:bodyPr wrap="square" rtlCol="0" anchor="ctr"/>
-          <a:lstStyle/>
-          <a:p>
-            <a:pPr algn="r" indent="0" marL="0">
-              <a:buNone/>
-            </a:pPr>
-            <a:r>
-              <a:rPr lang="en-US" sz="800" b="1" dirty="0">
-                <a:solidFill>
-                  <a:srgbClr val="6B9A7A"/>
-                </a:solidFill>
-              </a:rPr>
-              <a:t>13 / 14</a:t>
-            </a:r>
-            <a:endParaRPr lang="en-US" sz="800" dirty="0"/>
-          </a:p>
-        </p:txBody>
-      </p:sp>
-      <p:sp>
-        <p:nvSpPr>
-          <p:cNvPr id="4" name="Shape 1"/>
-          <p:cNvSpPr/>
-          <p:nvPr/>
-        </p:nvSpPr>
-        <p:spPr>
-          <a:xfrm>
-            <a:off x="0" y="4983480"/>
-            <a:ext cx="9144000" cy="73152"/>
-          </a:xfrm>
-          <a:prstGeom prst="rect">
-            <a:avLst/>
-          </a:prstGeom>
-          <a:solidFill>
-            <a:srgbClr val="22C55E"/>
-          </a:solidFill>
-          <a:ln w="12700">
-            <a:solidFill>
-              <a:srgbClr val="22C55E"/>
-            </a:solidFill>
-            <a:prstDash val="solid"/>
-          </a:ln>
-        </p:spPr>
-      </p:sp>
-      <p:sp>
-        <p:nvSpPr>
-          <p:cNvPr id="5" name="Text 2"/>
-          <p:cNvSpPr/>
-          <p:nvPr/>
-        </p:nvSpPr>
-        <p:spPr>
-          <a:xfrm>
-            <a:off x="548640" y="868680"/>
-            <a:ext cx="8046720" cy="274320"/>
-          </a:xfrm>
-          <a:prstGeom prst="rect">
-            <a:avLst/>
-          </a:prstGeom>
-          <a:noFill/>
-          <a:ln/>
-        </p:spPr>
-        <p:txBody>
-          <a:bodyPr wrap="square" rtlCol="0" anchor="ctr"/>
-          <a:lstStyle/>
-          <a:p>
-            <a:pPr indent="0" marL="0">
-              <a:buNone/>
-            </a:pPr>
-            <a:r>
-              <a:rPr lang="en-US" sz="1000" b="1" spc="300" kern="0" dirty="0">
-                <a:solidFill>
-                  <a:srgbClr val="B8954A"/>
-                </a:solidFill>
-              </a:rPr>
-              <a:t>Pourquoi Horizon Farm</a:t>
-            </a:r>
-            <a:endParaRPr lang="en-US" sz="1000" dirty="0"/>
-          </a:p>
-        </p:txBody>
-      </p:sp>
-      <p:sp>
-        <p:nvSpPr>
-          <p:cNvPr id="6" name="Text 3"/>
-          <p:cNvSpPr/>
-          <p:nvPr/>
-        </p:nvSpPr>
-        <p:spPr>
-          <a:xfrm>
-            <a:off x="548640" y="1143000"/>
-            <a:ext cx="8046720" cy="685800"/>
-          </a:xfrm>
-          <a:prstGeom prst="rect">
-            <a:avLst/>
-          </a:prstGeom>
-          <a:noFill/>
-          <a:ln/>
-        </p:spPr>
-        <p:txBody>
-          <a:bodyPr wrap="square" rtlCol="0" anchor="ctr"/>
-          <a:lstStyle/>
-          <a:p>
-            <a:pPr indent="0" marL="0">
-              <a:buNone/>
-            </a:pPr>
-            <a:r>
-              <a:rPr lang="en-US" sz="2800" b="1" dirty="0">
-                <a:solidFill>
-                  <a:srgbClr val="FFFFFF"/>
-                </a:solidFill>
-                <a:latin typeface="Georgia" pitchFamily="34" charset="0"/>
-                <a:ea typeface="Georgia" pitchFamily="34" charset="-122"/>
-                <a:cs typeface="Georgia" pitchFamily="34" charset="-120"/>
-              </a:rPr>
-              <a:t>Pas un gadget.</a:t>
-            </a:r>
-            <a:endParaRPr lang="en-US" sz="2800" dirty="0"/>
-          </a:p>
-          <a:p>
-            <a:pPr indent="0" marL="0">
-              <a:buNone/>
-            </a:pPr>
-            <a:r>
-              <a:rPr lang="en-US" sz="2800" b="1" dirty="0">
-                <a:solidFill>
-                  <a:srgbClr val="FFFFFF"/>
-                </a:solidFill>
-                <a:latin typeface="Georgia" pitchFamily="34" charset="0"/>
-                <a:ea typeface="Georgia" pitchFamily="34" charset="-122"/>
-                <a:cs typeface="Georgia" pitchFamily="34" charset="-120"/>
-              </a:rPr>
-              <a:t>Un copilote d'exploitation.</a:t>
-            </a:r>
-            <a:endParaRPr lang="en-US" sz="2800" dirty="0"/>
-          </a:p>
-        </p:txBody>
-      </p:sp>
-      <p:sp>
-        <p:nvSpPr>
-          <p:cNvPr id="7" name="Shape 4"/>
-          <p:cNvSpPr/>
-          <p:nvPr/>
-        </p:nvSpPr>
-        <p:spPr>
-          <a:xfrm>
-            <a:off x="548640" y="1920240"/>
-            <a:ext cx="54864" cy="1005840"/>
-          </a:xfrm>
-          <a:prstGeom prst="rect">
-            <a:avLst/>
-          </a:prstGeom>
-          <a:solidFill>
-            <a:srgbClr val="22C55E"/>
-          </a:solidFill>
-          <a:ln/>
-        </p:spPr>
-      </p:sp>
-      <p:sp>
-        <p:nvSpPr>
-          <p:cNvPr id="8" name="Text 5"/>
-          <p:cNvSpPr/>
-          <p:nvPr/>
-        </p:nvSpPr>
-        <p:spPr>
-          <a:xfrm>
-            <a:off x="777240" y="1920240"/>
-            <a:ext cx="7589520" cy="1097280"/>
-          </a:xfrm>
-          <a:prstGeom prst="rect">
-            <a:avLst/>
-          </a:prstGeom>
-          <a:noFill/>
-          <a:ln/>
-        </p:spPr>
-        <p:txBody>
-          <a:bodyPr wrap="square" rtlCol="0" anchor="ctr"/>
-          <a:lstStyle/>
-          <a:p>
-            <a:pPr indent="0" marL="0">
-              <a:buNone/>
-            </a:pPr>
-            <a:r>
-              <a:rPr lang="en-US" sz="1500" i="1" dirty="0">
-                <a:solidFill>
-                  <a:srgbClr val="DCFCE7"/>
-                </a:solidFill>
-              </a:rPr>
-              <a:t>ERP métier + capteurs + assistant terrain — interconnectés. Ce que vous saisissez le matin éclaire votre décision du soir.</a:t>
-            </a:r>
-            <a:endParaRPr lang="en-US" sz="1500" dirty="0"/>
+          <a:p>
+            <a:pPr marL="342900" indent="-342900">
+              <a:buSzPct val="100000"/>
+              <a:buChar char="•"/>
+            </a:pPr>
+            <a:r>
+              <a:rPr lang="en-US" sz="1200" dirty="0">
+                <a:solidFill>
+                  <a:srgbClr val="2F2415"/>
+                </a:solidFill>
+              </a:rPr>
+              <a:t>Démo investisseur intégrée (WhatsApp, OCR, simulateur)</a:t>
+            </a:r>
+            <a:endParaRPr lang="en-US" sz="1200" dirty="0"/>
           </a:p>
         </p:txBody>
       </p:sp>
@@ -4114,7 +4366,7 @@
                   <a:srgbClr val="8A7456"/>
                 </a:solidFill>
               </a:rPr>
-              <a:t>14 / 14</a:t>
+              <a:t>14 / 22</a:t>
             </a:r>
             <a:endParaRPr lang="en-US" sz="800" dirty="0"/>
           </a:p>
@@ -4153,31 +4405,31 @@
         </p:nvSpPr>
         <p:spPr>
           <a:xfrm>
-            <a:off x="731520" y="1097280"/>
-            <a:ext cx="7680960" cy="320040"/>
-          </a:xfrm>
-          <a:prstGeom prst="rect">
-            <a:avLst/>
-          </a:prstGeom>
-          <a:noFill/>
-          <a:ln/>
-        </p:spPr>
-        <p:txBody>
-          <a:bodyPr wrap="square" rtlCol="0" anchor="ctr"/>
-          <a:lstStyle/>
-          <a:p>
-            <a:pPr algn="ctr" indent="0" marL="0">
-              <a:buNone/>
-            </a:pPr>
-            <a:r>
-              <a:rPr lang="en-US" sz="1100" b="1" spc="300" kern="0" dirty="0">
+            <a:off x="548640" y="868680"/>
+            <a:ext cx="8046720" cy="274320"/>
+          </a:xfrm>
+          <a:prstGeom prst="rect">
+            <a:avLst/>
+          </a:prstGeom>
+          <a:noFill/>
+          <a:ln/>
+        </p:spPr>
+        <p:txBody>
+          <a:bodyPr wrap="square" rtlCol="0" anchor="ctr"/>
+          <a:lstStyle/>
+          <a:p>
+            <a:pPr indent="0" marL="0">
+              <a:buNone/>
+            </a:pPr>
+            <a:r>
+              <a:rPr lang="en-US" sz="1000" b="1" spc="300" kern="0" dirty="0">
                 <a:solidFill>
                   <a:srgbClr val="9A6B12"/>
                 </a:solidFill>
               </a:rPr>
-              <a:t>Prochaine étape</a:t>
-            </a:r>
-            <a:endParaRPr lang="en-US" sz="1100" dirty="0"/>
+              <a:t>Interconnexion</a:t>
+            </a:r>
+            <a:endParaRPr lang="en-US" sz="1000" dirty="0"/>
           </a:p>
         </p:txBody>
       </p:sp>
@@ -4189,24 +4441,24 @@
         </p:nvSpPr>
         <p:spPr>
           <a:xfrm>
-            <a:off x="731520" y="1554480"/>
-            <a:ext cx="7680960" cy="914400"/>
-          </a:xfrm>
-          <a:prstGeom prst="rect">
-            <a:avLst/>
-          </a:prstGeom>
-          <a:noFill/>
-          <a:ln/>
-        </p:spPr>
-        <p:txBody>
-          <a:bodyPr wrap="square" rtlCol="0" anchor="ctr"/>
-          <a:lstStyle/>
-          <a:p>
-            <a:pPr algn="ctr" indent="0" marL="0">
-              <a:buNone/>
-            </a:pPr>
-            <a:r>
-              <a:rPr lang="en-US" sz="3200" b="1" dirty="0">
+            <a:off x="548640" y="1143000"/>
+            <a:ext cx="8046720" cy="685800"/>
+          </a:xfrm>
+          <a:prstGeom prst="rect">
+            <a:avLst/>
+          </a:prstGeom>
+          <a:noFill/>
+          <a:ln/>
+        </p:spPr>
+        <p:txBody>
+          <a:bodyPr wrap="square" rtlCol="0" anchor="ctr"/>
+          <a:lstStyle/>
+          <a:p>
+            <a:pPr indent="0" marL="0">
+              <a:buNone/>
+            </a:pPr>
+            <a:r>
+              <a:rPr lang="en-US" sz="2800" b="1" dirty="0">
                 <a:solidFill>
                   <a:srgbClr val="052E16"/>
                 </a:solidFill>
@@ -4214,22 +4466,1346 @@
                 <a:ea typeface="Georgia" pitchFamily="34" charset="-122"/>
                 <a:cs typeface="Georgia" pitchFamily="34" charset="-120"/>
               </a:rPr>
-              <a:t>Prêt à piloter votre exploitation autrement ?</a:t>
-            </a:r>
-            <a:endParaRPr lang="en-US" sz="3200" dirty="0"/>
-          </a:p>
-        </p:txBody>
-      </p:sp>
-      <p:sp>
-        <p:nvSpPr>
-          <p:cNvPr id="7" name="Text 4"/>
-          <p:cNvSpPr/>
-          <p:nvPr/>
-        </p:nvSpPr>
-        <p:spPr>
-          <a:xfrm>
-            <a:off x="1097280" y="2651760"/>
-            <a:ext cx="6949440" cy="548640"/>
+              <a:t>Tout se parle — rien en double</a:t>
+            </a:r>
+            <a:endParaRPr lang="en-US" sz="2800" dirty="0"/>
+          </a:p>
+        </p:txBody>
+      </p:sp>
+      <p:sp>
+        <p:nvSpPr>
+          <p:cNvPr id="7" name="Shape 4"/>
+          <p:cNvSpPr/>
+          <p:nvPr/>
+        </p:nvSpPr>
+        <p:spPr>
+          <a:xfrm>
+            <a:off x="594360" y="1993392"/>
+            <a:ext cx="109728" cy="109728"/>
+          </a:xfrm>
+          <a:prstGeom prst="ellipse">
+            <a:avLst/>
+          </a:prstGeom>
+          <a:solidFill>
+            <a:srgbClr val="22C55E"/>
+          </a:solidFill>
+          <a:ln/>
+        </p:spPr>
+      </p:sp>
+      <p:sp>
+        <p:nvSpPr>
+          <p:cNvPr id="8" name="Text 5"/>
+          <p:cNvSpPr/>
+          <p:nvPr/>
+        </p:nvSpPr>
+        <p:spPr>
+          <a:xfrm>
+            <a:off x="822960" y="1920240"/>
+            <a:ext cx="7315200" cy="228600"/>
+          </a:xfrm>
+          <a:prstGeom prst="rect">
+            <a:avLst/>
+          </a:prstGeom>
+          <a:noFill/>
+          <a:ln/>
+        </p:spPr>
+        <p:txBody>
+          <a:bodyPr wrap="square" rtlCol="0" anchor="ctr"/>
+          <a:lstStyle/>
+          <a:p>
+            <a:pPr indent="0" marL="0">
+              <a:buNone/>
+            </a:pPr>
+            <a:r>
+              <a:rPr lang="en-US" sz="1100" b="1" dirty="0">
+                <a:solidFill>
+                  <a:srgbClr val="2F2415"/>
+                </a:solidFill>
+              </a:rPr>
+              <a:t>Vente Commercial</a:t>
+            </a:r>
+            <a:endParaRPr lang="en-US" sz="1100" dirty="0"/>
+          </a:p>
+        </p:txBody>
+      </p:sp>
+      <p:sp>
+        <p:nvSpPr>
+          <p:cNvPr id="9" name="Text 6"/>
+          <p:cNvSpPr/>
+          <p:nvPr/>
+        </p:nvSpPr>
+        <p:spPr>
+          <a:xfrm>
+            <a:off x="822960" y="2121408"/>
+            <a:ext cx="7315200" cy="274320"/>
+          </a:xfrm>
+          <a:prstGeom prst="rect">
+            <a:avLst/>
+          </a:prstGeom>
+          <a:noFill/>
+          <a:ln/>
+        </p:spPr>
+        <p:txBody>
+          <a:bodyPr wrap="square" rtlCol="0" anchor="ctr"/>
+          <a:lstStyle/>
+          <a:p>
+            <a:pPr indent="0" marL="0">
+              <a:buNone/>
+            </a:pPr>
+            <a:r>
+              <a:rPr lang="en-US" sz="900" dirty="0">
+                <a:solidFill>
+                  <a:srgbClr val="8A7456"/>
+                </a:solidFill>
+              </a:rPr>
+              <a:t>→ sortie stock + entrée trésorerie + traçabilité</a:t>
+            </a:r>
+            <a:endParaRPr lang="en-US" sz="900" dirty="0"/>
+          </a:p>
+        </p:txBody>
+      </p:sp>
+      <p:sp>
+        <p:nvSpPr>
+          <p:cNvPr id="10" name="Shape 7"/>
+          <p:cNvSpPr/>
+          <p:nvPr/>
+        </p:nvSpPr>
+        <p:spPr>
+          <a:xfrm>
+            <a:off x="594360" y="2560320"/>
+            <a:ext cx="109728" cy="109728"/>
+          </a:xfrm>
+          <a:prstGeom prst="ellipse">
+            <a:avLst/>
+          </a:prstGeom>
+          <a:solidFill>
+            <a:srgbClr val="22C55E"/>
+          </a:solidFill>
+          <a:ln/>
+        </p:spPr>
+      </p:sp>
+      <p:sp>
+        <p:nvSpPr>
+          <p:cNvPr id="11" name="Text 8"/>
+          <p:cNvSpPr/>
+          <p:nvPr/>
+        </p:nvSpPr>
+        <p:spPr>
+          <a:xfrm>
+            <a:off x="822960" y="2487168"/>
+            <a:ext cx="7315200" cy="228600"/>
+          </a:xfrm>
+          <a:prstGeom prst="rect">
+            <a:avLst/>
+          </a:prstGeom>
+          <a:noFill/>
+          <a:ln/>
+        </p:spPr>
+        <p:txBody>
+          <a:bodyPr wrap="square" rtlCol="0" anchor="ctr"/>
+          <a:lstStyle/>
+          <a:p>
+            <a:pPr indent="0" marL="0">
+              <a:buNone/>
+            </a:pPr>
+            <a:r>
+              <a:rPr lang="en-US" sz="1100" b="1" dirty="0">
+                <a:solidFill>
+                  <a:srgbClr val="2F2415"/>
+                </a:solidFill>
+              </a:rPr>
+              <a:t>Réception Stock</a:t>
+            </a:r>
+            <a:endParaRPr lang="en-US" sz="1100" dirty="0"/>
+          </a:p>
+        </p:txBody>
+      </p:sp>
+      <p:sp>
+        <p:nvSpPr>
+          <p:cNvPr id="12" name="Text 9"/>
+          <p:cNvSpPr/>
+          <p:nvPr/>
+        </p:nvSpPr>
+        <p:spPr>
+          <a:xfrm>
+            <a:off x="822960" y="2688336"/>
+            <a:ext cx="7315200" cy="274320"/>
+          </a:xfrm>
+          <a:prstGeom prst="rect">
+            <a:avLst/>
+          </a:prstGeom>
+          <a:noFill/>
+          <a:ln/>
+        </p:spPr>
+        <p:txBody>
+          <a:bodyPr wrap="square" rtlCol="0" anchor="ctr"/>
+          <a:lstStyle/>
+          <a:p>
+            <a:pPr indent="0" marL="0">
+              <a:buNone/>
+            </a:pPr>
+            <a:r>
+              <a:rPr lang="en-US" sz="900" dirty="0">
+                <a:solidFill>
+                  <a:srgbClr val="8A7456"/>
+                </a:solidFill>
+              </a:rPr>
+              <a:t>→ dette fournisseur + inventaire + alerte seuil</a:t>
+            </a:r>
+            <a:endParaRPr lang="en-US" sz="900" dirty="0"/>
+          </a:p>
+        </p:txBody>
+      </p:sp>
+      <p:sp>
+        <p:nvSpPr>
+          <p:cNvPr id="13" name="Shape 10"/>
+          <p:cNvSpPr/>
+          <p:nvPr/>
+        </p:nvSpPr>
+        <p:spPr>
+          <a:xfrm>
+            <a:off x="594360" y="3127248"/>
+            <a:ext cx="109728" cy="109728"/>
+          </a:xfrm>
+          <a:prstGeom prst="ellipse">
+            <a:avLst/>
+          </a:prstGeom>
+          <a:solidFill>
+            <a:srgbClr val="22C55E"/>
+          </a:solidFill>
+          <a:ln/>
+        </p:spPr>
+      </p:sp>
+      <p:sp>
+        <p:nvSpPr>
+          <p:cNvPr id="14" name="Text 11"/>
+          <p:cNvSpPr/>
+          <p:nvPr/>
+        </p:nvSpPr>
+        <p:spPr>
+          <a:xfrm>
+            <a:off x="822960" y="3054096"/>
+            <a:ext cx="7315200" cy="228600"/>
+          </a:xfrm>
+          <a:prstGeom prst="rect">
+            <a:avLst/>
+          </a:prstGeom>
+          <a:noFill/>
+          <a:ln/>
+        </p:spPr>
+        <p:txBody>
+          <a:bodyPr wrap="square" rtlCol="0" anchor="ctr"/>
+          <a:lstStyle/>
+          <a:p>
+            <a:pPr indent="0" marL="0">
+              <a:buNone/>
+            </a:pPr>
+            <a:r>
+              <a:rPr lang="en-US" sz="1100" b="1" dirty="0">
+                <a:solidFill>
+                  <a:srgbClr val="2F2415"/>
+                </a:solidFill>
+              </a:rPr>
+              <a:t>Mortalité Élevage</a:t>
+            </a:r>
+            <a:endParaRPr lang="en-US" sz="1100" dirty="0"/>
+          </a:p>
+        </p:txBody>
+      </p:sp>
+      <p:sp>
+        <p:nvSpPr>
+          <p:cNvPr id="15" name="Text 12"/>
+          <p:cNvSpPr/>
+          <p:nvPr/>
+        </p:nvSpPr>
+        <p:spPr>
+          <a:xfrm>
+            <a:off x="822960" y="3255264"/>
+            <a:ext cx="7315200" cy="274320"/>
+          </a:xfrm>
+          <a:prstGeom prst="rect">
+            <a:avLst/>
+          </a:prstGeom>
+          <a:noFill/>
+          <a:ln/>
+        </p:spPr>
+        <p:txBody>
+          <a:bodyPr wrap="square" rtlCol="0" anchor="ctr"/>
+          <a:lstStyle/>
+          <a:p>
+            <a:pPr indent="0" marL="0">
+              <a:buNone/>
+            </a:pPr>
+            <a:r>
+              <a:rPr lang="en-US" sz="900" dirty="0">
+                <a:solidFill>
+                  <a:srgbClr val="8A7456"/>
+                </a:solidFill>
+              </a:rPr>
+              <a:t>→ effectif Accueil + alerte zootechnique</a:t>
+            </a:r>
+            <a:endParaRPr lang="en-US" sz="900" dirty="0"/>
+          </a:p>
+        </p:txBody>
+      </p:sp>
+      <p:sp>
+        <p:nvSpPr>
+          <p:cNvPr id="16" name="Shape 13"/>
+          <p:cNvSpPr/>
+          <p:nvPr/>
+        </p:nvSpPr>
+        <p:spPr>
+          <a:xfrm>
+            <a:off x="594360" y="3694176"/>
+            <a:ext cx="109728" cy="109728"/>
+          </a:xfrm>
+          <a:prstGeom prst="ellipse">
+            <a:avLst/>
+          </a:prstGeom>
+          <a:solidFill>
+            <a:srgbClr val="22C55E"/>
+          </a:solidFill>
+          <a:ln/>
+        </p:spPr>
+      </p:sp>
+      <p:sp>
+        <p:nvSpPr>
+          <p:cNvPr id="17" name="Text 14"/>
+          <p:cNvSpPr/>
+          <p:nvPr/>
+        </p:nvSpPr>
+        <p:spPr>
+          <a:xfrm>
+            <a:off x="822960" y="3621024"/>
+            <a:ext cx="7315200" cy="228600"/>
+          </a:xfrm>
+          <a:prstGeom prst="rect">
+            <a:avLst/>
+          </a:prstGeom>
+          <a:noFill/>
+          <a:ln/>
+        </p:spPr>
+        <p:txBody>
+          <a:bodyPr wrap="square" rtlCol="0" anchor="ctr"/>
+          <a:lstStyle/>
+          <a:p>
+            <a:pPr indent="0" marL="0">
+              <a:buNone/>
+            </a:pPr>
+            <a:r>
+              <a:rPr lang="en-US" sz="1100" b="1" dirty="0">
+                <a:solidFill>
+                  <a:srgbClr val="2F2415"/>
+                </a:solidFill>
+              </a:rPr>
+              <a:t>Capteur Smart Farm</a:t>
+            </a:r>
+            <a:endParaRPr lang="en-US" sz="1100" dirty="0"/>
+          </a:p>
+        </p:txBody>
+      </p:sp>
+      <p:sp>
+        <p:nvSpPr>
+          <p:cNvPr id="18" name="Text 15"/>
+          <p:cNvSpPr/>
+          <p:nvPr/>
+        </p:nvSpPr>
+        <p:spPr>
+          <a:xfrm>
+            <a:off x="822960" y="3822192"/>
+            <a:ext cx="7315200" cy="274320"/>
+          </a:xfrm>
+          <a:prstGeom prst="rect">
+            <a:avLst/>
+          </a:prstGeom>
+          <a:noFill/>
+          <a:ln/>
+        </p:spPr>
+        <p:txBody>
+          <a:bodyPr wrap="square" rtlCol="0" anchor="ctr"/>
+          <a:lstStyle/>
+          <a:p>
+            <a:pPr indent="0" marL="0">
+              <a:buNone/>
+            </a:pPr>
+            <a:r>
+              <a:rPr lang="en-US" sz="900" dirty="0">
+                <a:solidFill>
+                  <a:srgbClr val="8A7456"/>
+                </a:solidFill>
+              </a:rPr>
+              <a:t>→ tâche Activité &amp; Suivi + notification</a:t>
+            </a:r>
+            <a:endParaRPr lang="en-US" sz="900" dirty="0"/>
+          </a:p>
+        </p:txBody>
+      </p:sp>
+      <p:sp>
+        <p:nvSpPr>
+          <p:cNvPr id="19" name="Shape 16"/>
+          <p:cNvSpPr/>
+          <p:nvPr/>
+        </p:nvSpPr>
+        <p:spPr>
+          <a:xfrm>
+            <a:off x="594360" y="4261104"/>
+            <a:ext cx="109728" cy="109728"/>
+          </a:xfrm>
+          <a:prstGeom prst="ellipse">
+            <a:avLst/>
+          </a:prstGeom>
+          <a:solidFill>
+            <a:srgbClr val="22C55E"/>
+          </a:solidFill>
+          <a:ln/>
+        </p:spPr>
+      </p:sp>
+      <p:sp>
+        <p:nvSpPr>
+          <p:cNvPr id="20" name="Text 17"/>
+          <p:cNvSpPr/>
+          <p:nvPr/>
+        </p:nvSpPr>
+        <p:spPr>
+          <a:xfrm>
+            <a:off x="822960" y="4187952"/>
+            <a:ext cx="7315200" cy="228600"/>
+          </a:xfrm>
+          <a:prstGeom prst="rect">
+            <a:avLst/>
+          </a:prstGeom>
+          <a:noFill/>
+          <a:ln/>
+        </p:spPr>
+        <p:txBody>
+          <a:bodyPr wrap="square" rtlCol="0" anchor="ctr"/>
+          <a:lstStyle/>
+          <a:p>
+            <a:pPr indent="0" marL="0">
+              <a:buNone/>
+            </a:pPr>
+            <a:r>
+              <a:rPr lang="en-US" sz="1100" b="1" dirty="0">
+                <a:solidFill>
+                  <a:srgbClr val="2F2415"/>
+                </a:solidFill>
+              </a:rPr>
+              <a:t>OCR Document</a:t>
+            </a:r>
+            <a:endParaRPr lang="en-US" sz="1100" dirty="0"/>
+          </a:p>
+        </p:txBody>
+      </p:sp>
+      <p:sp>
+        <p:nvSpPr>
+          <p:cNvPr id="21" name="Text 18"/>
+          <p:cNvSpPr/>
+          <p:nvPr/>
+        </p:nvSpPr>
+        <p:spPr>
+          <a:xfrm>
+            <a:off x="822960" y="4389120"/>
+            <a:ext cx="7315200" cy="274320"/>
+          </a:xfrm>
+          <a:prstGeom prst="rect">
+            <a:avLst/>
+          </a:prstGeom>
+          <a:noFill/>
+          <a:ln/>
+        </p:spPr>
+        <p:txBody>
+          <a:bodyPr wrap="square" rtlCol="0" anchor="ctr"/>
+          <a:lstStyle/>
+          <a:p>
+            <a:pPr indent="0" marL="0">
+              <a:buNone/>
+            </a:pPr>
+            <a:r>
+              <a:rPr lang="en-US" sz="900" dirty="0">
+                <a:solidFill>
+                  <a:srgbClr val="8A7456"/>
+                </a:solidFill>
+              </a:rPr>
+              <a:t>→ charge Finance + preuve rapprochée</a:t>
+            </a:r>
+            <a:endParaRPr lang="en-US" sz="900" dirty="0"/>
+          </a:p>
+        </p:txBody>
+      </p:sp>
+    </p:spTree>
+  </p:cSld>
+  <p:clrMapOvr>
+    <a:masterClrMapping/>
+  </p:clrMapOvr>
+</p:sld>
+</file>
+
+<file path=ppt/slides/slide15.xml><?xml version="1.0" encoding="utf-8"?>
+<p:sld xmlns:a="http://schemas.openxmlformats.org/drawingml/2006/main" xmlns:r="http://schemas.openxmlformats.org/officeDocument/2006/relationships" xmlns:p="http://schemas.openxmlformats.org/presentationml/2006/main">
+  <p:cSld name="Slide 15">
+    <p:bg>
+      <p:bgPr>
+        <a:solidFill>
+          <a:srgbClr val="FFFDF8"/>
+        </a:solidFill>
+      </p:bgPr>
+    </p:bg>
+    <p:spTree>
+      <p:nvGrpSpPr>
+        <p:cNvPr id="1" name=""/>
+        <p:cNvGrpSpPr/>
+        <p:nvPr/>
+      </p:nvGrpSpPr>
+      <p:grpSpPr>
+        <a:xfrm>
+          <a:off x="0" y="0"/>
+          <a:ext cx="0" cy="0"/>
+          <a:chOff x="0" y="0"/>
+          <a:chExt cx="0" cy="0"/>
+        </a:xfrm>
+      </p:grpSpPr>
+      <p:pic>
+        <p:nvPicPr>
+          <p:cNvPr id="2" name="Image 0" descr="/workspace/public/horizon-farm-logo-transparent.png">    </p:cNvPr>
+          <p:cNvPicPr>
+            <a:picLocks noChangeAspect="1"/>
+          </p:cNvPicPr>
+          <p:nvPr/>
+        </p:nvPicPr>
+        <p:blipFill>
+          <a:blip r:embed="rId1"/>
+          <a:stretch>
+            <a:fillRect/>
+          </a:stretch>
+        </p:blipFill>
+        <p:spPr>
+          <a:xfrm>
+            <a:off x="365760" y="228600"/>
+            <a:ext cx="1645920" cy="502920"/>
+          </a:xfrm>
+          <a:prstGeom prst="rect">
+            <a:avLst/>
+          </a:prstGeom>
+        </p:spPr>
+      </p:pic>
+      <p:sp>
+        <p:nvSpPr>
+          <p:cNvPr id="3" name="Text 0"/>
+          <p:cNvSpPr/>
+          <p:nvPr/>
+        </p:nvSpPr>
+        <p:spPr>
+          <a:xfrm>
+            <a:off x="8046720" y="320040"/>
+            <a:ext cx="914400" cy="274320"/>
+          </a:xfrm>
+          <a:prstGeom prst="rect">
+            <a:avLst/>
+          </a:prstGeom>
+          <a:noFill/>
+          <a:ln/>
+        </p:spPr>
+        <p:txBody>
+          <a:bodyPr wrap="square" rtlCol="0" anchor="ctr"/>
+          <a:lstStyle/>
+          <a:p>
+            <a:pPr algn="r" indent="0" marL="0">
+              <a:buNone/>
+            </a:pPr>
+            <a:r>
+              <a:rPr lang="en-US" sz="800" b="1" dirty="0">
+                <a:solidFill>
+                  <a:srgbClr val="8A7456"/>
+                </a:solidFill>
+              </a:rPr>
+              <a:t>15 / 22</a:t>
+            </a:r>
+            <a:endParaRPr lang="en-US" sz="800" dirty="0"/>
+          </a:p>
+        </p:txBody>
+      </p:sp>
+      <p:sp>
+        <p:nvSpPr>
+          <p:cNvPr id="4" name="Shape 1"/>
+          <p:cNvSpPr/>
+          <p:nvPr/>
+        </p:nvSpPr>
+        <p:spPr>
+          <a:xfrm>
+            <a:off x="0" y="4983480"/>
+            <a:ext cx="9144000" cy="73152"/>
+          </a:xfrm>
+          <a:prstGeom prst="rect">
+            <a:avLst/>
+          </a:prstGeom>
+          <a:solidFill>
+            <a:srgbClr val="22C55E"/>
+          </a:solidFill>
+          <a:ln w="12700">
+            <a:solidFill>
+              <a:srgbClr val="22C55E"/>
+            </a:solidFill>
+            <a:prstDash val="solid"/>
+          </a:ln>
+        </p:spPr>
+      </p:sp>
+      <p:sp>
+        <p:nvSpPr>
+          <p:cNvPr id="5" name="Text 2"/>
+          <p:cNvSpPr/>
+          <p:nvPr/>
+        </p:nvSpPr>
+        <p:spPr>
+          <a:xfrm>
+            <a:off x="548640" y="868680"/>
+            <a:ext cx="8046720" cy="274320"/>
+          </a:xfrm>
+          <a:prstGeom prst="rect">
+            <a:avLst/>
+          </a:prstGeom>
+          <a:noFill/>
+          <a:ln/>
+        </p:spPr>
+        <p:txBody>
+          <a:bodyPr wrap="square" rtlCol="0" anchor="ctr"/>
+          <a:lstStyle/>
+          <a:p>
+            <a:pPr indent="0" marL="0">
+              <a:buNone/>
+            </a:pPr>
+            <a:r>
+              <a:rPr lang="en-US" sz="1000" b="1" spc="300" kern="0" dirty="0">
+                <a:solidFill>
+                  <a:srgbClr val="9A6B12"/>
+                </a:solidFill>
+              </a:rPr>
+              <a:t>Scénario démo</a:t>
+            </a:r>
+            <a:endParaRPr lang="en-US" sz="1000" dirty="0"/>
+          </a:p>
+        </p:txBody>
+      </p:sp>
+      <p:sp>
+        <p:nvSpPr>
+          <p:cNvPr id="6" name="Text 3"/>
+          <p:cNvSpPr/>
+          <p:nvPr/>
+        </p:nvSpPr>
+        <p:spPr>
+          <a:xfrm>
+            <a:off x="548640" y="1143000"/>
+            <a:ext cx="8046720" cy="685800"/>
+          </a:xfrm>
+          <a:prstGeom prst="rect">
+            <a:avLst/>
+          </a:prstGeom>
+          <a:noFill/>
+          <a:ln/>
+        </p:spPr>
+        <p:txBody>
+          <a:bodyPr wrap="square" rtlCol="0" anchor="ctr"/>
+          <a:lstStyle/>
+          <a:p>
+            <a:pPr indent="0" marL="0">
+              <a:buNone/>
+            </a:pPr>
+            <a:r>
+              <a:rPr lang="en-US" sz="2800" b="1" dirty="0">
+                <a:solidFill>
+                  <a:srgbClr val="052E16"/>
+                </a:solidFill>
+                <a:latin typeface="Georgia" pitchFamily="34" charset="0"/>
+                <a:ea typeface="Georgia" pitchFamily="34" charset="-122"/>
+                <a:cs typeface="Georgia" pitchFamily="34" charset="-120"/>
+              </a:rPr>
+              <a:t>Une matinée type à la ferme</a:t>
+            </a:r>
+            <a:endParaRPr lang="en-US" sz="2800" dirty="0"/>
+          </a:p>
+        </p:txBody>
+      </p:sp>
+      <p:sp>
+        <p:nvSpPr>
+          <p:cNvPr id="7" name="Shape 4"/>
+          <p:cNvSpPr/>
+          <p:nvPr/>
+        </p:nvSpPr>
+        <p:spPr>
+          <a:xfrm>
+            <a:off x="594360" y="1993392"/>
+            <a:ext cx="109728" cy="109728"/>
+          </a:xfrm>
+          <a:prstGeom prst="ellipse">
+            <a:avLst/>
+          </a:prstGeom>
+          <a:solidFill>
+            <a:srgbClr val="22C55E"/>
+          </a:solidFill>
+          <a:ln/>
+        </p:spPr>
+      </p:sp>
+      <p:sp>
+        <p:nvSpPr>
+          <p:cNvPr id="8" name="Text 5"/>
+          <p:cNvSpPr/>
+          <p:nvPr/>
+        </p:nvSpPr>
+        <p:spPr>
+          <a:xfrm>
+            <a:off x="822960" y="1920240"/>
+            <a:ext cx="7315200" cy="228600"/>
+          </a:xfrm>
+          <a:prstGeom prst="rect">
+            <a:avLst/>
+          </a:prstGeom>
+          <a:noFill/>
+          <a:ln/>
+        </p:spPr>
+        <p:txBody>
+          <a:bodyPr wrap="square" rtlCol="0" anchor="ctr"/>
+          <a:lstStyle/>
+          <a:p>
+            <a:pPr indent="0" marL="0">
+              <a:buNone/>
+            </a:pPr>
+            <a:r>
+              <a:rPr lang="en-US" sz="1100" b="1" dirty="0">
+                <a:solidFill>
+                  <a:srgbClr val="2F2415"/>
+                </a:solidFill>
+              </a:rPr>
+              <a:t>08h00</a:t>
+            </a:r>
+            <a:endParaRPr lang="en-US" sz="1100" dirty="0"/>
+          </a:p>
+        </p:txBody>
+      </p:sp>
+      <p:sp>
+        <p:nvSpPr>
+          <p:cNvPr id="9" name="Text 6"/>
+          <p:cNvSpPr/>
+          <p:nvPr/>
+        </p:nvSpPr>
+        <p:spPr>
+          <a:xfrm>
+            <a:off x="822960" y="2121408"/>
+            <a:ext cx="7315200" cy="274320"/>
+          </a:xfrm>
+          <a:prstGeom prst="rect">
+            <a:avLst/>
+          </a:prstGeom>
+          <a:noFill/>
+          <a:ln/>
+        </p:spPr>
+        <p:txBody>
+          <a:bodyPr wrap="square" rtlCol="0" anchor="ctr"/>
+          <a:lstStyle/>
+          <a:p>
+            <a:pPr indent="0" marL="0">
+              <a:buNone/>
+            </a:pPr>
+            <a:r>
+              <a:rPr lang="en-US" sz="900" dirty="0">
+                <a:solidFill>
+                  <a:srgbClr val="8A7456"/>
+                </a:solidFill>
+              </a:rPr>
+              <a:t>Accueil : 4 300 têtes, rupture aliment, 28°C capteurs</a:t>
+            </a:r>
+            <a:endParaRPr lang="en-US" sz="900" dirty="0"/>
+          </a:p>
+        </p:txBody>
+      </p:sp>
+      <p:sp>
+        <p:nvSpPr>
+          <p:cNvPr id="10" name="Shape 7"/>
+          <p:cNvSpPr/>
+          <p:nvPr/>
+        </p:nvSpPr>
+        <p:spPr>
+          <a:xfrm>
+            <a:off x="594360" y="2560320"/>
+            <a:ext cx="109728" cy="109728"/>
+          </a:xfrm>
+          <a:prstGeom prst="ellipse">
+            <a:avLst/>
+          </a:prstGeom>
+          <a:solidFill>
+            <a:srgbClr val="22C55E"/>
+          </a:solidFill>
+          <a:ln/>
+        </p:spPr>
+      </p:sp>
+      <p:sp>
+        <p:nvSpPr>
+          <p:cNvPr id="11" name="Text 8"/>
+          <p:cNvSpPr/>
+          <p:nvPr/>
+        </p:nvSpPr>
+        <p:spPr>
+          <a:xfrm>
+            <a:off x="822960" y="2487168"/>
+            <a:ext cx="7315200" cy="228600"/>
+          </a:xfrm>
+          <a:prstGeom prst="rect">
+            <a:avLst/>
+          </a:prstGeom>
+          <a:noFill/>
+          <a:ln/>
+        </p:spPr>
+        <p:txBody>
+          <a:bodyPr wrap="square" rtlCol="0" anchor="ctr"/>
+          <a:lstStyle/>
+          <a:p>
+            <a:pPr indent="0" marL="0">
+              <a:buNone/>
+            </a:pPr>
+            <a:r>
+              <a:rPr lang="en-US" sz="1100" b="1" dirty="0">
+                <a:solidFill>
+                  <a:srgbClr val="2F2415"/>
+                </a:solidFill>
+              </a:rPr>
+              <a:t>08h15</a:t>
+            </a:r>
+            <a:endParaRPr lang="en-US" sz="1100" dirty="0"/>
+          </a:p>
+        </p:txBody>
+      </p:sp>
+      <p:sp>
+        <p:nvSpPr>
+          <p:cNvPr id="12" name="Text 9"/>
+          <p:cNvSpPr/>
+          <p:nvPr/>
+        </p:nvSpPr>
+        <p:spPr>
+          <a:xfrm>
+            <a:off x="822960" y="2688336"/>
+            <a:ext cx="7315200" cy="274320"/>
+          </a:xfrm>
+          <a:prstGeom prst="rect">
+            <a:avLst/>
+          </a:prstGeom>
+          <a:noFill/>
+          <a:ln/>
+        </p:spPr>
+        <p:txBody>
+          <a:bodyPr wrap="square" rtlCol="0" anchor="ctr"/>
+          <a:lstStyle/>
+          <a:p>
+            <a:pPr indent="0" marL="0">
+              <a:buNone/>
+            </a:pPr>
+            <a:r>
+              <a:rPr lang="en-US" sz="900" dirty="0">
+                <a:solidFill>
+                  <a:srgbClr val="8A7456"/>
+                </a:solidFill>
+              </a:rPr>
+              <a:t>Hey Horizon : réception aliment validée en 30 secondes</a:t>
+            </a:r>
+            <a:endParaRPr lang="en-US" sz="900" dirty="0"/>
+          </a:p>
+        </p:txBody>
+      </p:sp>
+      <p:sp>
+        <p:nvSpPr>
+          <p:cNvPr id="13" name="Shape 10"/>
+          <p:cNvSpPr/>
+          <p:nvPr/>
+        </p:nvSpPr>
+        <p:spPr>
+          <a:xfrm>
+            <a:off x="594360" y="3127248"/>
+            <a:ext cx="109728" cy="109728"/>
+          </a:xfrm>
+          <a:prstGeom prst="ellipse">
+            <a:avLst/>
+          </a:prstGeom>
+          <a:solidFill>
+            <a:srgbClr val="22C55E"/>
+          </a:solidFill>
+          <a:ln/>
+        </p:spPr>
+      </p:sp>
+      <p:sp>
+        <p:nvSpPr>
+          <p:cNvPr id="14" name="Text 11"/>
+          <p:cNvSpPr/>
+          <p:nvPr/>
+        </p:nvSpPr>
+        <p:spPr>
+          <a:xfrm>
+            <a:off x="822960" y="3054096"/>
+            <a:ext cx="7315200" cy="228600"/>
+          </a:xfrm>
+          <a:prstGeom prst="rect">
+            <a:avLst/>
+          </a:prstGeom>
+          <a:noFill/>
+          <a:ln/>
+        </p:spPr>
+        <p:txBody>
+          <a:bodyPr wrap="square" rtlCol="0" anchor="ctr"/>
+          <a:lstStyle/>
+          <a:p>
+            <a:pPr indent="0" marL="0">
+              <a:buNone/>
+            </a:pPr>
+            <a:r>
+              <a:rPr lang="en-US" sz="1100" b="1" dirty="0">
+                <a:solidFill>
+                  <a:srgbClr val="2F2415"/>
+                </a:solidFill>
+              </a:rPr>
+              <a:t>09h00</a:t>
+            </a:r>
+            <a:endParaRPr lang="en-US" sz="1100" dirty="0"/>
+          </a:p>
+        </p:txBody>
+      </p:sp>
+      <p:sp>
+        <p:nvSpPr>
+          <p:cNvPr id="15" name="Text 12"/>
+          <p:cNvSpPr/>
+          <p:nvPr/>
+        </p:nvSpPr>
+        <p:spPr>
+          <a:xfrm>
+            <a:off x="822960" y="3255264"/>
+            <a:ext cx="7315200" cy="274320"/>
+          </a:xfrm>
+          <a:prstGeom prst="rect">
+            <a:avLst/>
+          </a:prstGeom>
+          <a:noFill/>
+          <a:ln/>
+        </p:spPr>
+        <p:txBody>
+          <a:bodyPr wrap="square" rtlCol="0" anchor="ctr"/>
+          <a:lstStyle/>
+          <a:p>
+            <a:pPr indent="0" marL="0">
+              <a:buNone/>
+            </a:pPr>
+            <a:r>
+              <a:rPr lang="en-US" sz="900" dirty="0">
+                <a:solidFill>
+                  <a:srgbClr val="8A7456"/>
+                </a:solidFill>
+              </a:rPr>
+              <a:t>Commercial : vente restaurant, marge + encaissement mobile money</a:t>
+            </a:r>
+            <a:endParaRPr lang="en-US" sz="900" dirty="0"/>
+          </a:p>
+        </p:txBody>
+      </p:sp>
+      <p:sp>
+        <p:nvSpPr>
+          <p:cNvPr id="16" name="Shape 13"/>
+          <p:cNvSpPr/>
+          <p:nvPr/>
+        </p:nvSpPr>
+        <p:spPr>
+          <a:xfrm>
+            <a:off x="594360" y="3694176"/>
+            <a:ext cx="109728" cy="109728"/>
+          </a:xfrm>
+          <a:prstGeom prst="ellipse">
+            <a:avLst/>
+          </a:prstGeom>
+          <a:solidFill>
+            <a:srgbClr val="22C55E"/>
+          </a:solidFill>
+          <a:ln/>
+        </p:spPr>
+      </p:sp>
+      <p:sp>
+        <p:nvSpPr>
+          <p:cNvPr id="17" name="Text 14"/>
+          <p:cNvSpPr/>
+          <p:nvPr/>
+        </p:nvSpPr>
+        <p:spPr>
+          <a:xfrm>
+            <a:off x="822960" y="3621024"/>
+            <a:ext cx="7315200" cy="228600"/>
+          </a:xfrm>
+          <a:prstGeom prst="rect">
+            <a:avLst/>
+          </a:prstGeom>
+          <a:noFill/>
+          <a:ln/>
+        </p:spPr>
+        <p:txBody>
+          <a:bodyPr wrap="square" rtlCol="0" anchor="ctr"/>
+          <a:lstStyle/>
+          <a:p>
+            <a:pPr indent="0" marL="0">
+              <a:buNone/>
+            </a:pPr>
+            <a:r>
+              <a:rPr lang="en-US" sz="1100" b="1" dirty="0">
+                <a:solidFill>
+                  <a:srgbClr val="2F2415"/>
+                </a:solidFill>
+              </a:rPr>
+              <a:t>10h30</a:t>
+            </a:r>
+            <a:endParaRPr lang="en-US" sz="1100" dirty="0"/>
+          </a:p>
+        </p:txBody>
+      </p:sp>
+      <p:sp>
+        <p:nvSpPr>
+          <p:cNvPr id="18" name="Text 15"/>
+          <p:cNvSpPr/>
+          <p:nvPr/>
+        </p:nvSpPr>
+        <p:spPr>
+          <a:xfrm>
+            <a:off x="822960" y="3822192"/>
+            <a:ext cx="7315200" cy="274320"/>
+          </a:xfrm>
+          <a:prstGeom prst="rect">
+            <a:avLst/>
+          </a:prstGeom>
+          <a:noFill/>
+          <a:ln/>
+        </p:spPr>
+        <p:txBody>
+          <a:bodyPr wrap="square" rtlCol="0" anchor="ctr"/>
+          <a:lstStyle/>
+          <a:p>
+            <a:pPr indent="0" marL="0">
+              <a:buNone/>
+            </a:pPr>
+            <a:r>
+              <a:rPr lang="en-US" sz="900" dirty="0">
+                <a:solidFill>
+                  <a:srgbClr val="8A7456"/>
+                </a:solidFill>
+              </a:rPr>
+              <a:t>Smart Farm : alerte chaleur → ventilation planifiée</a:t>
+            </a:r>
+            <a:endParaRPr lang="en-US" sz="900" dirty="0"/>
+          </a:p>
+        </p:txBody>
+      </p:sp>
+      <p:sp>
+        <p:nvSpPr>
+          <p:cNvPr id="19" name="Shape 16"/>
+          <p:cNvSpPr/>
+          <p:nvPr/>
+        </p:nvSpPr>
+        <p:spPr>
+          <a:xfrm>
+            <a:off x="594360" y="4261104"/>
+            <a:ext cx="109728" cy="109728"/>
+          </a:xfrm>
+          <a:prstGeom prst="ellipse">
+            <a:avLst/>
+          </a:prstGeom>
+          <a:solidFill>
+            <a:srgbClr val="22C55E"/>
+          </a:solidFill>
+          <a:ln/>
+        </p:spPr>
+      </p:sp>
+      <p:sp>
+        <p:nvSpPr>
+          <p:cNvPr id="20" name="Text 17"/>
+          <p:cNvSpPr/>
+          <p:nvPr/>
+        </p:nvSpPr>
+        <p:spPr>
+          <a:xfrm>
+            <a:off x="822960" y="4187952"/>
+            <a:ext cx="7315200" cy="228600"/>
+          </a:xfrm>
+          <a:prstGeom prst="rect">
+            <a:avLst/>
+          </a:prstGeom>
+          <a:noFill/>
+          <a:ln/>
+        </p:spPr>
+        <p:txBody>
+          <a:bodyPr wrap="square" rtlCol="0" anchor="ctr"/>
+          <a:lstStyle/>
+          <a:p>
+            <a:pPr indent="0" marL="0">
+              <a:buNone/>
+            </a:pPr>
+            <a:r>
+              <a:rPr lang="en-US" sz="1100" b="1" dirty="0">
+                <a:solidFill>
+                  <a:srgbClr val="2F2415"/>
+                </a:solidFill>
+              </a:rPr>
+              <a:t>18h00</a:t>
+            </a:r>
+            <a:endParaRPr lang="en-US" sz="1100" dirty="0"/>
+          </a:p>
+        </p:txBody>
+      </p:sp>
+      <p:sp>
+        <p:nvSpPr>
+          <p:cNvPr id="21" name="Text 18"/>
+          <p:cNvSpPr/>
+          <p:nvPr/>
+        </p:nvSpPr>
+        <p:spPr>
+          <a:xfrm>
+            <a:off x="822960" y="4389120"/>
+            <a:ext cx="7315200" cy="274320"/>
+          </a:xfrm>
+          <a:prstGeom prst="rect">
+            <a:avLst/>
+          </a:prstGeom>
+          <a:noFill/>
+          <a:ln/>
+        </p:spPr>
+        <p:txBody>
+          <a:bodyPr wrap="square" rtlCol="0" anchor="ctr"/>
+          <a:lstStyle/>
+          <a:p>
+            <a:pPr indent="0" marL="0">
+              <a:buNone/>
+            </a:pPr>
+            <a:r>
+              <a:rPr lang="en-US" sz="900" dirty="0">
+                <a:solidFill>
+                  <a:srgbClr val="8A7456"/>
+                </a:solidFill>
+              </a:rPr>
+              <a:t>Journal : 12 événements terrain tracés automatiquement</a:t>
+            </a:r>
+            <a:endParaRPr lang="en-US" sz="900" dirty="0"/>
+          </a:p>
+        </p:txBody>
+      </p:sp>
+    </p:spTree>
+  </p:cSld>
+  <p:clrMapOvr>
+    <a:masterClrMapping/>
+  </p:clrMapOvr>
+</p:sld>
+</file>
+
+<file path=ppt/slides/slide16.xml><?xml version="1.0" encoding="utf-8"?>
+<p:sld xmlns:a="http://schemas.openxmlformats.org/drawingml/2006/main" xmlns:r="http://schemas.openxmlformats.org/officeDocument/2006/relationships" xmlns:p="http://schemas.openxmlformats.org/presentationml/2006/main">
+  <p:cSld name="Slide 16">
+    <p:bg>
+      <p:bgPr>
+        <a:solidFill>
+          <a:srgbClr val="041A0D"/>
+        </a:solidFill>
+      </p:bgPr>
+    </p:bg>
+    <p:spTree>
+      <p:nvGrpSpPr>
+        <p:cNvPr id="1" name=""/>
+        <p:cNvGrpSpPr/>
+        <p:nvPr/>
+      </p:nvGrpSpPr>
+      <p:grpSpPr>
+        <a:xfrm>
+          <a:off x="0" y="0"/>
+          <a:ext cx="0" cy="0"/>
+          <a:chOff x="0" y="0"/>
+          <a:chExt cx="0" cy="0"/>
+        </a:xfrm>
+      </p:grpSpPr>
+      <p:pic>
+        <p:nvPicPr>
+          <p:cNvPr id="2" name="Image 0" descr="/workspace/public/horizon-farm-logo-transparent.png">    </p:cNvPr>
+          <p:cNvPicPr>
+            <a:picLocks noChangeAspect="1"/>
+          </p:cNvPicPr>
+          <p:nvPr/>
+        </p:nvPicPr>
+        <p:blipFill>
+          <a:blip r:embed="rId1"/>
+          <a:stretch>
+            <a:fillRect/>
+          </a:stretch>
+        </p:blipFill>
+        <p:spPr>
+          <a:xfrm>
+            <a:off x="365760" y="228600"/>
+            <a:ext cx="1645920" cy="502920"/>
+          </a:xfrm>
+          <a:prstGeom prst="rect">
+            <a:avLst/>
+          </a:prstGeom>
+        </p:spPr>
+      </p:pic>
+      <p:sp>
+        <p:nvSpPr>
+          <p:cNvPr id="3" name="Text 0"/>
+          <p:cNvSpPr/>
+          <p:nvPr/>
+        </p:nvSpPr>
+        <p:spPr>
+          <a:xfrm>
+            <a:off x="8046720" y="320040"/>
+            <a:ext cx="914400" cy="274320"/>
+          </a:xfrm>
+          <a:prstGeom prst="rect">
+            <a:avLst/>
+          </a:prstGeom>
+          <a:noFill/>
+          <a:ln/>
+        </p:spPr>
+        <p:txBody>
+          <a:bodyPr wrap="square" rtlCol="0" anchor="ctr"/>
+          <a:lstStyle/>
+          <a:p>
+            <a:pPr algn="r" indent="0" marL="0">
+              <a:buNone/>
+            </a:pPr>
+            <a:r>
+              <a:rPr lang="en-US" sz="800" b="1" dirty="0">
+                <a:solidFill>
+                  <a:srgbClr val="6B9A7A"/>
+                </a:solidFill>
+              </a:rPr>
+              <a:t>16 / 22</a:t>
+            </a:r>
+            <a:endParaRPr lang="en-US" sz="800" dirty="0"/>
+          </a:p>
+        </p:txBody>
+      </p:sp>
+      <p:sp>
+        <p:nvSpPr>
+          <p:cNvPr id="4" name="Shape 1"/>
+          <p:cNvSpPr/>
+          <p:nvPr/>
+        </p:nvSpPr>
+        <p:spPr>
+          <a:xfrm>
+            <a:off x="0" y="4983480"/>
+            <a:ext cx="9144000" cy="73152"/>
+          </a:xfrm>
+          <a:prstGeom prst="rect">
+            <a:avLst/>
+          </a:prstGeom>
+          <a:solidFill>
+            <a:srgbClr val="22C55E"/>
+          </a:solidFill>
+          <a:ln w="12700">
+            <a:solidFill>
+              <a:srgbClr val="22C55E"/>
+            </a:solidFill>
+            <a:prstDash val="solid"/>
+          </a:ln>
+        </p:spPr>
+      </p:sp>
+      <p:sp>
+        <p:nvSpPr>
+          <p:cNvPr id="5" name="Text 2"/>
+          <p:cNvSpPr/>
+          <p:nvPr/>
+        </p:nvSpPr>
+        <p:spPr>
+          <a:xfrm>
+            <a:off x="548640" y="868680"/>
+            <a:ext cx="8046720" cy="274320"/>
+          </a:xfrm>
+          <a:prstGeom prst="rect">
+            <a:avLst/>
+          </a:prstGeom>
+          <a:noFill/>
+          <a:ln/>
+        </p:spPr>
+        <p:txBody>
+          <a:bodyPr wrap="square" rtlCol="0" anchor="ctr"/>
+          <a:lstStyle/>
+          <a:p>
+            <a:pPr indent="0" marL="0">
+              <a:buNone/>
+            </a:pPr>
+            <a:r>
+              <a:rPr lang="en-US" sz="1000" b="1" spc="300" kern="0" dirty="0">
+                <a:solidFill>
+                  <a:srgbClr val="B8954A"/>
+                </a:solidFill>
+              </a:rPr>
+              <a:t>ROI abonnement</a:t>
+            </a:r>
+            <a:endParaRPr lang="en-US" sz="1000" dirty="0"/>
+          </a:p>
+        </p:txBody>
+      </p:sp>
+      <p:sp>
+        <p:nvSpPr>
+          <p:cNvPr id="6" name="Text 3"/>
+          <p:cNvSpPr/>
+          <p:nvPr/>
+        </p:nvSpPr>
+        <p:spPr>
+          <a:xfrm>
+            <a:off x="548640" y="1143000"/>
+            <a:ext cx="8046720" cy="685800"/>
+          </a:xfrm>
+          <a:prstGeom prst="rect">
+            <a:avLst/>
+          </a:prstGeom>
+          <a:noFill/>
+          <a:ln/>
+        </p:spPr>
+        <p:txBody>
+          <a:bodyPr wrap="square" rtlCol="0" anchor="ctr"/>
+          <a:lstStyle/>
+          <a:p>
+            <a:pPr indent="0" marL="0">
+              <a:buNone/>
+            </a:pPr>
+            <a:r>
+              <a:rPr lang="en-US" sz="2800" b="1" dirty="0">
+                <a:solidFill>
+                  <a:srgbClr val="FFFFFF"/>
+                </a:solidFill>
+                <a:latin typeface="Georgia" pitchFamily="34" charset="0"/>
+                <a:ea typeface="Georgia" pitchFamily="34" charset="-122"/>
+                <a:cs typeface="Georgia" pitchFamily="34" charset="-120"/>
+              </a:rPr>
+              <a:t>Pourquoi s'abonner à Horizon Farm ?</a:t>
+            </a:r>
+            <a:endParaRPr lang="en-US" sz="2800" dirty="0"/>
+          </a:p>
+        </p:txBody>
+      </p:sp>
+      <p:sp>
+        <p:nvSpPr>
+          <p:cNvPr id="7" name="Shape 4"/>
+          <p:cNvSpPr/>
+          <p:nvPr/>
+        </p:nvSpPr>
+        <p:spPr>
+          <a:xfrm>
+            <a:off x="731520" y="3017520"/>
+            <a:ext cx="1097280" cy="457200"/>
+          </a:xfrm>
+          <a:prstGeom prst="rect">
+            <a:avLst/>
+          </a:prstGeom>
+          <a:solidFill>
+            <a:srgbClr val="22C55E"/>
+          </a:solidFill>
+          <a:ln/>
+        </p:spPr>
+      </p:sp>
+      <p:sp>
+        <p:nvSpPr>
+          <p:cNvPr id="8" name="Text 5"/>
+          <p:cNvSpPr/>
+          <p:nvPr/>
+        </p:nvSpPr>
+        <p:spPr>
+          <a:xfrm>
+            <a:off x="731520" y="1828800"/>
+            <a:ext cx="1097280" cy="274320"/>
           </a:xfrm>
           <a:prstGeom prst="rect">
             <a:avLst/>
@@ -4245,38 +5821,675 @@
               <a:buNone/>
             </a:pPr>
             <a:r>
-              <a:rPr lang="en-US" sz="1400" dirty="0">
+              <a:rPr lang="en-US" sz="1200" b="1" dirty="0">
+                <a:solidFill>
+                  <a:srgbClr val="FFFFFF"/>
+                </a:solidFill>
+              </a:rPr>
+              <a:t>−50%</a:t>
+            </a:r>
+            <a:endParaRPr lang="en-US" sz="1200" dirty="0"/>
+          </a:p>
+        </p:txBody>
+      </p:sp>
+      <p:sp>
+        <p:nvSpPr>
+          <p:cNvPr id="9" name="Text 6"/>
+          <p:cNvSpPr/>
+          <p:nvPr/>
+        </p:nvSpPr>
+        <p:spPr>
+          <a:xfrm>
+            <a:off x="640080" y="3611880"/>
+            <a:ext cx="1280160" cy="411480"/>
+          </a:xfrm>
+          <a:prstGeom prst="rect">
+            <a:avLst/>
+          </a:prstGeom>
+          <a:noFill/>
+          <a:ln/>
+        </p:spPr>
+        <p:txBody>
+          <a:bodyPr wrap="square" rtlCol="0" anchor="ctr"/>
+          <a:lstStyle/>
+          <a:p>
+            <a:pPr algn="ctr" indent="0" marL="0">
+              <a:buNone/>
+            </a:pPr>
+            <a:r>
+              <a:rPr lang="en-US" sz="800" dirty="0">
+                <a:solidFill>
+                  <a:srgbClr val="C8E6C9"/>
+                </a:solidFill>
+              </a:rPr>
+              <a:t>Temps saisie</a:t>
+            </a:r>
+            <a:endParaRPr lang="en-US" sz="800" dirty="0"/>
+          </a:p>
+        </p:txBody>
+      </p:sp>
+      <p:sp>
+        <p:nvSpPr>
+          <p:cNvPr id="10" name="Shape 7"/>
+          <p:cNvSpPr/>
+          <p:nvPr/>
+        </p:nvSpPr>
+        <p:spPr>
+          <a:xfrm>
+            <a:off x="2331720" y="2697480"/>
+            <a:ext cx="1097280" cy="777240"/>
+          </a:xfrm>
+          <a:prstGeom prst="rect">
+            <a:avLst/>
+          </a:prstGeom>
+          <a:solidFill>
+            <a:srgbClr val="E8A317"/>
+          </a:solidFill>
+          <a:ln/>
+        </p:spPr>
+      </p:sp>
+      <p:sp>
+        <p:nvSpPr>
+          <p:cNvPr id="11" name="Text 8"/>
+          <p:cNvSpPr/>
+          <p:nvPr/>
+        </p:nvSpPr>
+        <p:spPr>
+          <a:xfrm>
+            <a:off x="2331720" y="1828800"/>
+            <a:ext cx="1097280" cy="274320"/>
+          </a:xfrm>
+          <a:prstGeom prst="rect">
+            <a:avLst/>
+          </a:prstGeom>
+          <a:noFill/>
+          <a:ln/>
+        </p:spPr>
+        <p:txBody>
+          <a:bodyPr wrap="square" rtlCol="0" anchor="ctr"/>
+          <a:lstStyle/>
+          <a:p>
+            <a:pPr algn="ctr" indent="0" marL="0">
+              <a:buNone/>
+            </a:pPr>
+            <a:r>
+              <a:rPr lang="en-US" sz="1200" b="1" dirty="0">
+                <a:solidFill>
+                  <a:srgbClr val="FFFFFF"/>
+                </a:solidFill>
+              </a:rPr>
+              <a:t>+100%</a:t>
+            </a:r>
+            <a:endParaRPr lang="en-US" sz="1200" dirty="0"/>
+          </a:p>
+        </p:txBody>
+      </p:sp>
+      <p:sp>
+        <p:nvSpPr>
+          <p:cNvPr id="12" name="Text 9"/>
+          <p:cNvSpPr/>
+          <p:nvPr/>
+        </p:nvSpPr>
+        <p:spPr>
+          <a:xfrm>
+            <a:off x="2240280" y="3611880"/>
+            <a:ext cx="1280160" cy="411480"/>
+          </a:xfrm>
+          <a:prstGeom prst="rect">
+            <a:avLst/>
+          </a:prstGeom>
+          <a:noFill/>
+          <a:ln/>
+        </p:spPr>
+        <p:txBody>
+          <a:bodyPr wrap="square" rtlCol="0" anchor="ctr"/>
+          <a:lstStyle/>
+          <a:p>
+            <a:pPr algn="ctr" indent="0" marL="0">
+              <a:buNone/>
+            </a:pPr>
+            <a:r>
+              <a:rPr lang="en-US" sz="800" dirty="0">
+                <a:solidFill>
+                  <a:srgbClr val="C8E6C9"/>
+                </a:solidFill>
+              </a:rPr>
+              <a:t>Visibilité cash</a:t>
+            </a:r>
+            <a:endParaRPr lang="en-US" sz="800" dirty="0"/>
+          </a:p>
+        </p:txBody>
+      </p:sp>
+      <p:sp>
+        <p:nvSpPr>
+          <p:cNvPr id="13" name="Shape 10"/>
+          <p:cNvSpPr/>
+          <p:nvPr/>
+        </p:nvSpPr>
+        <p:spPr>
+          <a:xfrm>
+            <a:off x="3931920" y="2377440"/>
+            <a:ext cx="1097280" cy="1097280"/>
+          </a:xfrm>
+          <a:prstGeom prst="rect">
+            <a:avLst/>
+          </a:prstGeom>
+          <a:solidFill>
+            <a:srgbClr val="22C55E"/>
+          </a:solidFill>
+          <a:ln/>
+        </p:spPr>
+      </p:sp>
+      <p:sp>
+        <p:nvSpPr>
+          <p:cNvPr id="14" name="Text 11"/>
+          <p:cNvSpPr/>
+          <p:nvPr/>
+        </p:nvSpPr>
+        <p:spPr>
+          <a:xfrm>
+            <a:off x="3931920" y="1828800"/>
+            <a:ext cx="1097280" cy="274320"/>
+          </a:xfrm>
+          <a:prstGeom prst="rect">
+            <a:avLst/>
+          </a:prstGeom>
+          <a:noFill/>
+          <a:ln/>
+        </p:spPr>
+        <p:txBody>
+          <a:bodyPr wrap="square" rtlCol="0" anchor="ctr"/>
+          <a:lstStyle/>
+          <a:p>
+            <a:pPr algn="ctr" indent="0" marL="0">
+              <a:buNone/>
+            </a:pPr>
+            <a:r>
+              <a:rPr lang="en-US" sz="1200" b="1" dirty="0">
+                <a:solidFill>
+                  <a:srgbClr val="FFFFFF"/>
+                </a:solidFill>
+              </a:rPr>
+              <a:t>−30%</a:t>
+            </a:r>
+            <a:endParaRPr lang="en-US" sz="1200" dirty="0"/>
+          </a:p>
+        </p:txBody>
+      </p:sp>
+      <p:sp>
+        <p:nvSpPr>
+          <p:cNvPr id="15" name="Text 12"/>
+          <p:cNvSpPr/>
+          <p:nvPr/>
+        </p:nvSpPr>
+        <p:spPr>
+          <a:xfrm>
+            <a:off x="3840480" y="3611880"/>
+            <a:ext cx="1280160" cy="411480"/>
+          </a:xfrm>
+          <a:prstGeom prst="rect">
+            <a:avLst/>
+          </a:prstGeom>
+          <a:noFill/>
+          <a:ln/>
+        </p:spPr>
+        <p:txBody>
+          <a:bodyPr wrap="square" rtlCol="0" anchor="ctr"/>
+          <a:lstStyle/>
+          <a:p>
+            <a:pPr algn="ctr" indent="0" marL="0">
+              <a:buNone/>
+            </a:pPr>
+            <a:r>
+              <a:rPr lang="en-US" sz="800" dirty="0">
+                <a:solidFill>
+                  <a:srgbClr val="C8E6C9"/>
+                </a:solidFill>
+              </a:rPr>
+              <a:t>Ruptures évitées</a:t>
+            </a:r>
+            <a:endParaRPr lang="en-US" sz="800" dirty="0"/>
+          </a:p>
+        </p:txBody>
+      </p:sp>
+      <p:sp>
+        <p:nvSpPr>
+          <p:cNvPr id="16" name="Shape 13"/>
+          <p:cNvSpPr/>
+          <p:nvPr/>
+        </p:nvSpPr>
+        <p:spPr>
+          <a:xfrm>
+            <a:off x="5532120" y="3017520"/>
+            <a:ext cx="1097280" cy="457200"/>
+          </a:xfrm>
+          <a:prstGeom prst="rect">
+            <a:avLst/>
+          </a:prstGeom>
+          <a:solidFill>
+            <a:srgbClr val="E8A317"/>
+          </a:solidFill>
+          <a:ln/>
+        </p:spPr>
+      </p:sp>
+      <p:sp>
+        <p:nvSpPr>
+          <p:cNvPr id="17" name="Text 14"/>
+          <p:cNvSpPr/>
+          <p:nvPr/>
+        </p:nvSpPr>
+        <p:spPr>
+          <a:xfrm>
+            <a:off x="5532120" y="1828800"/>
+            <a:ext cx="1097280" cy="274320"/>
+          </a:xfrm>
+          <a:prstGeom prst="rect">
+            <a:avLst/>
+          </a:prstGeom>
+          <a:noFill/>
+          <a:ln/>
+        </p:spPr>
+        <p:txBody>
+          <a:bodyPr wrap="square" rtlCol="0" anchor="ctr"/>
+          <a:lstStyle/>
+          <a:p>
+            <a:pPr algn="ctr" indent="0" marL="0">
+              <a:buNone/>
+            </a:pPr>
+            <a:r>
+              <a:rPr lang="en-US" sz="1200" b="1" dirty="0">
+                <a:solidFill>
+                  <a:srgbClr val="FFFFFF"/>
+                </a:solidFill>
+              </a:rPr>
+              <a:t>24/7</a:t>
+            </a:r>
+            <a:endParaRPr lang="en-US" sz="1200" dirty="0"/>
+          </a:p>
+        </p:txBody>
+      </p:sp>
+      <p:sp>
+        <p:nvSpPr>
+          <p:cNvPr id="18" name="Text 15"/>
+          <p:cNvSpPr/>
+          <p:nvPr/>
+        </p:nvSpPr>
+        <p:spPr>
+          <a:xfrm>
+            <a:off x="5440680" y="3611880"/>
+            <a:ext cx="1280160" cy="411480"/>
+          </a:xfrm>
+          <a:prstGeom prst="rect">
+            <a:avLst/>
+          </a:prstGeom>
+          <a:noFill/>
+          <a:ln/>
+        </p:spPr>
+        <p:txBody>
+          <a:bodyPr wrap="square" rtlCol="0" anchor="ctr"/>
+          <a:lstStyle/>
+          <a:p>
+            <a:pPr algn="ctr" indent="0" marL="0">
+              <a:buNone/>
+            </a:pPr>
+            <a:r>
+              <a:rPr lang="en-US" sz="800" dirty="0">
+                <a:solidFill>
+                  <a:srgbClr val="C8E6C9"/>
+                </a:solidFill>
+              </a:rPr>
+              <a:t>Surveillance</a:t>
+            </a:r>
+            <a:endParaRPr lang="en-US" sz="800" dirty="0"/>
+          </a:p>
+        </p:txBody>
+      </p:sp>
+      <p:sp>
+        <p:nvSpPr>
+          <p:cNvPr id="19" name="Shape 16"/>
+          <p:cNvSpPr/>
+          <p:nvPr/>
+        </p:nvSpPr>
+        <p:spPr>
+          <a:xfrm>
+            <a:off x="7132320" y="2697480"/>
+            <a:ext cx="1097280" cy="777240"/>
+          </a:xfrm>
+          <a:prstGeom prst="rect">
+            <a:avLst/>
+          </a:prstGeom>
+          <a:solidFill>
+            <a:srgbClr val="22C55E"/>
+          </a:solidFill>
+          <a:ln/>
+        </p:spPr>
+      </p:sp>
+      <p:sp>
+        <p:nvSpPr>
+          <p:cNvPr id="20" name="Text 17"/>
+          <p:cNvSpPr/>
+          <p:nvPr/>
+        </p:nvSpPr>
+        <p:spPr>
+          <a:xfrm>
+            <a:off x="7132320" y="1828800"/>
+            <a:ext cx="1097280" cy="274320"/>
+          </a:xfrm>
+          <a:prstGeom prst="rect">
+            <a:avLst/>
+          </a:prstGeom>
+          <a:noFill/>
+          <a:ln/>
+        </p:spPr>
+        <p:txBody>
+          <a:bodyPr wrap="square" rtlCol="0" anchor="ctr"/>
+          <a:lstStyle/>
+          <a:p>
+            <a:pPr algn="ctr" indent="0" marL="0">
+              <a:buNone/>
+            </a:pPr>
+            <a:r>
+              <a:rPr lang="en-US" sz="1200" b="1" dirty="0">
+                <a:solidFill>
+                  <a:srgbClr val="FFFFFF"/>
+                </a:solidFill>
+              </a:rPr>
+              <a:t>Temps réel</a:t>
+            </a:r>
+            <a:endParaRPr lang="en-US" sz="1200" dirty="0"/>
+          </a:p>
+        </p:txBody>
+      </p:sp>
+      <p:sp>
+        <p:nvSpPr>
+          <p:cNvPr id="21" name="Text 18"/>
+          <p:cNvSpPr/>
+          <p:nvPr/>
+        </p:nvSpPr>
+        <p:spPr>
+          <a:xfrm>
+            <a:off x="7040880" y="3611880"/>
+            <a:ext cx="1280160" cy="411480"/>
+          </a:xfrm>
+          <a:prstGeom prst="rect">
+            <a:avLst/>
+          </a:prstGeom>
+          <a:noFill/>
+          <a:ln/>
+        </p:spPr>
+        <p:txBody>
+          <a:bodyPr wrap="square" rtlCol="0" anchor="ctr"/>
+          <a:lstStyle/>
+          <a:p>
+            <a:pPr algn="ctr" indent="0" marL="0">
+              <a:buNone/>
+            </a:pPr>
+            <a:r>
+              <a:rPr lang="en-US" sz="800" dirty="0">
+                <a:solidFill>
+                  <a:srgbClr val="C8E6C9"/>
+                </a:solidFill>
+              </a:rPr>
+              <a:t>Marge/vente</a:t>
+            </a:r>
+            <a:endParaRPr lang="en-US" sz="800" dirty="0"/>
+          </a:p>
+        </p:txBody>
+      </p:sp>
+    </p:spTree>
+  </p:cSld>
+  <p:clrMapOvr>
+    <a:masterClrMapping/>
+  </p:clrMapOvr>
+</p:sld>
+</file>
+
+<file path=ppt/slides/slide17.xml><?xml version="1.0" encoding="utf-8"?>
+<p:sld xmlns:a="http://schemas.openxmlformats.org/drawingml/2006/main" xmlns:r="http://schemas.openxmlformats.org/officeDocument/2006/relationships" xmlns:p="http://schemas.openxmlformats.org/presentationml/2006/main">
+  <p:cSld name="Slide 17">
+    <p:bg>
+      <p:bgPr>
+        <a:solidFill>
+          <a:srgbClr val="FFFDF8"/>
+        </a:solidFill>
+      </p:bgPr>
+    </p:bg>
+    <p:spTree>
+      <p:nvGrpSpPr>
+        <p:cNvPr id="1" name=""/>
+        <p:cNvGrpSpPr/>
+        <p:nvPr/>
+      </p:nvGrpSpPr>
+      <p:grpSpPr>
+        <a:xfrm>
+          <a:off x="0" y="0"/>
+          <a:ext cx="0" cy="0"/>
+          <a:chOff x="0" y="0"/>
+          <a:chExt cx="0" cy="0"/>
+        </a:xfrm>
+      </p:grpSpPr>
+      <p:pic>
+        <p:nvPicPr>
+          <p:cNvPr id="2" name="Image 0" descr="/workspace/public/horizon-farm-logo-transparent.png">    </p:cNvPr>
+          <p:cNvPicPr>
+            <a:picLocks noChangeAspect="1"/>
+          </p:cNvPicPr>
+          <p:nvPr/>
+        </p:nvPicPr>
+        <p:blipFill>
+          <a:blip r:embed="rId1"/>
+          <a:stretch>
+            <a:fillRect/>
+          </a:stretch>
+        </p:blipFill>
+        <p:spPr>
+          <a:xfrm>
+            <a:off x="365760" y="228600"/>
+            <a:ext cx="1645920" cy="502920"/>
+          </a:xfrm>
+          <a:prstGeom prst="rect">
+            <a:avLst/>
+          </a:prstGeom>
+        </p:spPr>
+      </p:pic>
+      <p:sp>
+        <p:nvSpPr>
+          <p:cNvPr id="3" name="Text 0"/>
+          <p:cNvSpPr/>
+          <p:nvPr/>
+        </p:nvSpPr>
+        <p:spPr>
+          <a:xfrm>
+            <a:off x="8046720" y="320040"/>
+            <a:ext cx="914400" cy="274320"/>
+          </a:xfrm>
+          <a:prstGeom prst="rect">
+            <a:avLst/>
+          </a:prstGeom>
+          <a:noFill/>
+          <a:ln/>
+        </p:spPr>
+        <p:txBody>
+          <a:bodyPr wrap="square" rtlCol="0" anchor="ctr"/>
+          <a:lstStyle/>
+          <a:p>
+            <a:pPr algn="r" indent="0" marL="0">
+              <a:buNone/>
+            </a:pPr>
+            <a:r>
+              <a:rPr lang="en-US" sz="800" b="1" dirty="0">
                 <a:solidFill>
                   <a:srgbClr val="8A7456"/>
                 </a:solidFill>
               </a:rPr>
-              <a:t>Essai guidé 30 minutes · Pilote 30 jours · Plan de déploiement personnalisé</a:t>
-            </a:r>
-            <a:endParaRPr lang="en-US" sz="1400" dirty="0"/>
-          </a:p>
-        </p:txBody>
-      </p:sp>
-      <p:sp>
-        <p:nvSpPr>
-          <p:cNvPr id="8" name="Shape 5"/>
-          <p:cNvSpPr/>
-          <p:nvPr/>
-        </p:nvSpPr>
-        <p:spPr>
-          <a:xfrm>
-            <a:off x="3200400" y="3383280"/>
-            <a:ext cx="2743200" cy="594360"/>
+              <a:t>17 / 22</a:t>
+            </a:r>
+            <a:endParaRPr lang="en-US" sz="800" dirty="0"/>
+          </a:p>
+        </p:txBody>
+      </p:sp>
+      <p:sp>
+        <p:nvSpPr>
+          <p:cNvPr id="4" name="Shape 1"/>
+          <p:cNvSpPr/>
+          <p:nvPr/>
+        </p:nvSpPr>
+        <p:spPr>
+          <a:xfrm>
+            <a:off x="0" y="4983480"/>
+            <a:ext cx="9144000" cy="73152"/>
+          </a:xfrm>
+          <a:prstGeom prst="rect">
+            <a:avLst/>
+          </a:prstGeom>
+          <a:solidFill>
+            <a:srgbClr val="22C55E"/>
+          </a:solidFill>
+          <a:ln w="12700">
+            <a:solidFill>
+              <a:srgbClr val="22C55E"/>
+            </a:solidFill>
+            <a:prstDash val="solid"/>
+          </a:ln>
+        </p:spPr>
+      </p:sp>
+      <p:sp>
+        <p:nvSpPr>
+          <p:cNvPr id="5" name="Text 2"/>
+          <p:cNvSpPr/>
+          <p:nvPr/>
+        </p:nvSpPr>
+        <p:spPr>
+          <a:xfrm>
+            <a:off x="548640" y="868680"/>
+            <a:ext cx="8046720" cy="274320"/>
+          </a:xfrm>
+          <a:prstGeom prst="rect">
+            <a:avLst/>
+          </a:prstGeom>
+          <a:noFill/>
+          <a:ln/>
+        </p:spPr>
+        <p:txBody>
+          <a:bodyPr wrap="square" rtlCol="0" anchor="ctr"/>
+          <a:lstStyle/>
+          <a:p>
+            <a:pPr indent="0" marL="0">
+              <a:buNone/>
+            </a:pPr>
+            <a:r>
+              <a:rPr lang="en-US" sz="1000" b="1" spc="300" kern="0" dirty="0">
+                <a:solidFill>
+                  <a:srgbClr val="9A6B12"/>
+                </a:solidFill>
+              </a:rPr>
+              <a:t>Pour qui</a:t>
+            </a:r>
+            <a:endParaRPr lang="en-US" sz="1000" dirty="0"/>
+          </a:p>
+        </p:txBody>
+      </p:sp>
+      <p:sp>
+        <p:nvSpPr>
+          <p:cNvPr id="6" name="Text 3"/>
+          <p:cNvSpPr/>
+          <p:nvPr/>
+        </p:nvSpPr>
+        <p:spPr>
+          <a:xfrm>
+            <a:off x="548640" y="1143000"/>
+            <a:ext cx="8046720" cy="685800"/>
+          </a:xfrm>
+          <a:prstGeom prst="rect">
+            <a:avLst/>
+          </a:prstGeom>
+          <a:noFill/>
+          <a:ln/>
+        </p:spPr>
+        <p:txBody>
+          <a:bodyPr wrap="square" rtlCol="0" anchor="ctr"/>
+          <a:lstStyle/>
+          <a:p>
+            <a:pPr indent="0" marL="0">
+              <a:buNone/>
+            </a:pPr>
+            <a:r>
+              <a:rPr lang="en-US" sz="2800" b="1" dirty="0">
+                <a:solidFill>
+                  <a:srgbClr val="052E16"/>
+                </a:solidFill>
+                <a:latin typeface="Georgia" pitchFamily="34" charset="0"/>
+                <a:ea typeface="Georgia" pitchFamily="34" charset="-122"/>
+                <a:cs typeface="Georgia" pitchFamily="34" charset="-120"/>
+              </a:rPr>
+              <a:t>Une solution, tous les profils</a:t>
+            </a:r>
+            <a:endParaRPr lang="en-US" sz="2800" dirty="0"/>
+          </a:p>
+        </p:txBody>
+      </p:sp>
+      <p:sp>
+        <p:nvSpPr>
+          <p:cNvPr id="7" name="Shape 4"/>
+          <p:cNvSpPr/>
+          <p:nvPr/>
+        </p:nvSpPr>
+        <p:spPr>
+          <a:xfrm>
+            <a:off x="548640" y="1920240"/>
+            <a:ext cx="2606040" cy="1051560"/>
           </a:xfrm>
           <a:prstGeom prst="roundRect">
             <a:avLst>
-              <a:gd name="adj" fmla="val 30769"/>
+              <a:gd name="adj" fmla="val 8696"/>
             </a:avLst>
           </a:prstGeom>
           <a:solidFill>
-            <a:srgbClr val="15803D"/>
+            <a:srgbClr val="FFFFFF"/>
           </a:solidFill>
-          <a:ln/>
-        </p:spPr>
+          <a:ln w="12700">
+            <a:solidFill>
+              <a:srgbClr val="EADCC2"/>
+            </a:solidFill>
+            <a:prstDash val="solid"/>
+          </a:ln>
+        </p:spPr>
+      </p:sp>
+      <p:sp>
+        <p:nvSpPr>
+          <p:cNvPr id="8" name="Text 5"/>
+          <p:cNvSpPr/>
+          <p:nvPr/>
+        </p:nvSpPr>
+        <p:spPr>
+          <a:xfrm>
+            <a:off x="640080" y="2057400"/>
+            <a:ext cx="2423160" cy="274320"/>
+          </a:xfrm>
+          <a:prstGeom prst="rect">
+            <a:avLst/>
+          </a:prstGeom>
+          <a:noFill/>
+          <a:ln/>
+        </p:spPr>
+        <p:txBody>
+          <a:bodyPr wrap="square" rtlCol="0" anchor="ctr"/>
+          <a:lstStyle/>
+          <a:p>
+            <a:pPr algn="ctr" indent="0" marL="0">
+              <a:buNone/>
+            </a:pPr>
+            <a:r>
+              <a:rPr lang="en-US" sz="1100" b="1" dirty="0">
+                <a:solidFill>
+                  <a:srgbClr val="052E16"/>
+                </a:solidFill>
+              </a:rPr>
+              <a:t>Aviculteur</a:t>
+            </a:r>
+            <a:endParaRPr lang="en-US" sz="1100" dirty="0"/>
+          </a:p>
+        </p:txBody>
       </p:sp>
       <p:sp>
         <p:nvSpPr>
@@ -4286,8 +6499,8 @@
         </p:nvSpPr>
         <p:spPr>
           <a:xfrm>
-            <a:off x="3200400" y="3429000"/>
-            <a:ext cx="2743200" cy="502920"/>
+            <a:off x="640080" y="2377440"/>
+            <a:ext cx="2423160" cy="457200"/>
           </a:xfrm>
           <a:prstGeom prst="rect">
             <a:avLst/>
@@ -4303,27 +6516,54 @@
               <a:buNone/>
             </a:pPr>
             <a:r>
-              <a:rPr lang="en-US" sz="1400" b="1" dirty="0">
-                <a:solidFill>
-                  <a:srgbClr val="FFFFFF"/>
-                </a:solidFill>
-              </a:rPr>
-              <a:t>Demander une démo</a:t>
-            </a:r>
-            <a:endParaRPr lang="en-US" sz="1400" dirty="0"/>
-          </a:p>
-        </p:txBody>
-      </p:sp>
-      <p:sp>
-        <p:nvSpPr>
-          <p:cNvPr id="10" name="Text 7"/>
-          <p:cNvSpPr/>
-          <p:nvPr/>
-        </p:nvSpPr>
-        <p:spPr>
-          <a:xfrm>
-            <a:off x="731520" y="4297680"/>
-            <a:ext cx="7680960" cy="457200"/>
+              <a:rPr lang="en-US" sz="800" dirty="0">
+                <a:solidFill>
+                  <a:srgbClr val="8A7456"/>
+                </a:solidFill>
+              </a:rPr>
+              <a:t>Chair, ponte, œufs, lots</a:t>
+            </a:r>
+            <a:endParaRPr lang="en-US" sz="800" dirty="0"/>
+          </a:p>
+        </p:txBody>
+      </p:sp>
+      <p:sp>
+        <p:nvSpPr>
+          <p:cNvPr id="10" name="Shape 7"/>
+          <p:cNvSpPr/>
+          <p:nvPr/>
+        </p:nvSpPr>
+        <p:spPr>
+          <a:xfrm>
+            <a:off x="3383280" y="1920240"/>
+            <a:ext cx="2606040" cy="1051560"/>
+          </a:xfrm>
+          <a:prstGeom prst="roundRect">
+            <a:avLst>
+              <a:gd name="adj" fmla="val 8696"/>
+            </a:avLst>
+          </a:prstGeom>
+          <a:solidFill>
+            <a:srgbClr val="FFFFFF"/>
+          </a:solidFill>
+          <a:ln w="12700">
+            <a:solidFill>
+              <a:srgbClr val="EADCC2"/>
+            </a:solidFill>
+            <a:prstDash val="solid"/>
+          </a:ln>
+        </p:spPr>
+      </p:sp>
+      <p:sp>
+        <p:nvSpPr>
+          <p:cNvPr id="11" name="Text 8"/>
+          <p:cNvSpPr/>
+          <p:nvPr/>
+        </p:nvSpPr>
+        <p:spPr>
+          <a:xfrm>
+            <a:off x="3474720" y="2057400"/>
+            <a:ext cx="2423160" cy="274320"/>
           </a:xfrm>
           <a:prstGeom prst="rect">
             <a:avLst/>
@@ -4339,28 +6579,1442 @@
               <a:buNone/>
             </a:pPr>
             <a:r>
-              <a:rPr lang="en-US" sz="1000" dirty="0">
+              <a:rPr lang="en-US" sz="1100" b="1" dirty="0">
+                <a:solidFill>
+                  <a:srgbClr val="052E16"/>
+                </a:solidFill>
+              </a:rPr>
+              <a:t>Éleveur</a:t>
+            </a:r>
+            <a:endParaRPr lang="en-US" sz="1100" dirty="0"/>
+          </a:p>
+        </p:txBody>
+      </p:sp>
+      <p:sp>
+        <p:nvSpPr>
+          <p:cNvPr id="12" name="Text 9"/>
+          <p:cNvSpPr/>
+          <p:nvPr/>
+        </p:nvSpPr>
+        <p:spPr>
+          <a:xfrm>
+            <a:off x="3474720" y="2377440"/>
+            <a:ext cx="2423160" cy="457200"/>
+          </a:xfrm>
+          <a:prstGeom prst="rect">
+            <a:avLst/>
+          </a:prstGeom>
+          <a:noFill/>
+          <a:ln/>
+        </p:spPr>
+        <p:txBody>
+          <a:bodyPr wrap="square" rtlCol="0" anchor="ctr"/>
+          <a:lstStyle/>
+          <a:p>
+            <a:pPr algn="ctr" indent="0" marL="0">
+              <a:buNone/>
+            </a:pPr>
+            <a:r>
+              <a:rPr lang="en-US" sz="800" dirty="0">
                 <a:solidFill>
                   <a:srgbClr val="8A7456"/>
                 </a:solidFill>
               </a:rPr>
-              <a:t>Horizon Farm — De la terre à l'horizon</a:t>
+              <a:t>Bovins, ovins, caprins</a:t>
+            </a:r>
+            <a:endParaRPr lang="en-US" sz="800" dirty="0"/>
+          </a:p>
+        </p:txBody>
+      </p:sp>
+      <p:sp>
+        <p:nvSpPr>
+          <p:cNvPr id="13" name="Shape 10"/>
+          <p:cNvSpPr/>
+          <p:nvPr/>
+        </p:nvSpPr>
+        <p:spPr>
+          <a:xfrm>
+            <a:off x="6217920" y="1920240"/>
+            <a:ext cx="2606040" cy="1051560"/>
+          </a:xfrm>
+          <a:prstGeom prst="roundRect">
+            <a:avLst>
+              <a:gd name="adj" fmla="val 8696"/>
+            </a:avLst>
+          </a:prstGeom>
+          <a:solidFill>
+            <a:srgbClr val="FFFFFF"/>
+          </a:solidFill>
+          <a:ln w="12700">
+            <a:solidFill>
+              <a:srgbClr val="EADCC2"/>
+            </a:solidFill>
+            <a:prstDash val="solid"/>
+          </a:ln>
+        </p:spPr>
+      </p:sp>
+      <p:sp>
+        <p:nvSpPr>
+          <p:cNvPr id="14" name="Text 11"/>
+          <p:cNvSpPr/>
+          <p:nvPr/>
+        </p:nvSpPr>
+        <p:spPr>
+          <a:xfrm>
+            <a:off x="6309360" y="2057400"/>
+            <a:ext cx="2423160" cy="274320"/>
+          </a:xfrm>
+          <a:prstGeom prst="rect">
+            <a:avLst/>
+          </a:prstGeom>
+          <a:noFill/>
+          <a:ln/>
+        </p:spPr>
+        <p:txBody>
+          <a:bodyPr wrap="square" rtlCol="0" anchor="ctr"/>
+          <a:lstStyle/>
+          <a:p>
+            <a:pPr algn="ctr" indent="0" marL="0">
+              <a:buNone/>
+            </a:pPr>
+            <a:r>
+              <a:rPr lang="en-US" sz="1100" b="1" dirty="0">
+                <a:solidFill>
+                  <a:srgbClr val="052E16"/>
+                </a:solidFill>
+              </a:rPr>
+              <a:t>Maraîcher</a:t>
+            </a:r>
+            <a:endParaRPr lang="en-US" sz="1100" dirty="0"/>
+          </a:p>
+        </p:txBody>
+      </p:sp>
+      <p:sp>
+        <p:nvSpPr>
+          <p:cNvPr id="15" name="Text 12"/>
+          <p:cNvSpPr/>
+          <p:nvPr/>
+        </p:nvSpPr>
+        <p:spPr>
+          <a:xfrm>
+            <a:off x="6309360" y="2377440"/>
+            <a:ext cx="2423160" cy="457200"/>
+          </a:xfrm>
+          <a:prstGeom prst="rect">
+            <a:avLst/>
+          </a:prstGeom>
+          <a:noFill/>
+          <a:ln/>
+        </p:spPr>
+        <p:txBody>
+          <a:bodyPr wrap="square" rtlCol="0" anchor="ctr"/>
+          <a:lstStyle/>
+          <a:p>
+            <a:pPr algn="ctr" indent="0" marL="0">
+              <a:buNone/>
+            </a:pPr>
+            <a:r>
+              <a:rPr lang="en-US" sz="800" dirty="0">
+                <a:solidFill>
+                  <a:srgbClr val="8A7456"/>
+                </a:solidFill>
+              </a:rPr>
+              <a:t>Parcelles, irrigation IoT</a:t>
+            </a:r>
+            <a:endParaRPr lang="en-US" sz="800" dirty="0"/>
+          </a:p>
+        </p:txBody>
+      </p:sp>
+      <p:sp>
+        <p:nvSpPr>
+          <p:cNvPr id="16" name="Shape 13"/>
+          <p:cNvSpPr/>
+          <p:nvPr/>
+        </p:nvSpPr>
+        <p:spPr>
+          <a:xfrm>
+            <a:off x="548640" y="3154680"/>
+            <a:ext cx="2606040" cy="1051560"/>
+          </a:xfrm>
+          <a:prstGeom prst="roundRect">
+            <a:avLst>
+              <a:gd name="adj" fmla="val 8696"/>
+            </a:avLst>
+          </a:prstGeom>
+          <a:solidFill>
+            <a:srgbClr val="FFFFFF"/>
+          </a:solidFill>
+          <a:ln w="12700">
+            <a:solidFill>
+              <a:srgbClr val="EADCC2"/>
+            </a:solidFill>
+            <a:prstDash val="solid"/>
+          </a:ln>
+        </p:spPr>
+      </p:sp>
+      <p:sp>
+        <p:nvSpPr>
+          <p:cNvPr id="17" name="Text 14"/>
+          <p:cNvSpPr/>
+          <p:nvPr/>
+        </p:nvSpPr>
+        <p:spPr>
+          <a:xfrm>
+            <a:off x="640080" y="3291840"/>
+            <a:ext cx="2423160" cy="274320"/>
+          </a:xfrm>
+          <a:prstGeom prst="rect">
+            <a:avLst/>
+          </a:prstGeom>
+          <a:noFill/>
+          <a:ln/>
+        </p:spPr>
+        <p:txBody>
+          <a:bodyPr wrap="square" rtlCol="0" anchor="ctr"/>
+          <a:lstStyle/>
+          <a:p>
+            <a:pPr algn="ctr" indent="0" marL="0">
+              <a:buNone/>
+            </a:pPr>
+            <a:r>
+              <a:rPr lang="en-US" sz="1100" b="1" dirty="0">
+                <a:solidFill>
+                  <a:srgbClr val="052E16"/>
+                </a:solidFill>
+              </a:rPr>
+              <a:t>Mixte</a:t>
+            </a:r>
+            <a:endParaRPr lang="en-US" sz="1100" dirty="0"/>
+          </a:p>
+        </p:txBody>
+      </p:sp>
+      <p:sp>
+        <p:nvSpPr>
+          <p:cNvPr id="18" name="Text 15"/>
+          <p:cNvSpPr/>
+          <p:nvPr/>
+        </p:nvSpPr>
+        <p:spPr>
+          <a:xfrm>
+            <a:off x="640080" y="3611880"/>
+            <a:ext cx="2423160" cy="457200"/>
+          </a:xfrm>
+          <a:prstGeom prst="rect">
+            <a:avLst/>
+          </a:prstGeom>
+          <a:noFill/>
+          <a:ln/>
+        </p:spPr>
+        <p:txBody>
+          <a:bodyPr wrap="square" rtlCol="0" anchor="ctr"/>
+          <a:lstStyle/>
+          <a:p>
+            <a:pPr algn="ctr" indent="0" marL="0">
+              <a:buNone/>
+            </a:pPr>
+            <a:r>
+              <a:rPr lang="en-US" sz="800" dirty="0">
+                <a:solidFill>
+                  <a:srgbClr val="8A7456"/>
+                </a:solidFill>
+              </a:rPr>
+              <a:t>Élevage + cultures</a:t>
+            </a:r>
+            <a:endParaRPr lang="en-US" sz="800" dirty="0"/>
+          </a:p>
+        </p:txBody>
+      </p:sp>
+      <p:sp>
+        <p:nvSpPr>
+          <p:cNvPr id="19" name="Shape 16"/>
+          <p:cNvSpPr/>
+          <p:nvPr/>
+        </p:nvSpPr>
+        <p:spPr>
+          <a:xfrm>
+            <a:off x="3383280" y="3154680"/>
+            <a:ext cx="2606040" cy="1051560"/>
+          </a:xfrm>
+          <a:prstGeom prst="roundRect">
+            <a:avLst>
+              <a:gd name="adj" fmla="val 8696"/>
+            </a:avLst>
+          </a:prstGeom>
+          <a:solidFill>
+            <a:srgbClr val="FFFFFF"/>
+          </a:solidFill>
+          <a:ln w="12700">
+            <a:solidFill>
+              <a:srgbClr val="EADCC2"/>
+            </a:solidFill>
+            <a:prstDash val="solid"/>
+          </a:ln>
+        </p:spPr>
+      </p:sp>
+      <p:sp>
+        <p:nvSpPr>
+          <p:cNvPr id="20" name="Text 17"/>
+          <p:cNvSpPr/>
+          <p:nvPr/>
+        </p:nvSpPr>
+        <p:spPr>
+          <a:xfrm>
+            <a:off x="3474720" y="3291840"/>
+            <a:ext cx="2423160" cy="274320"/>
+          </a:xfrm>
+          <a:prstGeom prst="rect">
+            <a:avLst/>
+          </a:prstGeom>
+          <a:noFill/>
+          <a:ln/>
+        </p:spPr>
+        <p:txBody>
+          <a:bodyPr wrap="square" rtlCol="0" anchor="ctr"/>
+          <a:lstStyle/>
+          <a:p>
+            <a:pPr algn="ctr" indent="0" marL="0">
+              <a:buNone/>
+            </a:pPr>
+            <a:r>
+              <a:rPr lang="en-US" sz="1100" b="1" dirty="0">
+                <a:solidFill>
+                  <a:srgbClr val="052E16"/>
+                </a:solidFill>
+              </a:rPr>
+              <a:t>Coopérative</a:t>
+            </a:r>
+            <a:endParaRPr lang="en-US" sz="1100" dirty="0"/>
+          </a:p>
+        </p:txBody>
+      </p:sp>
+      <p:sp>
+        <p:nvSpPr>
+          <p:cNvPr id="21" name="Text 18"/>
+          <p:cNvSpPr/>
+          <p:nvPr/>
+        </p:nvSpPr>
+        <p:spPr>
+          <a:xfrm>
+            <a:off x="3474720" y="3611880"/>
+            <a:ext cx="2423160" cy="457200"/>
+          </a:xfrm>
+          <a:prstGeom prst="rect">
+            <a:avLst/>
+          </a:prstGeom>
+          <a:noFill/>
+          <a:ln/>
+        </p:spPr>
+        <p:txBody>
+          <a:bodyPr wrap="square" rtlCol="0" anchor="ctr"/>
+          <a:lstStyle/>
+          <a:p>
+            <a:pPr algn="ctr" indent="0" marL="0">
+              <a:buNone/>
+            </a:pPr>
+            <a:r>
+              <a:rPr lang="en-US" sz="800" dirty="0">
+                <a:solidFill>
+                  <a:srgbClr val="8A7456"/>
+                </a:solidFill>
+              </a:rPr>
+              <a:t>Multi-fermes, groupe</a:t>
+            </a:r>
+            <a:endParaRPr lang="en-US" sz="800" dirty="0"/>
+          </a:p>
+        </p:txBody>
+      </p:sp>
+      <p:sp>
+        <p:nvSpPr>
+          <p:cNvPr id="22" name="Shape 19"/>
+          <p:cNvSpPr/>
+          <p:nvPr/>
+        </p:nvSpPr>
+        <p:spPr>
+          <a:xfrm>
+            <a:off x="6217920" y="3154680"/>
+            <a:ext cx="2606040" cy="1051560"/>
+          </a:xfrm>
+          <a:prstGeom prst="roundRect">
+            <a:avLst>
+              <a:gd name="adj" fmla="val 8696"/>
+            </a:avLst>
+          </a:prstGeom>
+          <a:solidFill>
+            <a:srgbClr val="FFFFFF"/>
+          </a:solidFill>
+          <a:ln w="12700">
+            <a:solidFill>
+              <a:srgbClr val="EADCC2"/>
+            </a:solidFill>
+            <a:prstDash val="solid"/>
+          </a:ln>
+        </p:spPr>
+      </p:sp>
+      <p:sp>
+        <p:nvSpPr>
+          <p:cNvPr id="23" name="Text 20"/>
+          <p:cNvSpPr/>
+          <p:nvPr/>
+        </p:nvSpPr>
+        <p:spPr>
+          <a:xfrm>
+            <a:off x="6309360" y="3291840"/>
+            <a:ext cx="2423160" cy="274320"/>
+          </a:xfrm>
+          <a:prstGeom prst="rect">
+            <a:avLst/>
+          </a:prstGeom>
+          <a:noFill/>
+          <a:ln/>
+        </p:spPr>
+        <p:txBody>
+          <a:bodyPr wrap="square" rtlCol="0" anchor="ctr"/>
+          <a:lstStyle/>
+          <a:p>
+            <a:pPr algn="ctr" indent="0" marL="0">
+              <a:buNone/>
+            </a:pPr>
+            <a:r>
+              <a:rPr lang="en-US" sz="1100" b="1" dirty="0">
+                <a:solidFill>
+                  <a:srgbClr val="052E16"/>
+                </a:solidFill>
+              </a:rPr>
+              <a:t>Investisseur</a:t>
+            </a:r>
+            <a:endParaRPr lang="en-US" sz="1100" dirty="0"/>
+          </a:p>
+        </p:txBody>
+      </p:sp>
+      <p:sp>
+        <p:nvSpPr>
+          <p:cNvPr id="24" name="Text 21"/>
+          <p:cNvSpPr/>
+          <p:nvPr/>
+        </p:nvSpPr>
+        <p:spPr>
+          <a:xfrm>
+            <a:off x="6309360" y="3611880"/>
+            <a:ext cx="2423160" cy="457200"/>
+          </a:xfrm>
+          <a:prstGeom prst="rect">
+            <a:avLst/>
+          </a:prstGeom>
+          <a:noFill/>
+          <a:ln/>
+        </p:spPr>
+        <p:txBody>
+          <a:bodyPr wrap="square" rtlCol="0" anchor="ctr"/>
+          <a:lstStyle/>
+          <a:p>
+            <a:pPr algn="ctr" indent="0" marL="0">
+              <a:buNone/>
+            </a:pPr>
+            <a:r>
+              <a:rPr lang="en-US" sz="800" dirty="0">
+                <a:solidFill>
+                  <a:srgbClr val="8A7456"/>
+                </a:solidFill>
+              </a:rPr>
+              <a:t>Dossier, KPIs, traçabilité</a:t>
+            </a:r>
+            <a:endParaRPr lang="en-US" sz="800" dirty="0"/>
+          </a:p>
+        </p:txBody>
+      </p:sp>
+    </p:spTree>
+  </p:cSld>
+  <p:clrMapOvr>
+    <a:masterClrMapping/>
+  </p:clrMapOvr>
+</p:sld>
+</file>
+
+<file path=ppt/slides/slide18.xml><?xml version="1.0" encoding="utf-8"?>
+<p:sld xmlns:a="http://schemas.openxmlformats.org/drawingml/2006/main" xmlns:r="http://schemas.openxmlformats.org/officeDocument/2006/relationships" xmlns:p="http://schemas.openxmlformats.org/presentationml/2006/main">
+  <p:cSld name="Slide 18">
+    <p:bg>
+      <p:bgPr>
+        <a:solidFill>
+          <a:srgbClr val="FFFDF8"/>
+        </a:solidFill>
+      </p:bgPr>
+    </p:bg>
+    <p:spTree>
+      <p:nvGrpSpPr>
+        <p:cNvPr id="1" name=""/>
+        <p:cNvGrpSpPr/>
+        <p:nvPr/>
+      </p:nvGrpSpPr>
+      <p:grpSpPr>
+        <a:xfrm>
+          <a:off x="0" y="0"/>
+          <a:ext cx="0" cy="0"/>
+          <a:chOff x="0" y="0"/>
+          <a:chExt cx="0" cy="0"/>
+        </a:xfrm>
+      </p:grpSpPr>
+      <p:pic>
+        <p:nvPicPr>
+          <p:cNvPr id="2" name="Image 0" descr="/workspace/public/horizon-farm-logo-transparent.png">    </p:cNvPr>
+          <p:cNvPicPr>
+            <a:picLocks noChangeAspect="1"/>
+          </p:cNvPicPr>
+          <p:nvPr/>
+        </p:nvPicPr>
+        <p:blipFill>
+          <a:blip r:embed="rId1"/>
+          <a:stretch>
+            <a:fillRect/>
+          </a:stretch>
+        </p:blipFill>
+        <p:spPr>
+          <a:xfrm>
+            <a:off x="365760" y="228600"/>
+            <a:ext cx="1645920" cy="502920"/>
+          </a:xfrm>
+          <a:prstGeom prst="rect">
+            <a:avLst/>
+          </a:prstGeom>
+        </p:spPr>
+      </p:pic>
+      <p:sp>
+        <p:nvSpPr>
+          <p:cNvPr id="3" name="Text 0"/>
+          <p:cNvSpPr/>
+          <p:nvPr/>
+        </p:nvSpPr>
+        <p:spPr>
+          <a:xfrm>
+            <a:off x="8046720" y="320040"/>
+            <a:ext cx="914400" cy="274320"/>
+          </a:xfrm>
+          <a:prstGeom prst="rect">
+            <a:avLst/>
+          </a:prstGeom>
+          <a:noFill/>
+          <a:ln/>
+        </p:spPr>
+        <p:txBody>
+          <a:bodyPr wrap="square" rtlCol="0" anchor="ctr"/>
+          <a:lstStyle/>
+          <a:p>
+            <a:pPr algn="r" indent="0" marL="0">
+              <a:buNone/>
+            </a:pPr>
+            <a:r>
+              <a:rPr lang="en-US" sz="800" b="1" dirty="0">
+                <a:solidFill>
+                  <a:srgbClr val="8A7456"/>
+                </a:solidFill>
+              </a:rPr>
+              <a:t>18 / 22</a:t>
+            </a:r>
+            <a:endParaRPr lang="en-US" sz="800" dirty="0"/>
+          </a:p>
+        </p:txBody>
+      </p:sp>
+      <p:sp>
+        <p:nvSpPr>
+          <p:cNvPr id="4" name="Shape 1"/>
+          <p:cNvSpPr/>
+          <p:nvPr/>
+        </p:nvSpPr>
+        <p:spPr>
+          <a:xfrm>
+            <a:off x="0" y="4983480"/>
+            <a:ext cx="9144000" cy="73152"/>
+          </a:xfrm>
+          <a:prstGeom prst="rect">
+            <a:avLst/>
+          </a:prstGeom>
+          <a:solidFill>
+            <a:srgbClr val="22C55E"/>
+          </a:solidFill>
+          <a:ln w="12700">
+            <a:solidFill>
+              <a:srgbClr val="22C55E"/>
+            </a:solidFill>
+            <a:prstDash val="solid"/>
+          </a:ln>
+        </p:spPr>
+      </p:sp>
+      <p:sp>
+        <p:nvSpPr>
+          <p:cNvPr id="5" name="Text 2"/>
+          <p:cNvSpPr/>
+          <p:nvPr/>
+        </p:nvSpPr>
+        <p:spPr>
+          <a:xfrm>
+            <a:off x="548640" y="868680"/>
+            <a:ext cx="8046720" cy="274320"/>
+          </a:xfrm>
+          <a:prstGeom prst="rect">
+            <a:avLst/>
+          </a:prstGeom>
+          <a:noFill/>
+          <a:ln/>
+        </p:spPr>
+        <p:txBody>
+          <a:bodyPr wrap="square" rtlCol="0" anchor="ctr"/>
+          <a:lstStyle/>
+          <a:p>
+            <a:pPr indent="0" marL="0">
+              <a:buNone/>
+            </a:pPr>
+            <a:r>
+              <a:rPr lang="en-US" sz="1000" b="1" spc="300" kern="0" dirty="0">
+                <a:solidFill>
+                  <a:srgbClr val="9A6B12"/>
+                </a:solidFill>
+              </a:rPr>
+              <a:t>Offres</a:t>
             </a:r>
             <a:endParaRPr lang="en-US" sz="1000" dirty="0"/>
           </a:p>
-          <a:p>
-            <a:pPr algn="ctr" indent="0" marL="0">
-              <a:buNone/>
-            </a:pPr>
-            <a:r>
-              <a:rPr lang="en-US" sz="1000" dirty="0">
+        </p:txBody>
+      </p:sp>
+      <p:sp>
+        <p:nvSpPr>
+          <p:cNvPr id="6" name="Text 3"/>
+          <p:cNvSpPr/>
+          <p:nvPr/>
+        </p:nvSpPr>
+        <p:spPr>
+          <a:xfrm>
+            <a:off x="548640" y="1143000"/>
+            <a:ext cx="8046720" cy="685800"/>
+          </a:xfrm>
+          <a:prstGeom prst="rect">
+            <a:avLst/>
+          </a:prstGeom>
+          <a:noFill/>
+          <a:ln/>
+        </p:spPr>
+        <p:txBody>
+          <a:bodyPr wrap="square" rtlCol="0" anchor="ctr"/>
+          <a:lstStyle/>
+          <a:p>
+            <a:pPr indent="0" marL="0">
+              <a:buNone/>
+            </a:pPr>
+            <a:r>
+              <a:rPr lang="en-US" sz="2800" b="1" dirty="0">
+                <a:solidFill>
+                  <a:srgbClr val="052E16"/>
+                </a:solidFill>
+                <a:latin typeface="Georgia" pitchFamily="34" charset="0"/>
+                <a:ea typeface="Georgia" pitchFamily="34" charset="-122"/>
+                <a:cs typeface="Georgia" pitchFamily="34" charset="-120"/>
+              </a:rPr>
+              <a:t>Formules d'abonnement</a:t>
+            </a:r>
+            <a:endParaRPr lang="en-US" sz="2800" dirty="0"/>
+          </a:p>
+        </p:txBody>
+      </p:sp>
+      <p:sp>
+        <p:nvSpPr>
+          <p:cNvPr id="7" name="Shape 4"/>
+          <p:cNvSpPr/>
+          <p:nvPr/>
+        </p:nvSpPr>
+        <p:spPr>
+          <a:xfrm>
+            <a:off x="548640" y="1920240"/>
+            <a:ext cx="2651760" cy="2011680"/>
+          </a:xfrm>
+          <a:prstGeom prst="roundRect">
+            <a:avLst>
+              <a:gd name="adj" fmla="val 5455"/>
+            </a:avLst>
+          </a:prstGeom>
+          <a:solidFill>
+            <a:srgbClr val="FFFFFF"/>
+          </a:solidFill>
+          <a:ln w="19050">
+            <a:solidFill>
+              <a:srgbClr val="EADCC2"/>
+            </a:solidFill>
+            <a:prstDash val="solid"/>
+          </a:ln>
+        </p:spPr>
+      </p:sp>
+      <p:sp>
+        <p:nvSpPr>
+          <p:cNvPr id="8" name="Text 5"/>
+          <p:cNvSpPr/>
+          <p:nvPr/>
+        </p:nvSpPr>
+        <p:spPr>
+          <a:xfrm>
+            <a:off x="685800" y="2103120"/>
+            <a:ext cx="2377440" cy="365760"/>
+          </a:xfrm>
+          <a:prstGeom prst="rect">
+            <a:avLst/>
+          </a:prstGeom>
+          <a:noFill/>
+          <a:ln/>
+        </p:spPr>
+        <p:txBody>
+          <a:bodyPr wrap="square" rtlCol="0" anchor="ctr"/>
+          <a:lstStyle/>
+          <a:p>
+            <a:pPr indent="0" marL="0">
+              <a:buNone/>
+            </a:pPr>
+            <a:r>
+              <a:rPr lang="en-US" sz="1300" b="1" dirty="0">
+                <a:solidFill>
+                  <a:srgbClr val="052E16"/>
+                </a:solidFill>
+                <a:latin typeface="Georgia" pitchFamily="34" charset="0"/>
+                <a:ea typeface="Georgia" pitchFamily="34" charset="-122"/>
+                <a:cs typeface="Georgia" pitchFamily="34" charset="-120"/>
+              </a:rPr>
+              <a:t>Essentiel</a:t>
+            </a:r>
+            <a:endParaRPr lang="en-US" sz="1300" dirty="0"/>
+          </a:p>
+        </p:txBody>
+      </p:sp>
+      <p:sp>
+        <p:nvSpPr>
+          <p:cNvPr id="9" name="Text 6"/>
+          <p:cNvSpPr/>
+          <p:nvPr/>
+        </p:nvSpPr>
+        <p:spPr>
+          <a:xfrm>
+            <a:off x="685800" y="2560320"/>
+            <a:ext cx="2377440" cy="1188720"/>
+          </a:xfrm>
+          <a:prstGeom prst="rect">
+            <a:avLst/>
+          </a:prstGeom>
+          <a:noFill/>
+          <a:ln/>
+        </p:spPr>
+        <p:txBody>
+          <a:bodyPr wrap="square" rtlCol="0" anchor="t"/>
+          <a:lstStyle/>
+          <a:p>
+            <a:pPr indent="0" marL="0">
+              <a:buNone/>
+            </a:pPr>
+            <a:r>
+              <a:rPr lang="en-US" sz="900" dirty="0">
                 <a:solidFill>
                   <a:srgbClr val="8A7456"/>
                 </a:solidFill>
               </a:rPr>
-              <a:t>contact@horizon-farm.app</a:t>
+              <a:t>Élevage ou Cultures + Stock + Commercial + Accueil</a:t>
+            </a:r>
+            <a:endParaRPr lang="en-US" sz="900" dirty="0"/>
+          </a:p>
+        </p:txBody>
+      </p:sp>
+      <p:sp>
+        <p:nvSpPr>
+          <p:cNvPr id="10" name="Shape 7"/>
+          <p:cNvSpPr/>
+          <p:nvPr/>
+        </p:nvSpPr>
+        <p:spPr>
+          <a:xfrm>
+            <a:off x="3383280" y="1920240"/>
+            <a:ext cx="2651760" cy="2011680"/>
+          </a:xfrm>
+          <a:prstGeom prst="roundRect">
+            <a:avLst>
+              <a:gd name="adj" fmla="val 5455"/>
+            </a:avLst>
+          </a:prstGeom>
+          <a:solidFill>
+            <a:srgbClr val="FFFFFF"/>
+          </a:solidFill>
+          <a:ln w="19050">
+            <a:solidFill>
+              <a:srgbClr val="EADCC2"/>
+            </a:solidFill>
+            <a:prstDash val="solid"/>
+          </a:ln>
+        </p:spPr>
+      </p:sp>
+      <p:sp>
+        <p:nvSpPr>
+          <p:cNvPr id="11" name="Text 8"/>
+          <p:cNvSpPr/>
+          <p:nvPr/>
+        </p:nvSpPr>
+        <p:spPr>
+          <a:xfrm>
+            <a:off x="3520440" y="2103120"/>
+            <a:ext cx="2377440" cy="365760"/>
+          </a:xfrm>
+          <a:prstGeom prst="rect">
+            <a:avLst/>
+          </a:prstGeom>
+          <a:noFill/>
+          <a:ln/>
+        </p:spPr>
+        <p:txBody>
+          <a:bodyPr wrap="square" rtlCol="0" anchor="ctr"/>
+          <a:lstStyle/>
+          <a:p>
+            <a:pPr indent="0" marL="0">
+              <a:buNone/>
+            </a:pPr>
+            <a:r>
+              <a:rPr lang="en-US" sz="1300" b="1" dirty="0">
+                <a:solidFill>
+                  <a:srgbClr val="052E16"/>
+                </a:solidFill>
+                <a:latin typeface="Georgia" pitchFamily="34" charset="0"/>
+                <a:ea typeface="Georgia" pitchFamily="34" charset="-122"/>
+                <a:cs typeface="Georgia" pitchFamily="34" charset="-120"/>
+              </a:rPr>
+              <a:t>Pro</a:t>
+            </a:r>
+            <a:endParaRPr lang="en-US" sz="1300" dirty="0"/>
+          </a:p>
+        </p:txBody>
+      </p:sp>
+      <p:sp>
+        <p:nvSpPr>
+          <p:cNvPr id="12" name="Text 9"/>
+          <p:cNvSpPr/>
+          <p:nvPr/>
+        </p:nvSpPr>
+        <p:spPr>
+          <a:xfrm>
+            <a:off x="3520440" y="2560320"/>
+            <a:ext cx="2377440" cy="1188720"/>
+          </a:xfrm>
+          <a:prstGeom prst="rect">
+            <a:avLst/>
+          </a:prstGeom>
+          <a:noFill/>
+          <a:ln/>
+        </p:spPr>
+        <p:txBody>
+          <a:bodyPr wrap="square" rtlCol="0" anchor="t"/>
+          <a:lstStyle/>
+          <a:p>
+            <a:pPr indent="0" marL="0">
+              <a:buNone/>
+            </a:pPr>
+            <a:r>
+              <a:rPr lang="en-US" sz="900" dirty="0">
+                <a:solidFill>
+                  <a:srgbClr val="8A7456"/>
+                </a:solidFill>
+              </a:rPr>
+              <a:t>+ Finance, Smart Farm, Assistant, Activité &amp; Suivi, multi-utilisateurs</a:t>
+            </a:r>
+            <a:endParaRPr lang="en-US" sz="900" dirty="0"/>
+          </a:p>
+        </p:txBody>
+      </p:sp>
+      <p:sp>
+        <p:nvSpPr>
+          <p:cNvPr id="13" name="Shape 10"/>
+          <p:cNvSpPr/>
+          <p:nvPr/>
+        </p:nvSpPr>
+        <p:spPr>
+          <a:xfrm>
+            <a:off x="6217920" y="1920240"/>
+            <a:ext cx="2651760" cy="2011680"/>
+          </a:xfrm>
+          <a:prstGeom prst="roundRect">
+            <a:avLst>
+              <a:gd name="adj" fmla="val 5455"/>
+            </a:avLst>
+          </a:prstGeom>
+          <a:solidFill>
+            <a:srgbClr val="FFFFFF"/>
+          </a:solidFill>
+          <a:ln w="19050">
+            <a:solidFill>
+              <a:srgbClr val="EADCC2"/>
+            </a:solidFill>
+            <a:prstDash val="solid"/>
+          </a:ln>
+        </p:spPr>
+      </p:sp>
+      <p:sp>
+        <p:nvSpPr>
+          <p:cNvPr id="14" name="Text 11"/>
+          <p:cNvSpPr/>
+          <p:nvPr/>
+        </p:nvSpPr>
+        <p:spPr>
+          <a:xfrm>
+            <a:off x="6355080" y="2103120"/>
+            <a:ext cx="2377440" cy="365760"/>
+          </a:xfrm>
+          <a:prstGeom prst="rect">
+            <a:avLst/>
+          </a:prstGeom>
+          <a:noFill/>
+          <a:ln/>
+        </p:spPr>
+        <p:txBody>
+          <a:bodyPr wrap="square" rtlCol="0" anchor="ctr"/>
+          <a:lstStyle/>
+          <a:p>
+            <a:pPr indent="0" marL="0">
+              <a:buNone/>
+            </a:pPr>
+            <a:r>
+              <a:rPr lang="en-US" sz="1300" b="1" dirty="0">
+                <a:solidFill>
+                  <a:srgbClr val="052E16"/>
+                </a:solidFill>
+                <a:latin typeface="Georgia" pitchFamily="34" charset="0"/>
+                <a:ea typeface="Georgia" pitchFamily="34" charset="-122"/>
+                <a:cs typeface="Georgia" pitchFamily="34" charset="-120"/>
+              </a:rPr>
+              <a:t>Groupe</a:t>
+            </a:r>
+            <a:endParaRPr lang="en-US" sz="1300" dirty="0"/>
+          </a:p>
+        </p:txBody>
+      </p:sp>
+      <p:sp>
+        <p:nvSpPr>
+          <p:cNvPr id="15" name="Text 12"/>
+          <p:cNvSpPr/>
+          <p:nvPr/>
+        </p:nvSpPr>
+        <p:spPr>
+          <a:xfrm>
+            <a:off x="6355080" y="2560320"/>
+            <a:ext cx="2377440" cy="1188720"/>
+          </a:xfrm>
+          <a:prstGeom prst="rect">
+            <a:avLst/>
+          </a:prstGeom>
+          <a:noFill/>
+          <a:ln/>
+        </p:spPr>
+        <p:txBody>
+          <a:bodyPr wrap="square" rtlCol="0" anchor="t"/>
+          <a:lstStyle/>
+          <a:p>
+            <a:pPr indent="0" marL="0">
+              <a:buNone/>
+            </a:pPr>
+            <a:r>
+              <a:rPr lang="en-US" sz="900" dirty="0">
+                <a:solidFill>
+                  <a:srgbClr val="8A7456"/>
+                </a:solidFill>
+              </a:rPr>
+              <a:t>+ Multi-fermes, Investisseurs, Sync ERP, accompagnement dédié</a:t>
+            </a:r>
+            <a:endParaRPr lang="en-US" sz="900" dirty="0"/>
+          </a:p>
+        </p:txBody>
+      </p:sp>
+    </p:spTree>
+  </p:cSld>
+  <p:clrMapOvr>
+    <a:masterClrMapping/>
+  </p:clrMapOvr>
+</p:sld>
+</file>
+
+<file path=ppt/slides/slide19.xml><?xml version="1.0" encoding="utf-8"?>
+<p:sld xmlns:a="http://schemas.openxmlformats.org/drawingml/2006/main" xmlns:r="http://schemas.openxmlformats.org/officeDocument/2006/relationships" xmlns:p="http://schemas.openxmlformats.org/presentationml/2006/main">
+  <p:cSld name="Slide 19">
+    <p:bg>
+      <p:bgPr>
+        <a:solidFill>
+          <a:srgbClr val="FFFDF8"/>
+        </a:solidFill>
+      </p:bgPr>
+    </p:bg>
+    <p:spTree>
+      <p:nvGrpSpPr>
+        <p:cNvPr id="1" name=""/>
+        <p:cNvGrpSpPr/>
+        <p:nvPr/>
+      </p:nvGrpSpPr>
+      <p:grpSpPr>
+        <a:xfrm>
+          <a:off x="0" y="0"/>
+          <a:ext cx="0" cy="0"/>
+          <a:chOff x="0" y="0"/>
+          <a:chExt cx="0" cy="0"/>
+        </a:xfrm>
+      </p:grpSpPr>
+      <p:pic>
+        <p:nvPicPr>
+          <p:cNvPr id="2" name="Image 0" descr="/workspace/public/horizon-farm-logo-transparent.png">    </p:cNvPr>
+          <p:cNvPicPr>
+            <a:picLocks noChangeAspect="1"/>
+          </p:cNvPicPr>
+          <p:nvPr/>
+        </p:nvPicPr>
+        <p:blipFill>
+          <a:blip r:embed="rId1"/>
+          <a:stretch>
+            <a:fillRect/>
+          </a:stretch>
+        </p:blipFill>
+        <p:spPr>
+          <a:xfrm>
+            <a:off x="365760" y="228600"/>
+            <a:ext cx="1645920" cy="502920"/>
+          </a:xfrm>
+          <a:prstGeom prst="rect">
+            <a:avLst/>
+          </a:prstGeom>
+        </p:spPr>
+      </p:pic>
+      <p:sp>
+        <p:nvSpPr>
+          <p:cNvPr id="3" name="Text 0"/>
+          <p:cNvSpPr/>
+          <p:nvPr/>
+        </p:nvSpPr>
+        <p:spPr>
+          <a:xfrm>
+            <a:off x="8046720" y="320040"/>
+            <a:ext cx="914400" cy="274320"/>
+          </a:xfrm>
+          <a:prstGeom prst="rect">
+            <a:avLst/>
+          </a:prstGeom>
+          <a:noFill/>
+          <a:ln/>
+        </p:spPr>
+        <p:txBody>
+          <a:bodyPr wrap="square" rtlCol="0" anchor="ctr"/>
+          <a:lstStyle/>
+          <a:p>
+            <a:pPr algn="r" indent="0" marL="0">
+              <a:buNone/>
+            </a:pPr>
+            <a:r>
+              <a:rPr lang="en-US" sz="800" b="1" dirty="0">
+                <a:solidFill>
+                  <a:srgbClr val="8A7456"/>
+                </a:solidFill>
+              </a:rPr>
+              <a:t>19 / 22</a:t>
+            </a:r>
+            <a:endParaRPr lang="en-US" sz="800" dirty="0"/>
+          </a:p>
+        </p:txBody>
+      </p:sp>
+      <p:sp>
+        <p:nvSpPr>
+          <p:cNvPr id="4" name="Shape 1"/>
+          <p:cNvSpPr/>
+          <p:nvPr/>
+        </p:nvSpPr>
+        <p:spPr>
+          <a:xfrm>
+            <a:off x="0" y="4983480"/>
+            <a:ext cx="9144000" cy="73152"/>
+          </a:xfrm>
+          <a:prstGeom prst="rect">
+            <a:avLst/>
+          </a:prstGeom>
+          <a:solidFill>
+            <a:srgbClr val="22C55E"/>
+          </a:solidFill>
+          <a:ln w="12700">
+            <a:solidFill>
+              <a:srgbClr val="22C55E"/>
+            </a:solidFill>
+            <a:prstDash val="solid"/>
+          </a:ln>
+        </p:spPr>
+      </p:sp>
+      <p:sp>
+        <p:nvSpPr>
+          <p:cNvPr id="5" name="Text 2"/>
+          <p:cNvSpPr/>
+          <p:nvPr/>
+        </p:nvSpPr>
+        <p:spPr>
+          <a:xfrm>
+            <a:off x="548640" y="868680"/>
+            <a:ext cx="8046720" cy="274320"/>
+          </a:xfrm>
+          <a:prstGeom prst="rect">
+            <a:avLst/>
+          </a:prstGeom>
+          <a:noFill/>
+          <a:ln/>
+        </p:spPr>
+        <p:txBody>
+          <a:bodyPr wrap="square" rtlCol="0" anchor="ctr"/>
+          <a:lstStyle/>
+          <a:p>
+            <a:pPr indent="0" marL="0">
+              <a:buNone/>
+            </a:pPr>
+            <a:r>
+              <a:rPr lang="en-US" sz="1000" b="1" spc="300" kern="0" dirty="0">
+                <a:solidFill>
+                  <a:srgbClr val="9A6B12"/>
+                </a:solidFill>
+              </a:rPr>
+              <a:t>Déploiement</a:t>
             </a:r>
             <a:endParaRPr lang="en-US" sz="1000" dirty="0"/>
+          </a:p>
+        </p:txBody>
+      </p:sp>
+      <p:sp>
+        <p:nvSpPr>
+          <p:cNvPr id="6" name="Text 3"/>
+          <p:cNvSpPr/>
+          <p:nvPr/>
+        </p:nvSpPr>
+        <p:spPr>
+          <a:xfrm>
+            <a:off x="548640" y="1143000"/>
+            <a:ext cx="8046720" cy="685800"/>
+          </a:xfrm>
+          <a:prstGeom prst="rect">
+            <a:avLst/>
+          </a:prstGeom>
+          <a:noFill/>
+          <a:ln/>
+        </p:spPr>
+        <p:txBody>
+          <a:bodyPr wrap="square" rtlCol="0" anchor="ctr"/>
+          <a:lstStyle/>
+          <a:p>
+            <a:pPr indent="0" marL="0">
+              <a:buNone/>
+            </a:pPr>
+            <a:r>
+              <a:rPr lang="en-US" sz="2800" b="1" dirty="0">
+                <a:solidFill>
+                  <a:srgbClr val="052E16"/>
+                </a:solidFill>
+                <a:latin typeface="Georgia" pitchFamily="34" charset="0"/>
+                <a:ea typeface="Georgia" pitchFamily="34" charset="-122"/>
+                <a:cs typeface="Georgia" pitchFamily="34" charset="-120"/>
+              </a:rPr>
+              <a:t>Accompagnement inclus</a:t>
+            </a:r>
+            <a:endParaRPr lang="en-US" sz="2800" dirty="0"/>
+          </a:p>
+        </p:txBody>
+      </p:sp>
+      <p:sp>
+        <p:nvSpPr>
+          <p:cNvPr id="7" name="Shape 4"/>
+          <p:cNvSpPr/>
+          <p:nvPr/>
+        </p:nvSpPr>
+        <p:spPr>
+          <a:xfrm>
+            <a:off x="548640" y="1920240"/>
+            <a:ext cx="2651760" cy="2011680"/>
+          </a:xfrm>
+          <a:prstGeom prst="roundRect">
+            <a:avLst>
+              <a:gd name="adj" fmla="val 5455"/>
+            </a:avLst>
+          </a:prstGeom>
+          <a:solidFill>
+            <a:srgbClr val="FFFFFF"/>
+          </a:solidFill>
+          <a:ln w="19050">
+            <a:solidFill>
+              <a:srgbClr val="EADCC2"/>
+            </a:solidFill>
+            <a:prstDash val="solid"/>
+          </a:ln>
+        </p:spPr>
+      </p:sp>
+      <p:sp>
+        <p:nvSpPr>
+          <p:cNvPr id="8" name="Text 5"/>
+          <p:cNvSpPr/>
+          <p:nvPr/>
+        </p:nvSpPr>
+        <p:spPr>
+          <a:xfrm>
+            <a:off x="685800" y="2103120"/>
+            <a:ext cx="2377440" cy="365760"/>
+          </a:xfrm>
+          <a:prstGeom prst="rect">
+            <a:avLst/>
+          </a:prstGeom>
+          <a:noFill/>
+          <a:ln/>
+        </p:spPr>
+        <p:txBody>
+          <a:bodyPr wrap="square" rtlCol="0" anchor="ctr"/>
+          <a:lstStyle/>
+          <a:p>
+            <a:pPr indent="0" marL="0">
+              <a:buNone/>
+            </a:pPr>
+            <a:r>
+              <a:rPr lang="en-US" sz="1300" b="1" dirty="0">
+                <a:solidFill>
+                  <a:srgbClr val="052E16"/>
+                </a:solidFill>
+                <a:latin typeface="Georgia" pitchFamily="34" charset="0"/>
+                <a:ea typeface="Georgia" pitchFamily="34" charset="-122"/>
+                <a:cs typeface="Georgia" pitchFamily="34" charset="-120"/>
+              </a:rPr>
+              <a:t>1 · Découverte</a:t>
+            </a:r>
+            <a:endParaRPr lang="en-US" sz="1300" dirty="0"/>
+          </a:p>
+        </p:txBody>
+      </p:sp>
+      <p:sp>
+        <p:nvSpPr>
+          <p:cNvPr id="9" name="Text 6"/>
+          <p:cNvSpPr/>
+          <p:nvPr/>
+        </p:nvSpPr>
+        <p:spPr>
+          <a:xfrm>
+            <a:off x="685800" y="2560320"/>
+            <a:ext cx="2377440" cy="1188720"/>
+          </a:xfrm>
+          <a:prstGeom prst="rect">
+            <a:avLst/>
+          </a:prstGeom>
+          <a:noFill/>
+          <a:ln/>
+        </p:spPr>
+        <p:txBody>
+          <a:bodyPr wrap="square" rtlCol="0" anchor="t"/>
+          <a:lstStyle/>
+          <a:p>
+            <a:pPr indent="0" marL="0">
+              <a:buNone/>
+            </a:pPr>
+            <a:r>
+              <a:rPr lang="en-US" sz="900" dirty="0">
+                <a:solidFill>
+                  <a:srgbClr val="8A7456"/>
+                </a:solidFill>
+              </a:rPr>
+              <a:t>Démo interactive, compte simulé, identification 5 saisies clés</a:t>
+            </a:r>
+            <a:endParaRPr lang="en-US" sz="900" dirty="0"/>
+          </a:p>
+        </p:txBody>
+      </p:sp>
+      <p:sp>
+        <p:nvSpPr>
+          <p:cNvPr id="10" name="Shape 7"/>
+          <p:cNvSpPr/>
+          <p:nvPr/>
+        </p:nvSpPr>
+        <p:spPr>
+          <a:xfrm>
+            <a:off x="3383280" y="1920240"/>
+            <a:ext cx="2651760" cy="2011680"/>
+          </a:xfrm>
+          <a:prstGeom prst="roundRect">
+            <a:avLst>
+              <a:gd name="adj" fmla="val 5455"/>
+            </a:avLst>
+          </a:prstGeom>
+          <a:solidFill>
+            <a:srgbClr val="FFFFFF"/>
+          </a:solidFill>
+          <a:ln w="19050">
+            <a:solidFill>
+              <a:srgbClr val="EADCC2"/>
+            </a:solidFill>
+            <a:prstDash val="solid"/>
+          </a:ln>
+        </p:spPr>
+      </p:sp>
+      <p:sp>
+        <p:nvSpPr>
+          <p:cNvPr id="11" name="Text 8"/>
+          <p:cNvSpPr/>
+          <p:nvPr/>
+        </p:nvSpPr>
+        <p:spPr>
+          <a:xfrm>
+            <a:off x="3520440" y="2103120"/>
+            <a:ext cx="2377440" cy="365760"/>
+          </a:xfrm>
+          <a:prstGeom prst="rect">
+            <a:avLst/>
+          </a:prstGeom>
+          <a:noFill/>
+          <a:ln/>
+        </p:spPr>
+        <p:txBody>
+          <a:bodyPr wrap="square" rtlCol="0" anchor="ctr"/>
+          <a:lstStyle/>
+          <a:p>
+            <a:pPr indent="0" marL="0">
+              <a:buNone/>
+            </a:pPr>
+            <a:r>
+              <a:rPr lang="en-US" sz="1300" b="1" dirty="0">
+                <a:solidFill>
+                  <a:srgbClr val="052E16"/>
+                </a:solidFill>
+                <a:latin typeface="Georgia" pitchFamily="34" charset="0"/>
+                <a:ea typeface="Georgia" pitchFamily="34" charset="-122"/>
+                <a:cs typeface="Georgia" pitchFamily="34" charset="-120"/>
+              </a:rPr>
+              <a:t>2 · Pilote 30 j</a:t>
+            </a:r>
+            <a:endParaRPr lang="en-US" sz="1300" dirty="0"/>
+          </a:p>
+        </p:txBody>
+      </p:sp>
+      <p:sp>
+        <p:nvSpPr>
+          <p:cNvPr id="12" name="Text 9"/>
+          <p:cNvSpPr/>
+          <p:nvPr/>
+        </p:nvSpPr>
+        <p:spPr>
+          <a:xfrm>
+            <a:off x="3520440" y="2560320"/>
+            <a:ext cx="2377440" cy="1188720"/>
+          </a:xfrm>
+          <a:prstGeom prst="rect">
+            <a:avLst/>
+          </a:prstGeom>
+          <a:noFill/>
+          <a:ln/>
+        </p:spPr>
+        <p:txBody>
+          <a:bodyPr wrap="square" rtlCol="0" anchor="t"/>
+          <a:lstStyle/>
+          <a:p>
+            <a:pPr indent="0" marL="0">
+              <a:buNone/>
+            </a:pPr>
+            <a:r>
+              <a:rPr lang="en-US" sz="900" dirty="0">
+                <a:solidFill>
+                  <a:srgbClr val="8A7456"/>
+                </a:solidFill>
+              </a:rPr>
+              <a:t>Configuration, formation équipe, capteurs pilote, support hebdo</a:t>
+            </a:r>
+            <a:endParaRPr lang="en-US" sz="900" dirty="0"/>
+          </a:p>
+        </p:txBody>
+      </p:sp>
+      <p:sp>
+        <p:nvSpPr>
+          <p:cNvPr id="13" name="Shape 10"/>
+          <p:cNvSpPr/>
+          <p:nvPr/>
+        </p:nvSpPr>
+        <p:spPr>
+          <a:xfrm>
+            <a:off x="6217920" y="1920240"/>
+            <a:ext cx="2651760" cy="2011680"/>
+          </a:xfrm>
+          <a:prstGeom prst="roundRect">
+            <a:avLst>
+              <a:gd name="adj" fmla="val 5455"/>
+            </a:avLst>
+          </a:prstGeom>
+          <a:solidFill>
+            <a:srgbClr val="FFFFFF"/>
+          </a:solidFill>
+          <a:ln w="19050">
+            <a:solidFill>
+              <a:srgbClr val="EADCC2"/>
+            </a:solidFill>
+            <a:prstDash val="solid"/>
+          </a:ln>
+        </p:spPr>
+      </p:sp>
+      <p:sp>
+        <p:nvSpPr>
+          <p:cNvPr id="14" name="Text 11"/>
+          <p:cNvSpPr/>
+          <p:nvPr/>
+        </p:nvSpPr>
+        <p:spPr>
+          <a:xfrm>
+            <a:off x="6355080" y="2103120"/>
+            <a:ext cx="2377440" cy="365760"/>
+          </a:xfrm>
+          <a:prstGeom prst="rect">
+            <a:avLst/>
+          </a:prstGeom>
+          <a:noFill/>
+          <a:ln/>
+        </p:spPr>
+        <p:txBody>
+          <a:bodyPr wrap="square" rtlCol="0" anchor="ctr"/>
+          <a:lstStyle/>
+          <a:p>
+            <a:pPr indent="0" marL="0">
+              <a:buNone/>
+            </a:pPr>
+            <a:r>
+              <a:rPr lang="en-US" sz="1300" b="1" dirty="0">
+                <a:solidFill>
+                  <a:srgbClr val="052E16"/>
+                </a:solidFill>
+                <a:latin typeface="Georgia" pitchFamily="34" charset="0"/>
+                <a:ea typeface="Georgia" pitchFamily="34" charset="-122"/>
+                <a:cs typeface="Georgia" pitchFamily="34" charset="-120"/>
+              </a:rPr>
+              <a:t>3 · Généralisation</a:t>
+            </a:r>
+            <a:endParaRPr lang="en-US" sz="1300" dirty="0"/>
+          </a:p>
+        </p:txBody>
+      </p:sp>
+      <p:sp>
+        <p:nvSpPr>
+          <p:cNvPr id="15" name="Text 12"/>
+          <p:cNvSpPr/>
+          <p:nvPr/>
+        </p:nvSpPr>
+        <p:spPr>
+          <a:xfrm>
+            <a:off x="6355080" y="2560320"/>
+            <a:ext cx="2377440" cy="1188720"/>
+          </a:xfrm>
+          <a:prstGeom prst="rect">
+            <a:avLst/>
+          </a:prstGeom>
+          <a:noFill/>
+          <a:ln/>
+        </p:spPr>
+        <p:txBody>
+          <a:bodyPr wrap="square" rtlCol="0" anchor="t"/>
+          <a:lstStyle/>
+          <a:p>
+            <a:pPr indent="0" marL="0">
+              <a:buNone/>
+            </a:pPr>
+            <a:r>
+              <a:rPr lang="en-US" sz="900" dirty="0">
+                <a:solidFill>
+                  <a:srgbClr val="8A7456"/>
+                </a:solidFill>
+              </a:rPr>
+              <a:t>Multi-sites, rapports banque, automatisation, WhatsApp</a:t>
+            </a:r>
+            <a:endParaRPr lang="en-US" sz="900" dirty="0"/>
           </a:p>
         </p:txBody>
       </p:sp>
@@ -4450,7 +8104,7 @@
                   <a:srgbClr val="8A7456"/>
                 </a:solidFill>
               </a:rPr>
-              <a:t>02 / 14</a:t>
+              <a:t>02 / 22</a:t>
             </a:r>
             <a:endParaRPr lang="en-US" sz="800" dirty="0"/>
           </a:p>
@@ -4683,9 +8337,884 @@
                   <a:srgbClr val="8A7456"/>
                 </a:solidFill>
               </a:rPr>
-              <a:t>Résultat : pertes, marges floues, croissance difficile à financer.</a:t>
+              <a:t>Résultat : pertes évitables, marges inconnues, croissance impossible à financer.</a:t>
             </a:r>
             <a:endParaRPr lang="en-US" sz="900" dirty="0"/>
+          </a:p>
+        </p:txBody>
+      </p:sp>
+    </p:spTree>
+  </p:cSld>
+  <p:clrMapOvr>
+    <a:masterClrMapping/>
+  </p:clrMapOvr>
+</p:sld>
+</file>
+
+<file path=ppt/slides/slide20.xml><?xml version="1.0" encoding="utf-8"?>
+<p:sld xmlns:a="http://schemas.openxmlformats.org/drawingml/2006/main" xmlns:r="http://schemas.openxmlformats.org/officeDocument/2006/relationships" xmlns:p="http://schemas.openxmlformats.org/presentationml/2006/main">
+  <p:cSld name="Slide 20">
+    <p:bg>
+      <p:bgPr>
+        <a:solidFill>
+          <a:srgbClr val="FFFDF8"/>
+        </a:solidFill>
+      </p:bgPr>
+    </p:bg>
+    <p:spTree>
+      <p:nvGrpSpPr>
+        <p:cNvPr id="1" name=""/>
+        <p:cNvGrpSpPr/>
+        <p:nvPr/>
+      </p:nvGrpSpPr>
+      <p:grpSpPr>
+        <a:xfrm>
+          <a:off x="0" y="0"/>
+          <a:ext cx="0" cy="0"/>
+          <a:chOff x="0" y="0"/>
+          <a:chExt cx="0" cy="0"/>
+        </a:xfrm>
+      </p:grpSpPr>
+      <p:pic>
+        <p:nvPicPr>
+          <p:cNvPr id="2" name="Image 0" descr="/workspace/public/horizon-farm-logo-transparent.png">    </p:cNvPr>
+          <p:cNvPicPr>
+            <a:picLocks noChangeAspect="1"/>
+          </p:cNvPicPr>
+          <p:nvPr/>
+        </p:nvPicPr>
+        <p:blipFill>
+          <a:blip r:embed="rId1"/>
+          <a:stretch>
+            <a:fillRect/>
+          </a:stretch>
+        </p:blipFill>
+        <p:spPr>
+          <a:xfrm>
+            <a:off x="365760" y="228600"/>
+            <a:ext cx="1645920" cy="502920"/>
+          </a:xfrm>
+          <a:prstGeom prst="rect">
+            <a:avLst/>
+          </a:prstGeom>
+        </p:spPr>
+      </p:pic>
+      <p:sp>
+        <p:nvSpPr>
+          <p:cNvPr id="3" name="Text 0"/>
+          <p:cNvSpPr/>
+          <p:nvPr/>
+        </p:nvSpPr>
+        <p:spPr>
+          <a:xfrm>
+            <a:off x="8046720" y="320040"/>
+            <a:ext cx="914400" cy="274320"/>
+          </a:xfrm>
+          <a:prstGeom prst="rect">
+            <a:avLst/>
+          </a:prstGeom>
+          <a:noFill/>
+          <a:ln/>
+        </p:spPr>
+        <p:txBody>
+          <a:bodyPr wrap="square" rtlCol="0" anchor="ctr"/>
+          <a:lstStyle/>
+          <a:p>
+            <a:pPr algn="r" indent="0" marL="0">
+              <a:buNone/>
+            </a:pPr>
+            <a:r>
+              <a:rPr lang="en-US" sz="800" b="1" dirty="0">
+                <a:solidFill>
+                  <a:srgbClr val="8A7456"/>
+                </a:solidFill>
+              </a:rPr>
+              <a:t>20 / 22</a:t>
+            </a:r>
+            <a:endParaRPr lang="en-US" sz="800" dirty="0"/>
+          </a:p>
+        </p:txBody>
+      </p:sp>
+      <p:sp>
+        <p:nvSpPr>
+          <p:cNvPr id="4" name="Shape 1"/>
+          <p:cNvSpPr/>
+          <p:nvPr/>
+        </p:nvSpPr>
+        <p:spPr>
+          <a:xfrm>
+            <a:off x="0" y="4983480"/>
+            <a:ext cx="9144000" cy="73152"/>
+          </a:xfrm>
+          <a:prstGeom prst="rect">
+            <a:avLst/>
+          </a:prstGeom>
+          <a:solidFill>
+            <a:srgbClr val="22C55E"/>
+          </a:solidFill>
+          <a:ln w="12700">
+            <a:solidFill>
+              <a:srgbClr val="22C55E"/>
+            </a:solidFill>
+            <a:prstDash val="solid"/>
+          </a:ln>
+        </p:spPr>
+      </p:sp>
+      <p:sp>
+        <p:nvSpPr>
+          <p:cNvPr id="5" name="Text 2"/>
+          <p:cNvSpPr/>
+          <p:nvPr/>
+        </p:nvSpPr>
+        <p:spPr>
+          <a:xfrm>
+            <a:off x="548640" y="868680"/>
+            <a:ext cx="8046720" cy="274320"/>
+          </a:xfrm>
+          <a:prstGeom prst="rect">
+            <a:avLst/>
+          </a:prstGeom>
+          <a:noFill/>
+          <a:ln/>
+        </p:spPr>
+        <p:txBody>
+          <a:bodyPr wrap="square" rtlCol="0" anchor="ctr"/>
+          <a:lstStyle/>
+          <a:p>
+            <a:pPr indent="0" marL="0">
+              <a:buNone/>
+            </a:pPr>
+            <a:r>
+              <a:rPr lang="en-US" sz="1000" b="1" spc="300" kern="0" dirty="0">
+                <a:solidFill>
+                  <a:srgbClr val="9A6B12"/>
+                </a:solidFill>
+              </a:rPr>
+              <a:t>Objections</a:t>
+            </a:r>
+            <a:endParaRPr lang="en-US" sz="1000" dirty="0"/>
+          </a:p>
+        </p:txBody>
+      </p:sp>
+      <p:sp>
+        <p:nvSpPr>
+          <p:cNvPr id="6" name="Text 3"/>
+          <p:cNvSpPr/>
+          <p:nvPr/>
+        </p:nvSpPr>
+        <p:spPr>
+          <a:xfrm>
+            <a:off x="548640" y="1143000"/>
+            <a:ext cx="8046720" cy="685800"/>
+          </a:xfrm>
+          <a:prstGeom prst="rect">
+            <a:avLst/>
+          </a:prstGeom>
+          <a:noFill/>
+          <a:ln/>
+        </p:spPr>
+        <p:txBody>
+          <a:bodyPr wrap="square" rtlCol="0" anchor="ctr"/>
+          <a:lstStyle/>
+          <a:p>
+            <a:pPr indent="0" marL="0">
+              <a:buNone/>
+            </a:pPr>
+            <a:r>
+              <a:rPr lang="en-US" sz="2800" b="1" dirty="0">
+                <a:solidFill>
+                  <a:srgbClr val="052E16"/>
+                </a:solidFill>
+                <a:latin typeface="Georgia" pitchFamily="34" charset="0"/>
+                <a:ea typeface="Georgia" pitchFamily="34" charset="-122"/>
+                <a:cs typeface="Georgia" pitchFamily="34" charset="-120"/>
+              </a:rPr>
+              <a:t>On nous dit souvent…</a:t>
+            </a:r>
+            <a:endParaRPr lang="en-US" sz="2800" dirty="0"/>
+          </a:p>
+        </p:txBody>
+      </p:sp>
+      <p:sp>
+        <p:nvSpPr>
+          <p:cNvPr id="7" name="Text 4"/>
+          <p:cNvSpPr/>
+          <p:nvPr/>
+        </p:nvSpPr>
+        <p:spPr>
+          <a:xfrm>
+            <a:off x="548640" y="1920240"/>
+            <a:ext cx="8046720" cy="2560320"/>
+          </a:xfrm>
+          <a:prstGeom prst="rect">
+            <a:avLst/>
+          </a:prstGeom>
+          <a:noFill/>
+          <a:ln/>
+        </p:spPr>
+        <p:txBody>
+          <a:bodyPr wrap="square" rtlCol="0" anchor="t"/>
+          <a:lstStyle/>
+          <a:p>
+            <a:pPr marL="342900" indent="-342900">
+              <a:buSzPct val="100000"/>
+              <a:buChar char="•"/>
+            </a:pPr>
+            <a:r>
+              <a:rPr lang="en-US" sz="1200" dirty="0">
+                <a:solidFill>
+                  <a:srgbClr val="2F2415"/>
+                </a:solidFill>
+              </a:rPr>
+              <a:t>« Pas digital » → Hey Horizon parle votre langue. Accueil lisible sans manuel.</a:t>
+            </a:r>
+            <a:endParaRPr lang="en-US" sz="1200" dirty="0"/>
+          </a:p>
+          <a:p>
+            <a:pPr marL="342900" indent="-342900">
+              <a:buSzPct val="100000"/>
+              <a:buChar char="•"/>
+            </a:pPr>
+            <a:r>
+              <a:rPr lang="en-US" sz="1200" dirty="0">
+                <a:solidFill>
+                  <a:srgbClr val="2F2415"/>
+                </a:solidFill>
+              </a:rPr>
+              <a:t>« J'ai Excel » → Excel ne relie pas vente, stock, capteurs et BP investisseur.</a:t>
+            </a:r>
+            <a:endParaRPr lang="en-US" sz="1200" dirty="0"/>
+          </a:p>
+          <a:p>
+            <a:pPr marL="342900" indent="-342900">
+              <a:buSzPct val="100000"/>
+              <a:buChar char="•"/>
+            </a:pPr>
+            <a:r>
+              <a:rPr lang="en-US" sz="1200" dirty="0">
+                <a:solidFill>
+                  <a:srgbClr val="2F2415"/>
+                </a:solidFill>
+              </a:rPr>
+              <a:t>« Connexion faible » → Mode hors ligne + synchronisation automatique.</a:t>
+            </a:r>
+            <a:endParaRPr lang="en-US" sz="1200" dirty="0"/>
+          </a:p>
+          <a:p>
+            <a:pPr marL="342900" indent="-342900">
+              <a:buSzPct val="100000"/>
+              <a:buChar char="•"/>
+            </a:pPr>
+            <a:r>
+              <a:rPr lang="en-US" sz="1200" dirty="0">
+                <a:solidFill>
+                  <a:srgbClr val="2F2415"/>
+                </a:solidFill>
+              </a:rPr>
+              <a:t>« Trop cher » → Un outil remplace 5 logiciels + évite une perte de bande.</a:t>
+            </a:r>
+            <a:endParaRPr lang="en-US" sz="1200" dirty="0"/>
+          </a:p>
+        </p:txBody>
+      </p:sp>
+    </p:spTree>
+  </p:cSld>
+  <p:clrMapOvr>
+    <a:masterClrMapping/>
+  </p:clrMapOvr>
+</p:sld>
+</file>
+
+<file path=ppt/slides/slide21.xml><?xml version="1.0" encoding="utf-8"?>
+<p:sld xmlns:a="http://schemas.openxmlformats.org/drawingml/2006/main" xmlns:r="http://schemas.openxmlformats.org/officeDocument/2006/relationships" xmlns:p="http://schemas.openxmlformats.org/presentationml/2006/main">
+  <p:cSld name="Slide 21">
+    <p:bg>
+      <p:bgPr>
+        <a:solidFill>
+          <a:srgbClr val="041A0D"/>
+        </a:solidFill>
+      </p:bgPr>
+    </p:bg>
+    <p:spTree>
+      <p:nvGrpSpPr>
+        <p:cNvPr id="1" name=""/>
+        <p:cNvGrpSpPr/>
+        <p:nvPr/>
+      </p:nvGrpSpPr>
+      <p:grpSpPr>
+        <a:xfrm>
+          <a:off x="0" y="0"/>
+          <a:ext cx="0" cy="0"/>
+          <a:chOff x="0" y="0"/>
+          <a:chExt cx="0" cy="0"/>
+        </a:xfrm>
+      </p:grpSpPr>
+      <p:pic>
+        <p:nvPicPr>
+          <p:cNvPr id="2" name="Image 0" descr="/workspace/public/horizon-farm-logo-transparent.png">    </p:cNvPr>
+          <p:cNvPicPr>
+            <a:picLocks noChangeAspect="1"/>
+          </p:cNvPicPr>
+          <p:nvPr/>
+        </p:nvPicPr>
+        <p:blipFill>
+          <a:blip r:embed="rId1"/>
+          <a:stretch>
+            <a:fillRect/>
+          </a:stretch>
+        </p:blipFill>
+        <p:spPr>
+          <a:xfrm>
+            <a:off x="365760" y="228600"/>
+            <a:ext cx="1645920" cy="502920"/>
+          </a:xfrm>
+          <a:prstGeom prst="rect">
+            <a:avLst/>
+          </a:prstGeom>
+        </p:spPr>
+      </p:pic>
+      <p:sp>
+        <p:nvSpPr>
+          <p:cNvPr id="3" name="Text 0"/>
+          <p:cNvSpPr/>
+          <p:nvPr/>
+        </p:nvSpPr>
+        <p:spPr>
+          <a:xfrm>
+            <a:off x="8046720" y="320040"/>
+            <a:ext cx="914400" cy="274320"/>
+          </a:xfrm>
+          <a:prstGeom prst="rect">
+            <a:avLst/>
+          </a:prstGeom>
+          <a:noFill/>
+          <a:ln/>
+        </p:spPr>
+        <p:txBody>
+          <a:bodyPr wrap="square" rtlCol="0" anchor="ctr"/>
+          <a:lstStyle/>
+          <a:p>
+            <a:pPr algn="r" indent="0" marL="0">
+              <a:buNone/>
+            </a:pPr>
+            <a:r>
+              <a:rPr lang="en-US" sz="800" b="1" dirty="0">
+                <a:solidFill>
+                  <a:srgbClr val="6B9A7A"/>
+                </a:solidFill>
+              </a:rPr>
+              <a:t>21 / 22</a:t>
+            </a:r>
+            <a:endParaRPr lang="en-US" sz="800" dirty="0"/>
+          </a:p>
+        </p:txBody>
+      </p:sp>
+      <p:sp>
+        <p:nvSpPr>
+          <p:cNvPr id="4" name="Shape 1"/>
+          <p:cNvSpPr/>
+          <p:nvPr/>
+        </p:nvSpPr>
+        <p:spPr>
+          <a:xfrm>
+            <a:off x="0" y="4983480"/>
+            <a:ext cx="9144000" cy="73152"/>
+          </a:xfrm>
+          <a:prstGeom prst="rect">
+            <a:avLst/>
+          </a:prstGeom>
+          <a:solidFill>
+            <a:srgbClr val="22C55E"/>
+          </a:solidFill>
+          <a:ln w="12700">
+            <a:solidFill>
+              <a:srgbClr val="22C55E"/>
+            </a:solidFill>
+            <a:prstDash val="solid"/>
+          </a:ln>
+        </p:spPr>
+      </p:sp>
+      <p:sp>
+        <p:nvSpPr>
+          <p:cNvPr id="5" name="Text 2"/>
+          <p:cNvSpPr/>
+          <p:nvPr/>
+        </p:nvSpPr>
+        <p:spPr>
+          <a:xfrm>
+            <a:off x="548640" y="868680"/>
+            <a:ext cx="8046720" cy="274320"/>
+          </a:xfrm>
+          <a:prstGeom prst="rect">
+            <a:avLst/>
+          </a:prstGeom>
+          <a:noFill/>
+          <a:ln/>
+        </p:spPr>
+        <p:txBody>
+          <a:bodyPr wrap="square" rtlCol="0" anchor="ctr"/>
+          <a:lstStyle/>
+          <a:p>
+            <a:pPr indent="0" marL="0">
+              <a:buNone/>
+            </a:pPr>
+            <a:r>
+              <a:rPr lang="en-US" sz="1000" b="1" spc="300" kern="0" dirty="0">
+                <a:solidFill>
+                  <a:srgbClr val="B8954A"/>
+                </a:solidFill>
+              </a:rPr>
+              <a:t>Différenciation</a:t>
+            </a:r>
+            <a:endParaRPr lang="en-US" sz="1000" dirty="0"/>
+          </a:p>
+        </p:txBody>
+      </p:sp>
+      <p:sp>
+        <p:nvSpPr>
+          <p:cNvPr id="6" name="Text 3"/>
+          <p:cNvSpPr/>
+          <p:nvPr/>
+        </p:nvSpPr>
+        <p:spPr>
+          <a:xfrm>
+            <a:off x="548640" y="1143000"/>
+            <a:ext cx="8046720" cy="685800"/>
+          </a:xfrm>
+          <a:prstGeom prst="rect">
+            <a:avLst/>
+          </a:prstGeom>
+          <a:noFill/>
+          <a:ln/>
+        </p:spPr>
+        <p:txBody>
+          <a:bodyPr wrap="square" rtlCol="0" anchor="ctr"/>
+          <a:lstStyle/>
+          <a:p>
+            <a:pPr indent="0" marL="0">
+              <a:buNone/>
+            </a:pPr>
+            <a:r>
+              <a:rPr lang="en-US" sz="2800" b="1" dirty="0">
+                <a:solidFill>
+                  <a:srgbClr val="FFFFFF"/>
+                </a:solidFill>
+                <a:latin typeface="Georgia" pitchFamily="34" charset="0"/>
+                <a:ea typeface="Georgia" pitchFamily="34" charset="-122"/>
+                <a:cs typeface="Georgia" pitchFamily="34" charset="-120"/>
+              </a:rPr>
+              <a:t>Le seul ERP pensé</a:t>
+            </a:r>
+            <a:endParaRPr lang="en-US" sz="2800" dirty="0"/>
+          </a:p>
+          <a:p>
+            <a:pPr indent="0" marL="0">
+              <a:buNone/>
+            </a:pPr>
+            <a:r>
+              <a:rPr lang="en-US" sz="2800" b="1" dirty="0">
+                <a:solidFill>
+                  <a:srgbClr val="FFFFFF"/>
+                </a:solidFill>
+                <a:latin typeface="Georgia" pitchFamily="34" charset="0"/>
+                <a:ea typeface="Georgia" pitchFamily="34" charset="-122"/>
+                <a:cs typeface="Georgia" pitchFamily="34" charset="-120"/>
+              </a:rPr>
+              <a:t>pour l'agriculture africaine</a:t>
+            </a:r>
+            <a:endParaRPr lang="en-US" sz="2800" dirty="0"/>
+          </a:p>
+        </p:txBody>
+      </p:sp>
+      <p:sp>
+        <p:nvSpPr>
+          <p:cNvPr id="7" name="Shape 4"/>
+          <p:cNvSpPr/>
+          <p:nvPr/>
+        </p:nvSpPr>
+        <p:spPr>
+          <a:xfrm>
+            <a:off x="548640" y="1920240"/>
+            <a:ext cx="54864" cy="1005840"/>
+          </a:xfrm>
+          <a:prstGeom prst="rect">
+            <a:avLst/>
+          </a:prstGeom>
+          <a:solidFill>
+            <a:srgbClr val="22C55E"/>
+          </a:solidFill>
+          <a:ln/>
+        </p:spPr>
+      </p:sp>
+      <p:sp>
+        <p:nvSpPr>
+          <p:cNvPr id="8" name="Text 5"/>
+          <p:cNvSpPr/>
+          <p:nvPr/>
+        </p:nvSpPr>
+        <p:spPr>
+          <a:xfrm>
+            <a:off x="777240" y="1920240"/>
+            <a:ext cx="7589520" cy="1097280"/>
+          </a:xfrm>
+          <a:prstGeom prst="rect">
+            <a:avLst/>
+          </a:prstGeom>
+          <a:noFill/>
+          <a:ln/>
+        </p:spPr>
+        <p:txBody>
+          <a:bodyPr wrap="square" rtlCol="0" anchor="ctr"/>
+          <a:lstStyle/>
+          <a:p>
+            <a:pPr indent="0" marL="0">
+              <a:buNone/>
+            </a:pPr>
+            <a:r>
+              <a:rPr lang="en-US" sz="1500" i="1" dirty="0">
+                <a:solidFill>
+                  <a:srgbClr val="DCFCE7"/>
+                </a:solidFill>
+              </a:rPr>
+              <a:t>Pas un tableur amélioré. Pas un gadget capteur isolé. Un copilote d'exploitation complet — terrain, finance, IoT et investisseur.</a:t>
+            </a:r>
+            <a:endParaRPr lang="en-US" sz="1500" dirty="0"/>
+          </a:p>
+        </p:txBody>
+      </p:sp>
+    </p:spTree>
+  </p:cSld>
+  <p:clrMapOvr>
+    <a:masterClrMapping/>
+  </p:clrMapOvr>
+</p:sld>
+</file>
+
+<file path=ppt/slides/slide22.xml><?xml version="1.0" encoding="utf-8"?>
+<p:sld xmlns:a="http://schemas.openxmlformats.org/drawingml/2006/main" xmlns:r="http://schemas.openxmlformats.org/officeDocument/2006/relationships" xmlns:p="http://schemas.openxmlformats.org/presentationml/2006/main">
+  <p:cSld name="Slide 22">
+    <p:bg>
+      <p:bgPr>
+        <a:solidFill>
+          <a:srgbClr val="FFFDF8"/>
+        </a:solidFill>
+      </p:bgPr>
+    </p:bg>
+    <p:spTree>
+      <p:nvGrpSpPr>
+        <p:cNvPr id="1" name=""/>
+        <p:cNvGrpSpPr/>
+        <p:nvPr/>
+      </p:nvGrpSpPr>
+      <p:grpSpPr>
+        <a:xfrm>
+          <a:off x="0" y="0"/>
+          <a:ext cx="0" cy="0"/>
+          <a:chOff x="0" y="0"/>
+          <a:chExt cx="0" cy="0"/>
+        </a:xfrm>
+      </p:grpSpPr>
+      <p:pic>
+        <p:nvPicPr>
+          <p:cNvPr id="2" name="Image 0" descr="/workspace/public/horizon-farm-logo-transparent.png">    </p:cNvPr>
+          <p:cNvPicPr>
+            <a:picLocks noChangeAspect="1"/>
+          </p:cNvPicPr>
+          <p:nvPr/>
+        </p:nvPicPr>
+        <p:blipFill>
+          <a:blip r:embed="rId1"/>
+          <a:stretch>
+            <a:fillRect/>
+          </a:stretch>
+        </p:blipFill>
+        <p:spPr>
+          <a:xfrm>
+            <a:off x="365760" y="228600"/>
+            <a:ext cx="1645920" cy="502920"/>
+          </a:xfrm>
+          <a:prstGeom prst="rect">
+            <a:avLst/>
+          </a:prstGeom>
+        </p:spPr>
+      </p:pic>
+      <p:sp>
+        <p:nvSpPr>
+          <p:cNvPr id="3" name="Text 0"/>
+          <p:cNvSpPr/>
+          <p:nvPr/>
+        </p:nvSpPr>
+        <p:spPr>
+          <a:xfrm>
+            <a:off x="8046720" y="320040"/>
+            <a:ext cx="914400" cy="274320"/>
+          </a:xfrm>
+          <a:prstGeom prst="rect">
+            <a:avLst/>
+          </a:prstGeom>
+          <a:noFill/>
+          <a:ln/>
+        </p:spPr>
+        <p:txBody>
+          <a:bodyPr wrap="square" rtlCol="0" anchor="ctr"/>
+          <a:lstStyle/>
+          <a:p>
+            <a:pPr algn="r" indent="0" marL="0">
+              <a:buNone/>
+            </a:pPr>
+            <a:r>
+              <a:rPr lang="en-US" sz="800" b="1" dirty="0">
+                <a:solidFill>
+                  <a:srgbClr val="8A7456"/>
+                </a:solidFill>
+              </a:rPr>
+              <a:t>22 / 22</a:t>
+            </a:r>
+            <a:endParaRPr lang="en-US" sz="800" dirty="0"/>
+          </a:p>
+        </p:txBody>
+      </p:sp>
+      <p:sp>
+        <p:nvSpPr>
+          <p:cNvPr id="4" name="Shape 1"/>
+          <p:cNvSpPr/>
+          <p:nvPr/>
+        </p:nvSpPr>
+        <p:spPr>
+          <a:xfrm>
+            <a:off x="0" y="4983480"/>
+            <a:ext cx="9144000" cy="73152"/>
+          </a:xfrm>
+          <a:prstGeom prst="rect">
+            <a:avLst/>
+          </a:prstGeom>
+          <a:solidFill>
+            <a:srgbClr val="22C55E"/>
+          </a:solidFill>
+          <a:ln w="12700">
+            <a:solidFill>
+              <a:srgbClr val="22C55E"/>
+            </a:solidFill>
+            <a:prstDash val="solid"/>
+          </a:ln>
+        </p:spPr>
+      </p:sp>
+      <p:sp>
+        <p:nvSpPr>
+          <p:cNvPr id="5" name="Text 2"/>
+          <p:cNvSpPr/>
+          <p:nvPr/>
+        </p:nvSpPr>
+        <p:spPr>
+          <a:xfrm>
+            <a:off x="731520" y="1097280"/>
+            <a:ext cx="7680960" cy="320040"/>
+          </a:xfrm>
+          <a:prstGeom prst="rect">
+            <a:avLst/>
+          </a:prstGeom>
+          <a:noFill/>
+          <a:ln/>
+        </p:spPr>
+        <p:txBody>
+          <a:bodyPr wrap="square" rtlCol="0" anchor="ctr"/>
+          <a:lstStyle/>
+          <a:p>
+            <a:pPr algn="ctr" indent="0" marL="0">
+              <a:buNone/>
+            </a:pPr>
+            <a:r>
+              <a:rPr lang="en-US" sz="1100" b="1" spc="300" kern="0" dirty="0">
+                <a:solidFill>
+                  <a:srgbClr val="9A6B12"/>
+                </a:solidFill>
+              </a:rPr>
+              <a:t>Passez à l'action</a:t>
+            </a:r>
+            <a:endParaRPr lang="en-US" sz="1100" dirty="0"/>
+          </a:p>
+        </p:txBody>
+      </p:sp>
+      <p:sp>
+        <p:nvSpPr>
+          <p:cNvPr id="6" name="Text 3"/>
+          <p:cNvSpPr/>
+          <p:nvPr/>
+        </p:nvSpPr>
+        <p:spPr>
+          <a:xfrm>
+            <a:off x="731520" y="1554480"/>
+            <a:ext cx="7680960" cy="914400"/>
+          </a:xfrm>
+          <a:prstGeom prst="rect">
+            <a:avLst/>
+          </a:prstGeom>
+          <a:noFill/>
+          <a:ln/>
+        </p:spPr>
+        <p:txBody>
+          <a:bodyPr wrap="square" rtlCol="0" anchor="ctr"/>
+          <a:lstStyle/>
+          <a:p>
+            <a:pPr algn="ctr" indent="0" marL="0">
+              <a:buNone/>
+            </a:pPr>
+            <a:r>
+              <a:rPr lang="en-US" sz="3200" b="1" dirty="0">
+                <a:solidFill>
+                  <a:srgbClr val="052E16"/>
+                </a:solidFill>
+                <a:latin typeface="Georgia" pitchFamily="34" charset="0"/>
+                <a:ea typeface="Georgia" pitchFamily="34" charset="-122"/>
+                <a:cs typeface="Georgia" pitchFamily="34" charset="-120"/>
+              </a:rPr>
+              <a:t>Essayez Horizon Farm dès maintenant</a:t>
+            </a:r>
+            <a:endParaRPr lang="en-US" sz="3200" dirty="0"/>
+          </a:p>
+        </p:txBody>
+      </p:sp>
+      <p:sp>
+        <p:nvSpPr>
+          <p:cNvPr id="7" name="Text 4"/>
+          <p:cNvSpPr/>
+          <p:nvPr/>
+        </p:nvSpPr>
+        <p:spPr>
+          <a:xfrm>
+            <a:off x="1097280" y="2651760"/>
+            <a:ext cx="6949440" cy="548640"/>
+          </a:xfrm>
+          <a:prstGeom prst="rect">
+            <a:avLst/>
+          </a:prstGeom>
+          <a:noFill/>
+          <a:ln/>
+        </p:spPr>
+        <p:txBody>
+          <a:bodyPr wrap="square" rtlCol="0" anchor="ctr"/>
+          <a:lstStyle/>
+          <a:p>
+            <a:pPr algn="ctr" indent="0" marL="0">
+              <a:buNone/>
+            </a:pPr>
+            <a:r>
+              <a:rPr lang="en-US" sz="1400" dirty="0">
+                <a:solidFill>
+                  <a:srgbClr val="8A7456"/>
+                </a:solidFill>
+              </a:rPr>
+              <a:t>Démo interactive · Essai 30 jours · Accompagnement déploiement · Guide PDF inclus</a:t>
+            </a:r>
+            <a:endParaRPr lang="en-US" sz="1400" dirty="0"/>
+          </a:p>
+        </p:txBody>
+      </p:sp>
+      <p:sp>
+        <p:nvSpPr>
+          <p:cNvPr id="8" name="Shape 5"/>
+          <p:cNvSpPr/>
+          <p:nvPr/>
+        </p:nvSpPr>
+        <p:spPr>
+          <a:xfrm>
+            <a:off x="3200400" y="3383280"/>
+            <a:ext cx="2743200" cy="594360"/>
+          </a:xfrm>
+          <a:prstGeom prst="roundRect">
+            <a:avLst>
+              <a:gd name="adj" fmla="val 30769"/>
+            </a:avLst>
+          </a:prstGeom>
+          <a:solidFill>
+            <a:srgbClr val="15803D"/>
+          </a:solidFill>
+          <a:ln/>
+        </p:spPr>
+      </p:sp>
+      <p:sp>
+        <p:nvSpPr>
+          <p:cNvPr id="9" name="Text 6"/>
+          <p:cNvSpPr/>
+          <p:nvPr/>
+        </p:nvSpPr>
+        <p:spPr>
+          <a:xfrm>
+            <a:off x="3200400" y="3429000"/>
+            <a:ext cx="2743200" cy="502920"/>
+          </a:xfrm>
+          <a:prstGeom prst="rect">
+            <a:avLst/>
+          </a:prstGeom>
+          <a:noFill/>
+          <a:ln/>
+        </p:spPr>
+        <p:txBody>
+          <a:bodyPr wrap="square" rtlCol="0" anchor="ctr"/>
+          <a:lstStyle/>
+          <a:p>
+            <a:pPr algn="ctr" indent="0" marL="0">
+              <a:buNone/>
+            </a:pPr>
+            <a:r>
+              <a:rPr lang="en-US" sz="1400" b="1" dirty="0">
+                <a:solidFill>
+                  <a:srgbClr val="FFFFFF"/>
+                </a:solidFill>
+              </a:rPr>
+              <a:t>Réserver ma démo gratuite</a:t>
+            </a:r>
+            <a:endParaRPr lang="en-US" sz="1400" dirty="0"/>
+          </a:p>
+        </p:txBody>
+      </p:sp>
+      <p:sp>
+        <p:nvSpPr>
+          <p:cNvPr id="10" name="Text 7"/>
+          <p:cNvSpPr/>
+          <p:nvPr/>
+        </p:nvSpPr>
+        <p:spPr>
+          <a:xfrm>
+            <a:off x="731520" y="4297680"/>
+            <a:ext cx="7680960" cy="457200"/>
+          </a:xfrm>
+          <a:prstGeom prst="rect">
+            <a:avLst/>
+          </a:prstGeom>
+          <a:noFill/>
+          <a:ln/>
+        </p:spPr>
+        <p:txBody>
+          <a:bodyPr wrap="square" rtlCol="0" anchor="ctr"/>
+          <a:lstStyle/>
+          <a:p>
+            <a:pPr algn="ctr" indent="0" marL="0">
+              <a:buNone/>
+            </a:pPr>
+            <a:r>
+              <a:rPr lang="en-US" sz="1000" dirty="0">
+                <a:solidFill>
+                  <a:srgbClr val="8A7456"/>
+                </a:solidFill>
+              </a:rPr>
+              <a:t>Horizon Farm — De la terre à l'horizon</a:t>
+            </a:r>
+            <a:endParaRPr lang="en-US" sz="1000" dirty="0"/>
+          </a:p>
+          <a:p>
+            <a:pPr algn="ctr" indent="0" marL="0">
+              <a:buNone/>
+            </a:pPr>
+            <a:r>
+              <a:rPr lang="en-US" sz="1000" dirty="0">
+                <a:solidFill>
+                  <a:srgbClr val="8A7456"/>
+                </a:solidFill>
+              </a:rPr>
+              <a:t>contact@horizon-farm.app · /demo-horizon-farm.html</a:t>
+            </a:r>
+            <a:endParaRPr lang="en-US" sz="1000" dirty="0"/>
           </a:p>
         </p:txBody>
       </p:sp>
@@ -4775,7 +9304,7 @@
                   <a:srgbClr val="6B9A7A"/>
                 </a:solidFill>
               </a:rPr>
-              <a:t>03 / 14</a:t>
+              <a:t>03 / 22</a:t>
             </a:r>
             <a:endParaRPr lang="en-US" sz="800" dirty="0"/>
           </a:p>
@@ -4836,7 +9365,7 @@
                   <a:srgbClr val="B8954A"/>
                 </a:solidFill>
               </a:rPr>
-              <a:t>Notre vision</a:t>
+              <a:t>Notre promesse</a:t>
             </a:r>
             <a:endParaRPr lang="en-US" sz="1000" dirty="0"/>
           </a:p>
@@ -4875,7 +9404,7 @@
                 <a:ea typeface="Georgia" pitchFamily="34" charset="-122"/>
                 <a:cs typeface="Georgia" pitchFamily="34" charset="-120"/>
               </a:rPr>
-              <a:t>Une exploitation lisible en dix secondes</a:t>
+              <a:t>Une exploitation lisible en 10 secondes</a:t>
             </a:r>
             <a:endParaRPr lang="en-US" sz="2800" dirty="0"/>
           </a:p>
@@ -4931,7 +9460,7 @@
                   <a:srgbClr val="DCFCE7"/>
                 </a:solidFill>
               </a:rPr>
-              <a:t>« Vous ouvrez l'app le matin : effectifs, stock critique, trésorerie, capteurs, et la première action à faire — sans jargon, sans dix fichiers Excel. »</a:t>
+              <a:t>« Ouvrez Horizon Farm le matin : effectifs, stock critique, trésorerie, capteurs, première action à faire — sans dix fichiers Excel ni jargon technique. »</a:t>
             </a:r>
             <a:endParaRPr lang="en-US" sz="1500" dirty="0"/>
           </a:p>
@@ -5023,7 +9552,7 @@
                   <a:srgbClr val="8A7456"/>
                 </a:solidFill>
               </a:rPr>
-              <a:t>04 / 14</a:t>
+              <a:t>04 / 22</a:t>
             </a:r>
             <a:endParaRPr lang="en-US" sz="800" dirty="0"/>
           </a:p>
@@ -5084,7 +9613,7 @@
                   <a:srgbClr val="9A6B12"/>
                 </a:solidFill>
               </a:rPr>
-              <a:t>La solution</a:t>
+              <a:t>La plateforme</a:t>
             </a:r>
             <a:endParaRPr lang="en-US" sz="1000" dirty="0"/>
           </a:p>
@@ -5123,7 +9652,7 @@
                 <a:ea typeface="Georgia" pitchFamily="34" charset="-122"/>
                 <a:cs typeface="Georgia" pitchFamily="34" charset="-120"/>
               </a:rPr>
-              <a:t>Sept piliers, un seul flux</a:t>
+              <a:t>17 modules interconnectés</a:t>
             </a:r>
             <a:endParaRPr lang="en-US" sz="2800" dirty="0"/>
           </a:p>
@@ -5160,7 +9689,7 @@
                   <a:srgbClr val="2F2415"/>
                 </a:solidFill>
               </a:rPr>
-              <a:t>Accueil dirigeant — état global, capteurs, conseil actionnable</a:t>
+              <a:t>Pilotage : Accueil, Assistant, Centre décisionnel, Objectifs &amp; Croissance, Investisseurs</a:t>
             </a:r>
             <a:endParaRPr lang="en-US" sz="1200" dirty="0"/>
           </a:p>
@@ -5175,7 +9704,7 @@
                   <a:srgbClr val="2F2415"/>
                 </a:solidFill>
               </a:rPr>
-              <a:t>Élevage &amp; cultures — lots, animaux, parcelles, récoltes</a:t>
+              <a:t>Production : Élevage (avicole + animaux), Cultures (parcelles + récoltes)</a:t>
             </a:r>
             <a:endParaRPr lang="en-US" sz="1200" dirty="0"/>
           </a:p>
@@ -5190,7 +9719,7 @@
                   <a:srgbClr val="2F2415"/>
                 </a:solidFill>
               </a:rPr>
-              <a:t>Stock &amp; achats — réceptions, seuils, DLC, fournisseurs</a:t>
+              <a:t>Commerce : Commercial (ventes, abonnements), Achats &amp; Stock</a:t>
             </a:r>
             <a:endParaRPr lang="en-US" sz="1200" dirty="0"/>
           </a:p>
@@ -5205,7 +9734,7 @@
                   <a:srgbClr val="2F2415"/>
                 </a:solidFill>
               </a:rPr>
-              <a:t>Commercial — vente → livraison → encaissement → marge</a:t>
+              <a:t>Finance : Trésorerie, investissements BP, rentabilité multi-activités</a:t>
             </a:r>
             <a:endParaRPr lang="en-US" sz="1200" dirty="0"/>
           </a:p>
@@ -5220,7 +9749,7 @@
                   <a:srgbClr val="2F2415"/>
                 </a:solidFill>
               </a:rPr>
-              <a:t>Finance — trésorerie, créances, rentabilité</a:t>
+              <a:t>Suivi : Activité &amp; Suivi, Documents OCR, Sync ERP</a:t>
             </a:r>
             <a:endParaRPr lang="en-US" sz="1200" dirty="0"/>
           </a:p>
@@ -5235,22 +9764,7 @@
                   <a:srgbClr val="2F2415"/>
                 </a:solidFill>
               </a:rPr>
-              <a:t>Smart Farm — capteurs TC, caméras, alertes automatiques</a:t>
-            </a:r>
-            <a:endParaRPr lang="en-US" sz="1200" dirty="0"/>
-          </a:p>
-          <a:p>
-            <a:pPr marL="342900" indent="-342900">
-              <a:buSzPct val="100000"/>
-              <a:buChar char="•"/>
-            </a:pPr>
-            <a:r>
-              <a:rPr lang="en-US" sz="1200" dirty="0">
-                <a:solidFill>
-                  <a:srgbClr val="2F2415"/>
-                </a:solidFill>
-              </a:rPr>
-              <a:t>Hey Horizon — phrase terrain → brouillon validé</a:t>
+              <a:t>Terrain : Smart Farm capteurs, Opérations &amp; Ressources (RH, matériel)</a:t>
             </a:r>
             <a:endParaRPr lang="en-US" sz="1200" dirty="0"/>
           </a:p>
@@ -5286,7 +9800,7 @@
                   <a:srgbClr val="15803D"/>
                 </a:solidFill>
               </a:rPr>
-              <a:t>Vente → Stock → Trésorerie → Activité &amp; Suivi</a:t>
+              <a:t>Un abonnement = toute la chaîne de valeur agricole</a:t>
             </a:r>
             <a:endParaRPr lang="en-US" sz="1000" dirty="0"/>
           </a:p>
@@ -5378,7 +9892,7 @@
                   <a:srgbClr val="8A7456"/>
                 </a:solidFill>
               </a:rPr>
-              <a:t>05 / 14</a:t>
+              <a:t>05 / 22</a:t>
             </a:r>
             <a:endParaRPr lang="en-US" sz="800" dirty="0"/>
           </a:p>
@@ -5616,7 +10130,7 @@
                   <a:srgbClr val="8A7456"/>
                 </a:solidFill>
               </a:rPr>
-              <a:t>4 000 pondeuses · 300 chair</a:t>
+              <a:t>Mortalités · lots sous traitement</a:t>
             </a:r>
             <a:endParaRPr lang="en-US" sz="900" dirty="0"/>
           </a:p>
@@ -5754,7 +10268,7 @@
                   <a:srgbClr val="8A7456"/>
                 </a:solidFill>
               </a:rPr>
-              <a:t>8,5 ha exploités</a:t>
+              <a:t>8,5 ha · parcelles à surveiller</a:t>
             </a:r>
             <a:endParaRPr lang="en-US" sz="900" dirty="0"/>
           </a:p>
@@ -5892,7 +10406,7 @@
                   <a:srgbClr val="8A7456"/>
                 </a:solidFill>
               </a:rPr>
-              <a:t>⚠ Rupture aliment</a:t>
+              <a:t>⚠ Rupture aliment · DLC</a:t>
             </a:r>
             <a:endParaRPr lang="en-US" sz="900" dirty="0"/>
           </a:p>
@@ -6030,7 +10544,7 @@
                   <a:srgbClr val="8A7456"/>
                 </a:solidFill>
               </a:rPr>
-              <a:t>Créances · Dettes</a:t>
+              <a:t>Créances · Dettes · Trésorerie</a:t>
             </a:r>
             <a:endParaRPr lang="en-US" sz="900" dirty="0"/>
           </a:p>
@@ -6093,7 +10607,7 @@
                   <a:srgbClr val="15803D"/>
                 </a:solidFill>
               </a:rPr>
-              <a:t>CAPTEURS : 28°C · Humidité 62 % · 2 capteurs en ligne</a:t>
+              <a:t>CAPTEURS LIVE : 28°C poulailler · 62 % humidité · 2 capteurs en ligne</a:t>
             </a:r>
             <a:endParaRPr lang="en-US" sz="1100" dirty="0"/>
           </a:p>
@@ -6185,7 +10699,7 @@
                   <a:srgbClr val="6B9A7A"/>
                 </a:solidFill>
               </a:rPr>
-              <a:t>06 / 14</a:t>
+              <a:t>06 / 22</a:t>
             </a:r>
             <a:endParaRPr lang="en-US" sz="800" dirty="0"/>
           </a:p>
@@ -6285,7 +10799,7 @@
                 <a:ea typeface="Georgia" pitchFamily="34" charset="-122"/>
                 <a:cs typeface="Georgia" pitchFamily="34" charset="-120"/>
               </a:rPr>
-              <a:t>L'assistant qui comprend le terrain</a:t>
+              <a:t>Assistant IA — zéro formation lourde</a:t>
             </a:r>
             <a:endParaRPr lang="en-US" sz="2800" dirty="0"/>
           </a:p>
@@ -6321,7 +10835,7 @@
                   <a:srgbClr val="C8E6C9"/>
                 </a:solidFill>
               </a:rPr>
-              <a:t>Pas de formulaire compliqué : vous parlez, Horizon prépare, vous validez. Aucune écriture sans votre accord.</a:t>
+              <a:t>Phrase terrain → brouillon → validation. Vocal, OCR facture, routage automatique vers le bon module.</a:t>
             </a:r>
             <a:endParaRPr lang="en-US" sz="1300" dirty="0"/>
           </a:p>
@@ -6447,7 +10961,7 @@
                   <a:srgbClr val="2F2415"/>
                 </a:solidFill>
               </a:rPr>
-              <a:t>Brouillon vente · 20 tablettes · 70 000 FCFA · Paiement reçu</a:t>
+              <a:t>Brouillon vente · 20 tablettes · 70 000 FCFA · Stock + Trésorerie</a:t>
             </a:r>
             <a:endParaRPr lang="en-US" sz="1000" dirty="0"/>
           </a:p>
@@ -6553,7 +11067,7 @@
                   <a:srgbClr val="8A7456"/>
                 </a:solidFill>
               </a:rPr>
-              <a:t>07 / 14</a:t>
+              <a:t>07 / 22</a:t>
             </a:r>
             <a:endParaRPr lang="en-US" sz="800" dirty="0"/>
           </a:p>
@@ -6614,7 +11128,7 @@
                   <a:srgbClr val="9A6B12"/>
                 </a:solidFill>
               </a:rPr>
-              <a:t>Smart Farm</a:t>
+              <a:t>Centre décisionnel</a:t>
             </a:r>
             <a:endParaRPr lang="en-US" sz="1000" dirty="0"/>
           </a:p>
@@ -6653,7 +11167,7 @@
                 <a:ea typeface="Georgia" pitchFamily="34" charset="-122"/>
                 <a:cs typeface="Georgia" pitchFamily="34" charset="-120"/>
               </a:rPr>
-              <a:t>Capteurs &amp; alertes automatiques</a:t>
+              <a:t>Décider avant la perte</a:t>
             </a:r>
             <a:endParaRPr lang="en-US" sz="2800" dirty="0"/>
           </a:p>
@@ -6690,7 +11204,7 @@
                   <a:srgbClr val="2F2415"/>
                 </a:solidFill>
               </a:rPr>
-              <a:t>Chaleur poulailler — ventilation planifiée avant pertes</a:t>
+              <a:t>Urgences &amp; risques — alertes cross-modules, actions 1-clic</a:t>
             </a:r>
             <a:endParaRPr lang="en-US" sz="1200" dirty="0"/>
           </a:p>
@@ -6705,7 +11219,7 @@
                   <a:srgbClr val="2F2415"/>
                 </a:solidFill>
               </a:rPr>
-              <a:t>Sol sec — irrigation et suivi parcelle</a:t>
+              <a:t>Croissance &amp; opportunités — vendre au bon moment, lots prêts</a:t>
             </a:r>
             <a:endParaRPr lang="en-US" sz="1200" dirty="0"/>
           </a:p>
@@ -6720,261 +11234,24 @@
                   <a:srgbClr val="2F2415"/>
                 </a:solidFill>
               </a:rPr>
-              <a:t>Intrusion nocturne — notification immédiate</a:t>
+              <a:t>Saisons &amp; marchés — calendrier, prix marché, météo</a:t>
             </a:r>
             <a:endParaRPr lang="en-US" sz="1200" dirty="0"/>
           </a:p>
-        </p:txBody>
-      </p:sp>
-      <p:sp>
-        <p:nvSpPr>
-          <p:cNvPr id="8" name="Shape 5"/>
-          <p:cNvSpPr/>
-          <p:nvPr/>
-        </p:nvSpPr>
-        <p:spPr>
-          <a:xfrm>
-            <a:off x="5029200" y="4572000"/>
-            <a:ext cx="1645920" cy="914400"/>
-          </a:xfrm>
-          <a:prstGeom prst="roundRect">
-            <a:avLst>
-              <a:gd name="adj" fmla="val 10000"/>
-            </a:avLst>
-          </a:prstGeom>
-          <a:solidFill>
-            <a:srgbClr val="F0FDF4"/>
-          </a:solidFill>
-          <a:ln/>
-        </p:spPr>
-      </p:sp>
-      <p:sp>
-        <p:nvSpPr>
-          <p:cNvPr id="9" name="Text 6"/>
-          <p:cNvSpPr/>
-          <p:nvPr/>
-        </p:nvSpPr>
-        <p:spPr>
-          <a:xfrm>
-            <a:off x="5074920" y="4663440"/>
-            <a:ext cx="1554480" cy="182880"/>
-          </a:xfrm>
-          <a:prstGeom prst="rect">
-            <a:avLst/>
-          </a:prstGeom>
-          <a:noFill/>
-          <a:ln/>
-        </p:spPr>
-        <p:txBody>
-          <a:bodyPr wrap="square" rtlCol="0" anchor="ctr"/>
-          <a:lstStyle/>
-          <a:p>
-            <a:pPr algn="ctr" indent="0" marL="0">
-              <a:buNone/>
-            </a:pPr>
-            <a:r>
-              <a:rPr lang="en-US" sz="800" dirty="0">
-                <a:solidFill>
-                  <a:srgbClr val="8A7456"/>
-                </a:solidFill>
-              </a:rPr>
-              <a:t>Poulailler A</a:t>
-            </a:r>
-            <a:endParaRPr lang="en-US" sz="800" dirty="0"/>
-          </a:p>
-        </p:txBody>
-      </p:sp>
-      <p:sp>
-        <p:nvSpPr>
-          <p:cNvPr id="10" name="Text 7"/>
-          <p:cNvSpPr/>
-          <p:nvPr/>
-        </p:nvSpPr>
-        <p:spPr>
-          <a:xfrm>
-            <a:off x="5074920" y="4892040"/>
-            <a:ext cx="1554480" cy="411480"/>
-          </a:xfrm>
-          <a:prstGeom prst="rect">
-            <a:avLst/>
-          </a:prstGeom>
-          <a:noFill/>
-          <a:ln/>
-        </p:spPr>
-        <p:txBody>
-          <a:bodyPr wrap="square" rtlCol="0" anchor="ctr"/>
-          <a:lstStyle/>
-          <a:p>
-            <a:pPr algn="ctr" indent="0" marL="0">
-              <a:buNone/>
-            </a:pPr>
-            <a:r>
-              <a:rPr lang="en-US" sz="2200" b="1" dirty="0">
-                <a:solidFill>
-                  <a:srgbClr val="15803D"/>
-                </a:solidFill>
-                <a:latin typeface="Georgia" pitchFamily="34" charset="0"/>
-                <a:ea typeface="Georgia" pitchFamily="34" charset="-122"/>
-                <a:cs typeface="Georgia" pitchFamily="34" charset="-120"/>
-              </a:rPr>
-              <a:t>28°C</a:t>
-            </a:r>
-            <a:endParaRPr lang="en-US" sz="2200" dirty="0"/>
-          </a:p>
-        </p:txBody>
-      </p:sp>
-      <p:sp>
-        <p:nvSpPr>
-          <p:cNvPr id="11" name="Shape 8"/>
-          <p:cNvSpPr/>
-          <p:nvPr/>
-        </p:nvSpPr>
-        <p:spPr>
-          <a:xfrm>
-            <a:off x="6858000" y="4572000"/>
-            <a:ext cx="1645920" cy="914400"/>
-          </a:xfrm>
-          <a:prstGeom prst="roundRect">
-            <a:avLst>
-              <a:gd name="adj" fmla="val 10000"/>
-            </a:avLst>
-          </a:prstGeom>
-          <a:solidFill>
-            <a:srgbClr val="FFFBEB"/>
-          </a:solidFill>
-          <a:ln/>
-        </p:spPr>
-      </p:sp>
-      <p:sp>
-        <p:nvSpPr>
-          <p:cNvPr id="12" name="Text 9"/>
-          <p:cNvSpPr/>
-          <p:nvPr/>
-        </p:nvSpPr>
-        <p:spPr>
-          <a:xfrm>
-            <a:off x="6903720" y="4663440"/>
-            <a:ext cx="1554480" cy="182880"/>
-          </a:xfrm>
-          <a:prstGeom prst="rect">
-            <a:avLst/>
-          </a:prstGeom>
-          <a:noFill/>
-          <a:ln/>
-        </p:spPr>
-        <p:txBody>
-          <a:bodyPr wrap="square" rtlCol="0" anchor="ctr"/>
-          <a:lstStyle/>
-          <a:p>
-            <a:pPr algn="ctr" indent="0" marL="0">
-              <a:buNone/>
-            </a:pPr>
-            <a:r>
-              <a:rPr lang="en-US" sz="800" dirty="0">
-                <a:solidFill>
-                  <a:srgbClr val="8A7456"/>
-                </a:solidFill>
-              </a:rPr>
-              <a:t>Serre tomates</a:t>
-            </a:r>
-            <a:endParaRPr lang="en-US" sz="800" dirty="0"/>
-          </a:p>
-        </p:txBody>
-      </p:sp>
-      <p:sp>
-        <p:nvSpPr>
-          <p:cNvPr id="13" name="Text 10"/>
-          <p:cNvSpPr/>
-          <p:nvPr/>
-        </p:nvSpPr>
-        <p:spPr>
-          <a:xfrm>
-            <a:off x="6903720" y="4892040"/>
-            <a:ext cx="1554480" cy="411480"/>
-          </a:xfrm>
-          <a:prstGeom prst="rect">
-            <a:avLst/>
-          </a:prstGeom>
-          <a:noFill/>
-          <a:ln/>
-        </p:spPr>
-        <p:txBody>
-          <a:bodyPr wrap="square" rtlCol="0" anchor="ctr"/>
-          <a:lstStyle/>
-          <a:p>
-            <a:pPr algn="ctr" indent="0" marL="0">
-              <a:buNone/>
-            </a:pPr>
-            <a:r>
-              <a:rPr lang="en-US" sz="2200" b="1" dirty="0">
-                <a:solidFill>
-                  <a:srgbClr val="9A6B12"/>
-                </a:solidFill>
-                <a:latin typeface="Georgia" pitchFamily="34" charset="0"/>
-                <a:ea typeface="Georgia" pitchFamily="34" charset="-122"/>
-                <a:cs typeface="Georgia" pitchFamily="34" charset="-120"/>
-              </a:rPr>
-              <a:t>18% sol</a:t>
-            </a:r>
-            <a:endParaRPr lang="en-US" sz="2200" dirty="0"/>
-          </a:p>
-        </p:txBody>
-      </p:sp>
-      <p:sp>
-        <p:nvSpPr>
-          <p:cNvPr id="14" name="Shape 11"/>
-          <p:cNvSpPr/>
-          <p:nvPr/>
-        </p:nvSpPr>
-        <p:spPr>
-          <a:xfrm>
-            <a:off x="5029200" y="1051560"/>
-            <a:ext cx="3657600" cy="457200"/>
-          </a:xfrm>
-          <a:prstGeom prst="roundRect">
-            <a:avLst>
-              <a:gd name="adj" fmla="val 16000"/>
-            </a:avLst>
-          </a:prstGeom>
-          <a:solidFill>
-            <a:srgbClr val="FEF3C7"/>
-          </a:solidFill>
-          <a:ln/>
-        </p:spPr>
-      </p:sp>
-      <p:sp>
-        <p:nvSpPr>
-          <p:cNvPr id="15" name="Text 12"/>
-          <p:cNvSpPr/>
-          <p:nvPr/>
-        </p:nvSpPr>
-        <p:spPr>
-          <a:xfrm>
-            <a:off x="5120640" y="1115568"/>
-            <a:ext cx="3474720" cy="320040"/>
-          </a:xfrm>
-          <a:prstGeom prst="rect">
-            <a:avLst/>
-          </a:prstGeom>
-          <a:noFill/>
-          <a:ln/>
-        </p:spPr>
-        <p:txBody>
-          <a:bodyPr wrap="square" rtlCol="0" anchor="ctr"/>
-          <a:lstStyle/>
-          <a:p>
-            <a:pPr indent="0" marL="0">
-              <a:buNone/>
-            </a:pPr>
-            <a:r>
-              <a:rPr lang="en-US" sz="900" b="1" dirty="0">
-                <a:solidFill>
-                  <a:srgbClr val="92400E"/>
-                </a:solidFill>
-              </a:rPr>
-              <a:t>⚠ Chaleur détectée → tâche ventilation créée</a:t>
-            </a:r>
-            <a:endParaRPr lang="en-US" sz="900" dirty="0"/>
+          <a:p>
+            <a:pPr marL="342900" indent="-342900">
+              <a:buSzPct val="100000"/>
+              <a:buChar char="•"/>
+            </a:pPr>
+            <a:r>
+              <a:rPr lang="en-US" sz="1200" dirty="0">
+                <a:solidFill>
+                  <a:srgbClr val="2F2415"/>
+                </a:solidFill>
+              </a:rPr>
+              <a:t>Exports CSV pour réunions d'équipe et comité de direction</a:t>
+            </a:r>
+            <a:endParaRPr lang="en-US" sz="1200" dirty="0"/>
           </a:p>
         </p:txBody>
       </p:sp>
@@ -7064,7 +11341,7 @@
                   <a:srgbClr val="8A7456"/>
                 </a:solidFill>
               </a:rPr>
-              <a:t>08 / 14</a:t>
+              <a:t>08 / 22</a:t>
             </a:r>
             <a:endParaRPr lang="en-US" sz="800" dirty="0"/>
           </a:p>
@@ -7125,7 +11402,7 @@
                   <a:srgbClr val="9A6B12"/>
                 </a:solidFill>
               </a:rPr>
-              <a:t>Scénario démo</a:t>
+              <a:t>Élevage &amp; Cultures</a:t>
             </a:r>
             <a:endParaRPr lang="en-US" sz="1000" dirty="0"/>
           </a:p>
@@ -7164,7 +11441,7 @@
                 <a:ea typeface="Georgia" pitchFamily="34" charset="-122"/>
                 <a:cs typeface="Georgia" pitchFamily="34" charset="-120"/>
               </a:rPr>
-              <a:t>Une matinée type à la ferme</a:t>
+              <a:t>Production terrain couverte</a:t>
             </a:r>
             <a:endParaRPr lang="en-US" sz="2800" dirty="0"/>
           </a:p>
@@ -7172,461 +11449,83 @@
       </p:sp>
       <p:sp>
         <p:nvSpPr>
-          <p:cNvPr id="7" name="Shape 4"/>
-          <p:cNvSpPr/>
-          <p:nvPr/>
-        </p:nvSpPr>
-        <p:spPr>
-          <a:xfrm>
-            <a:off x="594360" y="1993392"/>
-            <a:ext cx="109728" cy="109728"/>
-          </a:xfrm>
-          <a:prstGeom prst="ellipse">
-            <a:avLst/>
-          </a:prstGeom>
-          <a:solidFill>
-            <a:srgbClr val="22C55E"/>
-          </a:solidFill>
-          <a:ln/>
-        </p:spPr>
-      </p:sp>
-      <p:sp>
-        <p:nvSpPr>
-          <p:cNvPr id="8" name="Text 5"/>
-          <p:cNvSpPr/>
-          <p:nvPr/>
-        </p:nvSpPr>
-        <p:spPr>
-          <a:xfrm>
-            <a:off x="822960" y="1920240"/>
-            <a:ext cx="7315200" cy="228600"/>
-          </a:xfrm>
-          <a:prstGeom prst="rect">
-            <a:avLst/>
-          </a:prstGeom>
-          <a:noFill/>
-          <a:ln/>
-        </p:spPr>
-        <p:txBody>
-          <a:bodyPr wrap="square" rtlCol="0" anchor="ctr"/>
-          <a:lstStyle/>
-          <a:p>
-            <a:pPr indent="0" marL="0">
-              <a:buNone/>
-            </a:pPr>
-            <a:r>
-              <a:rPr lang="en-US" sz="1100" b="1" dirty="0">
+          <p:cNvPr id="7" name="Text 4"/>
+          <p:cNvSpPr/>
+          <p:nvPr/>
+        </p:nvSpPr>
+        <p:spPr>
+          <a:xfrm>
+            <a:off x="548640" y="1920240"/>
+            <a:ext cx="8046720" cy="2560320"/>
+          </a:xfrm>
+          <a:prstGeom prst="rect">
+            <a:avLst/>
+          </a:prstGeom>
+          <a:noFill/>
+          <a:ln/>
+        </p:spPr>
+        <p:txBody>
+          <a:bodyPr wrap="square" rtlCol="0" anchor="t"/>
+          <a:lstStyle/>
+          <a:p>
+            <a:pPr marL="342900" indent="-342900">
+              <a:buSzPct val="100000"/>
+              <a:buChar char="•"/>
+            </a:pPr>
+            <a:r>
+              <a:rPr lang="en-US" sz="1200" dirty="0">
                 <a:solidFill>
                   <a:srgbClr val="2F2415"/>
                 </a:solidFill>
               </a:rPr>
-              <a:t>08h00 — Accueil</a:t>
-            </a:r>
-            <a:endParaRPr lang="en-US" sz="1100" dirty="0"/>
-          </a:p>
-        </p:txBody>
-      </p:sp>
-      <p:sp>
-        <p:nvSpPr>
-          <p:cNvPr id="9" name="Text 6"/>
-          <p:cNvSpPr/>
-          <p:nvPr/>
-        </p:nvSpPr>
-        <p:spPr>
-          <a:xfrm>
-            <a:off x="822960" y="2121408"/>
-            <a:ext cx="7315200" cy="274320"/>
-          </a:xfrm>
-          <a:prstGeom prst="rect">
-            <a:avLst/>
-          </a:prstGeom>
-          <a:noFill/>
-          <a:ln/>
-        </p:spPr>
-        <p:txBody>
-          <a:bodyPr wrap="square" rtlCol="0" anchor="ctr"/>
-          <a:lstStyle/>
-          <a:p>
-            <a:pPr indent="0" marL="0">
-              <a:buNone/>
-            </a:pPr>
-            <a:r>
-              <a:rPr lang="en-US" sz="900" dirty="0">
-                <a:solidFill>
-                  <a:srgbClr val="8A7456"/>
-                </a:solidFill>
-              </a:rPr>
-              <a:t>Cartes domaine, capteurs 28°C, conseil stock aliment bas.</a:t>
-            </a:r>
-            <a:endParaRPr lang="en-US" sz="900" dirty="0"/>
-          </a:p>
-        </p:txBody>
-      </p:sp>
-      <p:sp>
-        <p:nvSpPr>
-          <p:cNvPr id="10" name="Shape 7"/>
-          <p:cNvSpPr/>
-          <p:nvPr/>
-        </p:nvSpPr>
-        <p:spPr>
-          <a:xfrm>
-            <a:off x="594360" y="2560320"/>
-            <a:ext cx="109728" cy="109728"/>
-          </a:xfrm>
-          <a:prstGeom prst="ellipse">
-            <a:avLst/>
-          </a:prstGeom>
-          <a:solidFill>
-            <a:srgbClr val="22C55E"/>
-          </a:solidFill>
-          <a:ln/>
-        </p:spPr>
-      </p:sp>
-      <p:sp>
-        <p:nvSpPr>
-          <p:cNvPr id="11" name="Text 8"/>
-          <p:cNvSpPr/>
-          <p:nvPr/>
-        </p:nvSpPr>
-        <p:spPr>
-          <a:xfrm>
-            <a:off x="822960" y="2487168"/>
-            <a:ext cx="7315200" cy="228600"/>
-          </a:xfrm>
-          <a:prstGeom prst="rect">
-            <a:avLst/>
-          </a:prstGeom>
-          <a:noFill/>
-          <a:ln/>
-        </p:spPr>
-        <p:txBody>
-          <a:bodyPr wrap="square" rtlCol="0" anchor="ctr"/>
-          <a:lstStyle/>
-          <a:p>
-            <a:pPr indent="0" marL="0">
-              <a:buNone/>
-            </a:pPr>
-            <a:r>
-              <a:rPr lang="en-US" sz="1100" b="1" dirty="0">
+              <a:t>Élevage : lots chair/pondeuses, bovins/ovins, santé, reproduction, transformation</a:t>
+            </a:r>
+            <a:endParaRPr lang="en-US" sz="1200" dirty="0"/>
+          </a:p>
+          <a:p>
+            <a:pPr marL="342900" indent="-342900">
+              <a:buSzPct val="100000"/>
+              <a:buChar char="•"/>
+            </a:pPr>
+            <a:r>
+              <a:rPr lang="en-US" sz="1200" dirty="0">
                 <a:solidFill>
                   <a:srgbClr val="2F2415"/>
                 </a:solidFill>
               </a:rPr>
-              <a:t>08h15 — Hey Horizon</a:t>
-            </a:r>
-            <a:endParaRPr lang="en-US" sz="1100" dirty="0"/>
-          </a:p>
-        </p:txBody>
-      </p:sp>
-      <p:sp>
-        <p:nvSpPr>
-          <p:cNvPr id="12" name="Text 9"/>
-          <p:cNvSpPr/>
-          <p:nvPr/>
-        </p:nvSpPr>
-        <p:spPr>
-          <a:xfrm>
-            <a:off x="822960" y="2688336"/>
-            <a:ext cx="7315200" cy="274320"/>
-          </a:xfrm>
-          <a:prstGeom prst="rect">
-            <a:avLst/>
-          </a:prstGeom>
-          <a:noFill/>
-          <a:ln/>
-        </p:spPr>
-        <p:txBody>
-          <a:bodyPr wrap="square" rtlCol="0" anchor="ctr"/>
-          <a:lstStyle/>
-          <a:p>
-            <a:pPr indent="0" marL="0">
-              <a:buNone/>
-            </a:pPr>
-            <a:r>
-              <a:rPr lang="en-US" sz="900" dirty="0">
-                <a:solidFill>
-                  <a:srgbClr val="8A7456"/>
-                </a:solidFill>
-              </a:rPr>
-              <a:t>« Réception 20 sacs aliment AgroFeed 480 000 F » → validation.</a:t>
-            </a:r>
-            <a:endParaRPr lang="en-US" sz="900" dirty="0"/>
-          </a:p>
-        </p:txBody>
-      </p:sp>
-      <p:sp>
-        <p:nvSpPr>
-          <p:cNvPr id="13" name="Shape 10"/>
-          <p:cNvSpPr/>
-          <p:nvPr/>
-        </p:nvSpPr>
-        <p:spPr>
-          <a:xfrm>
-            <a:off x="594360" y="3127248"/>
-            <a:ext cx="109728" cy="109728"/>
-          </a:xfrm>
-          <a:prstGeom prst="ellipse">
-            <a:avLst/>
-          </a:prstGeom>
-          <a:solidFill>
-            <a:srgbClr val="22C55E"/>
-          </a:solidFill>
-          <a:ln/>
-        </p:spPr>
-      </p:sp>
-      <p:sp>
-        <p:nvSpPr>
-          <p:cNvPr id="14" name="Text 11"/>
-          <p:cNvSpPr/>
-          <p:nvPr/>
-        </p:nvSpPr>
-        <p:spPr>
-          <a:xfrm>
-            <a:off x="822960" y="3054096"/>
-            <a:ext cx="7315200" cy="228600"/>
-          </a:xfrm>
-          <a:prstGeom prst="rect">
-            <a:avLst/>
-          </a:prstGeom>
-          <a:noFill/>
-          <a:ln/>
-        </p:spPr>
-        <p:txBody>
-          <a:bodyPr wrap="square" rtlCol="0" anchor="ctr"/>
-          <a:lstStyle/>
-          <a:p>
-            <a:pPr indent="0" marL="0">
-              <a:buNone/>
-            </a:pPr>
-            <a:r>
-              <a:rPr lang="en-US" sz="1100" b="1" dirty="0">
+              <a:t>Production œufs, mortalité, pesée, alimentation liée au stock</a:t>
+            </a:r>
+            <a:endParaRPr lang="en-US" sz="1200" dirty="0"/>
+          </a:p>
+          <a:p>
+            <a:pPr marL="342900" indent="-342900">
+              <a:buSzPct val="100000"/>
+              <a:buChar char="•"/>
+            </a:pPr>
+            <a:r>
+              <a:rPr lang="en-US" sz="1200" dirty="0">
                 <a:solidFill>
                   <a:srgbClr val="2F2415"/>
                 </a:solidFill>
               </a:rPr>
-              <a:t>09h00 — Commercial</a:t>
-            </a:r>
-            <a:endParaRPr lang="en-US" sz="1100" dirty="0"/>
-          </a:p>
-        </p:txBody>
-      </p:sp>
-      <p:sp>
-        <p:nvSpPr>
-          <p:cNvPr id="15" name="Text 12"/>
-          <p:cNvSpPr/>
-          <p:nvPr/>
-        </p:nvSpPr>
-        <p:spPr>
-          <a:xfrm>
-            <a:off x="822960" y="3255264"/>
-            <a:ext cx="7315200" cy="274320"/>
-          </a:xfrm>
-          <a:prstGeom prst="rect">
-            <a:avLst/>
-          </a:prstGeom>
-          <a:noFill/>
-          <a:ln/>
-        </p:spPr>
-        <p:txBody>
-          <a:bodyPr wrap="square" rtlCol="0" anchor="ctr"/>
-          <a:lstStyle/>
-          <a:p>
-            <a:pPr indent="0" marL="0">
-              <a:buNone/>
-            </a:pPr>
-            <a:r>
-              <a:rPr lang="en-US" sz="900" dirty="0">
-                <a:solidFill>
-                  <a:srgbClr val="8A7456"/>
-                </a:solidFill>
-              </a:rPr>
-              <a:t>Vente restaurant, encaissement Orange Money, marge visible.</a:t>
-            </a:r>
-            <a:endParaRPr lang="en-US" sz="900" dirty="0"/>
-          </a:p>
-        </p:txBody>
-      </p:sp>
-      <p:sp>
-        <p:nvSpPr>
-          <p:cNvPr id="16" name="Shape 13"/>
-          <p:cNvSpPr/>
-          <p:nvPr/>
-        </p:nvSpPr>
-        <p:spPr>
-          <a:xfrm>
-            <a:off x="594360" y="3694176"/>
-            <a:ext cx="109728" cy="109728"/>
-          </a:xfrm>
-          <a:prstGeom prst="ellipse">
-            <a:avLst/>
-          </a:prstGeom>
-          <a:solidFill>
-            <a:srgbClr val="22C55E"/>
-          </a:solidFill>
-          <a:ln/>
-        </p:spPr>
-      </p:sp>
-      <p:sp>
-        <p:nvSpPr>
-          <p:cNvPr id="17" name="Text 14"/>
-          <p:cNvSpPr/>
-          <p:nvPr/>
-        </p:nvSpPr>
-        <p:spPr>
-          <a:xfrm>
-            <a:off x="822960" y="3621024"/>
-            <a:ext cx="7315200" cy="228600"/>
-          </a:xfrm>
-          <a:prstGeom prst="rect">
-            <a:avLst/>
-          </a:prstGeom>
-          <a:noFill/>
-          <a:ln/>
-        </p:spPr>
-        <p:txBody>
-          <a:bodyPr wrap="square" rtlCol="0" anchor="ctr"/>
-          <a:lstStyle/>
-          <a:p>
-            <a:pPr indent="0" marL="0">
-              <a:buNone/>
-            </a:pPr>
-            <a:r>
-              <a:rPr lang="en-US" sz="1100" b="1" dirty="0">
+              <a:t>Cultures : parcelles, campagnes, récoltes → stock et commercial</a:t>
+            </a:r>
+            <a:endParaRPr lang="en-US" sz="1200" dirty="0"/>
+          </a:p>
+          <a:p>
+            <a:pPr marL="342900" indent="-342900">
+              <a:buSzPct val="100000"/>
+              <a:buChar char="•"/>
+            </a:pPr>
+            <a:r>
+              <a:rPr lang="en-US" sz="1200" dirty="0">
                 <a:solidFill>
                   <a:srgbClr val="2F2415"/>
                 </a:solidFill>
               </a:rPr>
-              <a:t>10h30 — Smart Farm</a:t>
-            </a:r>
-            <a:endParaRPr lang="en-US" sz="1100" dirty="0"/>
-          </a:p>
-        </p:txBody>
-      </p:sp>
-      <p:sp>
-        <p:nvSpPr>
-          <p:cNvPr id="18" name="Text 15"/>
-          <p:cNvSpPr/>
-          <p:nvPr/>
-        </p:nvSpPr>
-        <p:spPr>
-          <a:xfrm>
-            <a:off x="822960" y="3822192"/>
-            <a:ext cx="7315200" cy="274320"/>
-          </a:xfrm>
-          <a:prstGeom prst="rect">
-            <a:avLst/>
-          </a:prstGeom>
-          <a:noFill/>
-          <a:ln/>
-        </p:spPr>
-        <p:txBody>
-          <a:bodyPr wrap="square" rtlCol="0" anchor="ctr"/>
-          <a:lstStyle/>
-          <a:p>
-            <a:pPr indent="0" marL="0">
-              <a:buNone/>
-            </a:pPr>
-            <a:r>
-              <a:rPr lang="en-US" sz="900" dirty="0">
-                <a:solidFill>
-                  <a:srgbClr val="8A7456"/>
-                </a:solidFill>
-              </a:rPr>
-              <a:t>Alerte chaleur → Activité &amp; Suivi « À traiter maintenant ».</a:t>
-            </a:r>
-            <a:endParaRPr lang="en-US" sz="900" dirty="0"/>
-          </a:p>
-        </p:txBody>
-      </p:sp>
-      <p:sp>
-        <p:nvSpPr>
-          <p:cNvPr id="19" name="Shape 16"/>
-          <p:cNvSpPr/>
-          <p:nvPr/>
-        </p:nvSpPr>
-        <p:spPr>
-          <a:xfrm>
-            <a:off x="594360" y="4261104"/>
-            <a:ext cx="109728" cy="109728"/>
-          </a:xfrm>
-          <a:prstGeom prst="ellipse">
-            <a:avLst/>
-          </a:prstGeom>
-          <a:solidFill>
-            <a:srgbClr val="22C55E"/>
-          </a:solidFill>
-          <a:ln/>
-        </p:spPr>
-      </p:sp>
-      <p:sp>
-        <p:nvSpPr>
-          <p:cNvPr id="20" name="Text 17"/>
-          <p:cNvSpPr/>
-          <p:nvPr/>
-        </p:nvSpPr>
-        <p:spPr>
-          <a:xfrm>
-            <a:off x="822960" y="4187952"/>
-            <a:ext cx="7315200" cy="228600"/>
-          </a:xfrm>
-          <a:prstGeom prst="rect">
-            <a:avLst/>
-          </a:prstGeom>
-          <a:noFill/>
-          <a:ln/>
-        </p:spPr>
-        <p:txBody>
-          <a:bodyPr wrap="square" rtlCol="0" anchor="ctr"/>
-          <a:lstStyle/>
-          <a:p>
-            <a:pPr indent="0" marL="0">
-              <a:buNone/>
-            </a:pPr>
-            <a:r>
-              <a:rPr lang="en-US" sz="1100" b="1" dirty="0">
-                <a:solidFill>
-                  <a:srgbClr val="2F2415"/>
-                </a:solidFill>
-              </a:rPr>
-              <a:t>Soir — Journal</a:t>
-            </a:r>
-            <a:endParaRPr lang="en-US" sz="1100" dirty="0"/>
-          </a:p>
-        </p:txBody>
-      </p:sp>
-      <p:sp>
-        <p:nvSpPr>
-          <p:cNvPr id="21" name="Text 18"/>
-          <p:cNvSpPr/>
-          <p:nvPr/>
-        </p:nvSpPr>
-        <p:spPr>
-          <a:xfrm>
-            <a:off x="822960" y="4389120"/>
-            <a:ext cx="7315200" cy="274320"/>
-          </a:xfrm>
-          <a:prstGeom prst="rect">
-            <a:avLst/>
-          </a:prstGeom>
-          <a:noFill/>
-          <a:ln/>
-        </p:spPr>
-        <p:txBody>
-          <a:bodyPr wrap="square" rtlCol="0" anchor="ctr"/>
-          <a:lstStyle/>
-          <a:p>
-            <a:pPr indent="0" marL="0">
-              <a:buNone/>
-            </a:pPr>
-            <a:r>
-              <a:rPr lang="en-US" sz="900" dirty="0">
-                <a:solidFill>
-                  <a:srgbClr val="8A7456"/>
-                </a:solidFill>
-              </a:rPr>
-              <a:t>Vente, réception, paiement, soin : tout est tracé.</a:t>
-            </a:r>
-            <a:endParaRPr lang="en-US" sz="900" dirty="0"/>
+              <a:t>Économie circulaire : fumier, compost, lien élevage ↔ cultures</a:t>
+            </a:r>
+            <a:endParaRPr lang="en-US" sz="1200" dirty="0"/>
           </a:p>
         </p:txBody>
       </p:sp>
@@ -7644,7 +11543,7 @@
     <p:bg>
       <p:bgPr>
         <a:solidFill>
-          <a:srgbClr val="041A0D"/>
+          <a:srgbClr val="FFFDF8"/>
         </a:solidFill>
       </p:bgPr>
     </p:bg>
@@ -7713,10 +11612,10 @@
             <a:r>
               <a:rPr lang="en-US" sz="800" b="1" dirty="0">
                 <a:solidFill>
-                  <a:srgbClr val="6B9A7A"/>
-                </a:solidFill>
-              </a:rPr>
-              <a:t>09 / 14</a:t>
+                  <a:srgbClr val="8A7456"/>
+                </a:solidFill>
+              </a:rPr>
+              <a:t>09 / 22</a:t>
             </a:r>
             <a:endParaRPr lang="en-US" sz="800" dirty="0"/>
           </a:p>
@@ -7774,10 +11673,10 @@
             <a:r>
               <a:rPr lang="en-US" sz="1000" b="1" spc="300" kern="0" dirty="0">
                 <a:solidFill>
-                  <a:srgbClr val="B8954A"/>
-                </a:solidFill>
-              </a:rPr>
-              <a:t>Impact</a:t>
+                  <a:srgbClr val="9A6B12"/>
+                </a:solidFill>
+              </a:rPr>
+              <a:t>Commercial &amp; Stock</a:t>
             </a:r>
             <a:endParaRPr lang="en-US" sz="1000" dirty="0"/>
           </a:p>
@@ -7810,13 +11709,13 @@
             <a:r>
               <a:rPr lang="en-US" sz="2800" b="1" dirty="0">
                 <a:solidFill>
-                  <a:srgbClr val="FFFFFF"/>
+                  <a:srgbClr val="052E16"/>
                 </a:solidFill>
                 <a:latin typeface="Georgia" pitchFamily="34" charset="0"/>
                 <a:ea typeface="Georgia" pitchFamily="34" charset="-122"/>
                 <a:cs typeface="Georgia" pitchFamily="34" charset="-120"/>
               </a:rPr>
-              <a:t>Bénéfices mesurables</a:t>
+              <a:t>De la commande à la marge</a:t>
             </a:r>
             <a:endParaRPr lang="en-US" sz="2800" dirty="0"/>
           </a:p>
@@ -7824,461 +11723,83 @@
       </p:sp>
       <p:sp>
         <p:nvSpPr>
-          <p:cNvPr id="7" name="Shape 4"/>
-          <p:cNvSpPr/>
-          <p:nvPr/>
-        </p:nvSpPr>
-        <p:spPr>
-          <a:xfrm>
-            <a:off x="731520" y="3017520"/>
-            <a:ext cx="1097280" cy="457200"/>
-          </a:xfrm>
-          <a:prstGeom prst="rect">
-            <a:avLst/>
-          </a:prstGeom>
-          <a:solidFill>
-            <a:srgbClr val="22C55E"/>
-          </a:solidFill>
-          <a:ln/>
-        </p:spPr>
-      </p:sp>
-      <p:sp>
-        <p:nvSpPr>
-          <p:cNvPr id="8" name="Text 5"/>
-          <p:cNvSpPr/>
-          <p:nvPr/>
-        </p:nvSpPr>
-        <p:spPr>
-          <a:xfrm>
-            <a:off x="731520" y="1828800"/>
-            <a:ext cx="1097280" cy="274320"/>
-          </a:xfrm>
-          <a:prstGeom prst="rect">
-            <a:avLst/>
-          </a:prstGeom>
-          <a:noFill/>
-          <a:ln/>
-        </p:spPr>
-        <p:txBody>
-          <a:bodyPr wrap="square" rtlCol="0" anchor="ctr"/>
-          <a:lstStyle/>
-          <a:p>
-            <a:pPr algn="ctr" indent="0" marL="0">
-              <a:buNone/>
-            </a:pPr>
-            <a:r>
-              <a:rPr lang="en-US" sz="1200" b="1" dirty="0">
-                <a:solidFill>
-                  <a:srgbClr val="FFFFFF"/>
-                </a:solidFill>
-              </a:rPr>
-              <a:t>−50%</a:t>
+          <p:cNvPr id="7" name="Text 4"/>
+          <p:cNvSpPr/>
+          <p:nvPr/>
+        </p:nvSpPr>
+        <p:spPr>
+          <a:xfrm>
+            <a:off x="548640" y="1920240"/>
+            <a:ext cx="8046720" cy="2560320"/>
+          </a:xfrm>
+          <a:prstGeom prst="rect">
+            <a:avLst/>
+          </a:prstGeom>
+          <a:noFill/>
+          <a:ln/>
+        </p:spPr>
+        <p:txBody>
+          <a:bodyPr wrap="square" rtlCol="0" anchor="t"/>
+          <a:lstStyle/>
+          <a:p>
+            <a:pPr marL="342900" indent="-342900">
+              <a:buSzPct val="100000"/>
+              <a:buChar char="•"/>
+            </a:pPr>
+            <a:r>
+              <a:rPr lang="en-US" sz="1200" dirty="0">
+                <a:solidFill>
+                  <a:srgbClr val="2F2415"/>
+                </a:solidFill>
+              </a:rPr>
+              <a:t>Vente → livraison → paiement → marge visible immédiatement</a:t>
             </a:r>
             <a:endParaRPr lang="en-US" sz="1200" dirty="0"/>
           </a:p>
-        </p:txBody>
-      </p:sp>
-      <p:sp>
-        <p:nvSpPr>
-          <p:cNvPr id="9" name="Text 6"/>
-          <p:cNvSpPr/>
-          <p:nvPr/>
-        </p:nvSpPr>
-        <p:spPr>
-          <a:xfrm>
-            <a:off x="640080" y="3611880"/>
-            <a:ext cx="1280160" cy="411480"/>
-          </a:xfrm>
-          <a:prstGeom prst="rect">
-            <a:avLst/>
-          </a:prstGeom>
-          <a:noFill/>
-          <a:ln/>
-        </p:spPr>
-        <p:txBody>
-          <a:bodyPr wrap="square" rtlCol="0" anchor="ctr"/>
-          <a:lstStyle/>
-          <a:p>
-            <a:pPr algn="ctr" indent="0" marL="0">
-              <a:buNone/>
-            </a:pPr>
-            <a:r>
-              <a:rPr lang="en-US" sz="800" dirty="0">
-                <a:solidFill>
-                  <a:srgbClr val="C8E6C9"/>
-                </a:solidFill>
-              </a:rPr>
-              <a:t>Temps de saisie</a:t>
-            </a:r>
-            <a:endParaRPr lang="en-US" sz="800" dirty="0"/>
-          </a:p>
-        </p:txBody>
-      </p:sp>
-      <p:sp>
-        <p:nvSpPr>
-          <p:cNvPr id="10" name="Shape 7"/>
-          <p:cNvSpPr/>
-          <p:nvPr/>
-        </p:nvSpPr>
-        <p:spPr>
-          <a:xfrm>
-            <a:off x="2331720" y="2697480"/>
-            <a:ext cx="1097280" cy="777240"/>
-          </a:xfrm>
-          <a:prstGeom prst="rect">
-            <a:avLst/>
-          </a:prstGeom>
-          <a:solidFill>
-            <a:srgbClr val="E8A317"/>
-          </a:solidFill>
-          <a:ln/>
-        </p:spPr>
-      </p:sp>
-      <p:sp>
-        <p:nvSpPr>
-          <p:cNvPr id="11" name="Text 8"/>
-          <p:cNvSpPr/>
-          <p:nvPr/>
-        </p:nvSpPr>
-        <p:spPr>
-          <a:xfrm>
-            <a:off x="2331720" y="1828800"/>
-            <a:ext cx="1097280" cy="274320"/>
-          </a:xfrm>
-          <a:prstGeom prst="rect">
-            <a:avLst/>
-          </a:prstGeom>
-          <a:noFill/>
-          <a:ln/>
-        </p:spPr>
-        <p:txBody>
-          <a:bodyPr wrap="square" rtlCol="0" anchor="ctr"/>
-          <a:lstStyle/>
-          <a:p>
-            <a:pPr algn="ctr" indent="0" marL="0">
-              <a:buNone/>
-            </a:pPr>
-            <a:r>
-              <a:rPr lang="en-US" sz="1200" b="1" dirty="0">
-                <a:solidFill>
-                  <a:srgbClr val="FFFFFF"/>
-                </a:solidFill>
-              </a:rPr>
-              <a:t>+100%</a:t>
+          <a:p>
+            <a:pPr marL="342900" indent="-342900">
+              <a:buSzPct val="100000"/>
+              <a:buChar char="•"/>
+            </a:pPr>
+            <a:r>
+              <a:rPr lang="en-US" sz="1200" dirty="0">
+                <a:solidFill>
+                  <a:srgbClr val="2F2415"/>
+                </a:solidFill>
+              </a:rPr>
+              <a:t>Clients, créances, relances WhatsApp, abonnements récurrents</a:t>
             </a:r>
             <a:endParaRPr lang="en-US" sz="1200" dirty="0"/>
           </a:p>
-        </p:txBody>
-      </p:sp>
-      <p:sp>
-        <p:nvSpPr>
-          <p:cNvPr id="12" name="Text 9"/>
-          <p:cNvSpPr/>
-          <p:nvPr/>
-        </p:nvSpPr>
-        <p:spPr>
-          <a:xfrm>
-            <a:off x="2240280" y="3611880"/>
-            <a:ext cx="1280160" cy="411480"/>
-          </a:xfrm>
-          <a:prstGeom prst="rect">
-            <a:avLst/>
-          </a:prstGeom>
-          <a:noFill/>
-          <a:ln/>
-        </p:spPr>
-        <p:txBody>
-          <a:bodyPr wrap="square" rtlCol="0" anchor="ctr"/>
-          <a:lstStyle/>
-          <a:p>
-            <a:pPr algn="ctr" indent="0" marL="0">
-              <a:buNone/>
-            </a:pPr>
-            <a:r>
-              <a:rPr lang="en-US" sz="800" dirty="0">
-                <a:solidFill>
-                  <a:srgbClr val="C8E6C9"/>
-                </a:solidFill>
-              </a:rPr>
-              <a:t>Visibilité trésorerie</a:t>
-            </a:r>
-            <a:endParaRPr lang="en-US" sz="800" dirty="0"/>
-          </a:p>
-        </p:txBody>
-      </p:sp>
-      <p:sp>
-        <p:nvSpPr>
-          <p:cNvPr id="13" name="Shape 10"/>
-          <p:cNvSpPr/>
-          <p:nvPr/>
-        </p:nvSpPr>
-        <p:spPr>
-          <a:xfrm>
-            <a:off x="3931920" y="2377440"/>
-            <a:ext cx="1097280" cy="1097280"/>
-          </a:xfrm>
-          <a:prstGeom prst="rect">
-            <a:avLst/>
-          </a:prstGeom>
-          <a:solidFill>
-            <a:srgbClr val="22C55E"/>
-          </a:solidFill>
-          <a:ln/>
-        </p:spPr>
-      </p:sp>
-      <p:sp>
-        <p:nvSpPr>
-          <p:cNvPr id="14" name="Text 11"/>
-          <p:cNvSpPr/>
-          <p:nvPr/>
-        </p:nvSpPr>
-        <p:spPr>
-          <a:xfrm>
-            <a:off x="3931920" y="1828800"/>
-            <a:ext cx="1097280" cy="274320"/>
-          </a:xfrm>
-          <a:prstGeom prst="rect">
-            <a:avLst/>
-          </a:prstGeom>
-          <a:noFill/>
-          <a:ln/>
-        </p:spPr>
-        <p:txBody>
-          <a:bodyPr wrap="square" rtlCol="0" anchor="ctr"/>
-          <a:lstStyle/>
-          <a:p>
-            <a:pPr algn="ctr" indent="0" marL="0">
-              <a:buNone/>
-            </a:pPr>
-            <a:r>
-              <a:rPr lang="en-US" sz="1200" b="1" dirty="0">
-                <a:solidFill>
-                  <a:srgbClr val="FFFFFF"/>
-                </a:solidFill>
-              </a:rPr>
-              <a:t>−30%</a:t>
+          <a:p>
+            <a:pPr marL="342900" indent="-342900">
+              <a:buSzPct val="100000"/>
+              <a:buChar char="•"/>
+            </a:pPr>
+            <a:r>
+              <a:rPr lang="en-US" sz="1200" dirty="0">
+                <a:solidFill>
+                  <a:srgbClr val="2F2415"/>
+                </a:solidFill>
+              </a:rPr>
+              <a:t>Inventaire multi-emplacements, CMUP, seuils, DLC, ruptures</a:t>
             </a:r>
             <a:endParaRPr lang="en-US" sz="1200" dirty="0"/>
           </a:p>
-        </p:txBody>
-      </p:sp>
-      <p:sp>
-        <p:nvSpPr>
-          <p:cNvPr id="15" name="Text 12"/>
-          <p:cNvSpPr/>
-          <p:nvPr/>
-        </p:nvSpPr>
-        <p:spPr>
-          <a:xfrm>
-            <a:off x="3840480" y="3611880"/>
-            <a:ext cx="1280160" cy="411480"/>
-          </a:xfrm>
-          <a:prstGeom prst="rect">
-            <a:avLst/>
-          </a:prstGeom>
-          <a:noFill/>
-          <a:ln/>
-        </p:spPr>
-        <p:txBody>
-          <a:bodyPr wrap="square" rtlCol="0" anchor="ctr"/>
-          <a:lstStyle/>
-          <a:p>
-            <a:pPr algn="ctr" indent="0" marL="0">
-              <a:buNone/>
-            </a:pPr>
-            <a:r>
-              <a:rPr lang="en-US" sz="800" dirty="0">
-                <a:solidFill>
-                  <a:srgbClr val="C8E6C9"/>
-                </a:solidFill>
-              </a:rPr>
-              <a:t>Ruptures stock</a:t>
-            </a:r>
-            <a:endParaRPr lang="en-US" sz="800" dirty="0"/>
-          </a:p>
-        </p:txBody>
-      </p:sp>
-      <p:sp>
-        <p:nvSpPr>
-          <p:cNvPr id="16" name="Shape 13"/>
-          <p:cNvSpPr/>
-          <p:nvPr/>
-        </p:nvSpPr>
-        <p:spPr>
-          <a:xfrm>
-            <a:off x="5532120" y="3017520"/>
-            <a:ext cx="1097280" cy="457200"/>
-          </a:xfrm>
-          <a:prstGeom prst="rect">
-            <a:avLst/>
-          </a:prstGeom>
-          <a:solidFill>
-            <a:srgbClr val="E8A317"/>
-          </a:solidFill>
-          <a:ln/>
-        </p:spPr>
-      </p:sp>
-      <p:sp>
-        <p:nvSpPr>
-          <p:cNvPr id="17" name="Text 14"/>
-          <p:cNvSpPr/>
-          <p:nvPr/>
-        </p:nvSpPr>
-        <p:spPr>
-          <a:xfrm>
-            <a:off x="5532120" y="1828800"/>
-            <a:ext cx="1097280" cy="274320"/>
-          </a:xfrm>
-          <a:prstGeom prst="rect">
-            <a:avLst/>
-          </a:prstGeom>
-          <a:noFill/>
-          <a:ln/>
-        </p:spPr>
-        <p:txBody>
-          <a:bodyPr wrap="square" rtlCol="0" anchor="ctr"/>
-          <a:lstStyle/>
-          <a:p>
-            <a:pPr algn="ctr" indent="0" marL="0">
-              <a:buNone/>
-            </a:pPr>
-            <a:r>
-              <a:rPr lang="en-US" sz="1200" b="1" dirty="0">
-                <a:solidFill>
-                  <a:srgbClr val="FFFFFF"/>
-                </a:solidFill>
-              </a:rPr>
-              <a:t>24/7</a:t>
+          <a:p>
+            <a:pPr marL="342900" indent="-342900">
+              <a:buSzPct val="100000"/>
+              <a:buChar char="•"/>
+            </a:pPr>
+            <a:r>
+              <a:rPr lang="en-US" sz="1200" dirty="0">
+                <a:solidFill>
+                  <a:srgbClr val="2F2415"/>
+                </a:solidFill>
+              </a:rPr>
+              <a:t>Achats fournisseurs, dettes, réceptions en un flux</a:t>
             </a:r>
             <a:endParaRPr lang="en-US" sz="1200" dirty="0"/>
-          </a:p>
-        </p:txBody>
-      </p:sp>
-      <p:sp>
-        <p:nvSpPr>
-          <p:cNvPr id="18" name="Text 15"/>
-          <p:cNvSpPr/>
-          <p:nvPr/>
-        </p:nvSpPr>
-        <p:spPr>
-          <a:xfrm>
-            <a:off x="5440680" y="3611880"/>
-            <a:ext cx="1280160" cy="411480"/>
-          </a:xfrm>
-          <a:prstGeom prst="rect">
-            <a:avLst/>
-          </a:prstGeom>
-          <a:noFill/>
-          <a:ln/>
-        </p:spPr>
-        <p:txBody>
-          <a:bodyPr wrap="square" rtlCol="0" anchor="ctr"/>
-          <a:lstStyle/>
-          <a:p>
-            <a:pPr algn="ctr" indent="0" marL="0">
-              <a:buNone/>
-            </a:pPr>
-            <a:r>
-              <a:rPr lang="en-US" sz="800" dirty="0">
-                <a:solidFill>
-                  <a:srgbClr val="C8E6C9"/>
-                </a:solidFill>
-              </a:rPr>
-              <a:t>Surveillance capteurs</a:t>
-            </a:r>
-            <a:endParaRPr lang="en-US" sz="800" dirty="0"/>
-          </a:p>
-        </p:txBody>
-      </p:sp>
-      <p:sp>
-        <p:nvSpPr>
-          <p:cNvPr id="19" name="Shape 16"/>
-          <p:cNvSpPr/>
-          <p:nvPr/>
-        </p:nvSpPr>
-        <p:spPr>
-          <a:xfrm>
-            <a:off x="7132320" y="2697480"/>
-            <a:ext cx="1097280" cy="777240"/>
-          </a:xfrm>
-          <a:prstGeom prst="rect">
-            <a:avLst/>
-          </a:prstGeom>
-          <a:solidFill>
-            <a:srgbClr val="22C55E"/>
-          </a:solidFill>
-          <a:ln/>
-        </p:spPr>
-      </p:sp>
-      <p:sp>
-        <p:nvSpPr>
-          <p:cNvPr id="20" name="Text 17"/>
-          <p:cNvSpPr/>
-          <p:nvPr/>
-        </p:nvSpPr>
-        <p:spPr>
-          <a:xfrm>
-            <a:off x="7132320" y="1828800"/>
-            <a:ext cx="1097280" cy="274320"/>
-          </a:xfrm>
-          <a:prstGeom prst="rect">
-            <a:avLst/>
-          </a:prstGeom>
-          <a:noFill/>
-          <a:ln/>
-        </p:spPr>
-        <p:txBody>
-          <a:bodyPr wrap="square" rtlCol="0" anchor="ctr"/>
-          <a:lstStyle/>
-          <a:p>
-            <a:pPr algn="ctr" indent="0" marL="0">
-              <a:buNone/>
-            </a:pPr>
-            <a:r>
-              <a:rPr lang="en-US" sz="1200" b="1" dirty="0">
-                <a:solidFill>
-                  <a:srgbClr val="FFFFFF"/>
-                </a:solidFill>
-              </a:rPr>
-              <a:t>1 clic</a:t>
-            </a:r>
-            <a:endParaRPr lang="en-US" sz="1200" dirty="0"/>
-          </a:p>
-        </p:txBody>
-      </p:sp>
-      <p:sp>
-        <p:nvSpPr>
-          <p:cNvPr id="21" name="Text 18"/>
-          <p:cNvSpPr/>
-          <p:nvPr/>
-        </p:nvSpPr>
-        <p:spPr>
-          <a:xfrm>
-            <a:off x="7040880" y="3611880"/>
-            <a:ext cx="1280160" cy="411480"/>
-          </a:xfrm>
-          <a:prstGeom prst="rect">
-            <a:avLst/>
-          </a:prstGeom>
-          <a:noFill/>
-          <a:ln/>
-        </p:spPr>
-        <p:txBody>
-          <a:bodyPr wrap="square" rtlCol="0" anchor="ctr"/>
-          <a:lstStyle/>
-          <a:p>
-            <a:pPr algn="ctr" indent="0" marL="0">
-              <a:buNone/>
-            </a:pPr>
-            <a:r>
-              <a:rPr lang="en-US" sz="800" dirty="0">
-                <a:solidFill>
-                  <a:srgbClr val="C8E6C9"/>
-                </a:solidFill>
-              </a:rPr>
-              <a:t>Marge par vente</a:t>
-            </a:r>
-            <a:endParaRPr lang="en-US" sz="800" dirty="0"/>
           </a:p>
         </p:txBody>
       </p:sp>
